--- a/국내 지역별 태양광 발전 효율 분석 및 최적화 전략.pptx
+++ b/국내 지역별 태양광 발전 효율 분석 및 최적화 전략.pptx
@@ -8,19 +8,18 @@
     <p:sldId id="256" r:id="rId2"/>
     <p:sldId id="257" r:id="rId3"/>
     <p:sldId id="268" r:id="rId4"/>
-    <p:sldId id="272" r:id="rId5"/>
-    <p:sldId id="258" r:id="rId6"/>
-    <p:sldId id="259" r:id="rId7"/>
-    <p:sldId id="269" r:id="rId8"/>
-    <p:sldId id="270" r:id="rId9"/>
-    <p:sldId id="260" r:id="rId10"/>
-    <p:sldId id="261" r:id="rId11"/>
-    <p:sldId id="262" r:id="rId12"/>
-    <p:sldId id="263" r:id="rId13"/>
-    <p:sldId id="264" r:id="rId14"/>
-    <p:sldId id="265" r:id="rId15"/>
-    <p:sldId id="266" r:id="rId16"/>
-    <p:sldId id="267" r:id="rId17"/>
+    <p:sldId id="273" r:id="rId5"/>
+    <p:sldId id="259" r:id="rId6"/>
+    <p:sldId id="269" r:id="rId7"/>
+    <p:sldId id="270" r:id="rId8"/>
+    <p:sldId id="260" r:id="rId9"/>
+    <p:sldId id="261" r:id="rId10"/>
+    <p:sldId id="262" r:id="rId11"/>
+    <p:sldId id="263" r:id="rId12"/>
+    <p:sldId id="264" r:id="rId13"/>
+    <p:sldId id="265" r:id="rId14"/>
+    <p:sldId id="266" r:id="rId15"/>
+    <p:sldId id="267" r:id="rId16"/>
   </p:sldIdLst>
   <p:sldSz cx="24384000" cy="13716000"/>
   <p:notesSz cx="6858000" cy="9144000"/>
@@ -3502,15 +3501,20 @@
           <a:bodyPr lIns="0" tIns="89745" rIns="0" bIns="89745" anchor="ctr"/>
           <a:lstStyle/>
           <a:p>
-            <a:pPr lvl="0" algn="l">
-              <a:lnSpc>
-                <a:spcPct val="100000"/>
-              </a:lnSpc>
+            <a:pPr lvl="0">
               <a:defRPr/>
             </a:pPr>
             <a:r>
               <a:rPr lang="ko-KR" altLang="en-US" sz="4000" dirty="0"/>
-              <a:t>데이터 기반의 온도계수 분석과 지역별 맞춤형 로드맵 제안</a:t>
+              <a:t>탄소중립 시대</a:t>
+            </a:r>
+            <a:r>
+              <a:rPr lang="en-US" altLang="ko-KR" sz="4000" dirty="0"/>
+              <a:t>, </a:t>
+            </a:r>
+            <a:r>
+              <a:rPr lang="ko-KR" altLang="en-US" sz="4000" dirty="0"/>
+              <a:t>지역 맞춤형 태양광 발전 효율화 방안</a:t>
             </a:r>
             <a:endParaRPr lang="ko-KR" altLang="en-US" sz="4000" b="0" i="0" u="none" strike="noStrike" spc="-71" dirty="0">
               <a:solidFill>
@@ -3538,1226 +3542,6 @@
 </file>
 
 <file path=ppt/slides/slide10.xml><?xml version="1.0" encoding="utf-8"?>
-<p:sld xmlns:a="http://schemas.openxmlformats.org/drawingml/2006/main" xmlns:r="http://schemas.openxmlformats.org/officeDocument/2006/relationships" xmlns:p="http://schemas.openxmlformats.org/presentationml/2006/main">
-  <p:cSld>
-    <p:bg>
-      <p:bgPr>
-        <a:solidFill>
-          <a:srgbClr val="E4E5EB"/>
-        </a:solidFill>
-        <a:effectLst/>
-      </p:bgPr>
-    </p:bg>
-    <p:spTree>
-      <p:nvGrpSpPr>
-        <p:cNvPr id="1" name=""/>
-        <p:cNvGrpSpPr/>
-        <p:nvPr/>
-      </p:nvGrpSpPr>
-      <p:grpSpPr>
-        <a:xfrm>
-          <a:off x="0" y="0"/>
-          <a:ext cx="0" cy="0"/>
-          <a:chOff x="0" y="0"/>
-          <a:chExt cx="0" cy="0"/>
-        </a:xfrm>
-      </p:grpSpPr>
-      <p:pic>
-        <p:nvPicPr>
-          <p:cNvPr id="2" name="Picture 2"/>
-          <p:cNvPicPr>
-            <a:picLocks noChangeAspect="1"/>
-          </p:cNvPicPr>
-          <p:nvPr/>
-        </p:nvPicPr>
-        <p:blipFill rotWithShape="1">
-          <a:blip r:embed="rId2"/>
-          <a:stretch>
-            <a:fillRect/>
-          </a:stretch>
-        </p:blipFill>
-        <p:spPr>
-          <a:xfrm>
-            <a:off x="889000" y="736600"/>
-            <a:ext cx="22606000" cy="3695700"/>
-          </a:xfrm>
-          <a:prstGeom prst="rect">
-            <a:avLst/>
-          </a:prstGeom>
-        </p:spPr>
-      </p:pic>
-      <p:pic>
-        <p:nvPicPr>
-          <p:cNvPr id="3" name="Picture 3"/>
-          <p:cNvPicPr>
-            <a:picLocks noChangeAspect="1"/>
-          </p:cNvPicPr>
-          <p:nvPr/>
-        </p:nvPicPr>
-        <p:blipFill rotWithShape="1">
-          <a:blip r:embed="rId3"/>
-          <a:stretch>
-            <a:fillRect/>
-          </a:stretch>
-        </p:blipFill>
-        <p:spPr>
-          <a:xfrm rot="16200000">
-            <a:off x="7073900" y="-3289300"/>
-            <a:ext cx="10236200" cy="22606000"/>
-          </a:xfrm>
-          <a:prstGeom prst="rect">
-            <a:avLst/>
-          </a:prstGeom>
-        </p:spPr>
-      </p:pic>
-      <p:pic>
-        <p:nvPicPr>
-          <p:cNvPr id="4" name="Picture 4"/>
-          <p:cNvPicPr>
-            <a:picLocks noChangeAspect="1"/>
-          </p:cNvPicPr>
-          <p:nvPr/>
-        </p:nvPicPr>
-        <p:blipFill rotWithShape="1">
-          <a:blip r:embed="rId4"/>
-          <a:stretch>
-            <a:fillRect/>
-          </a:stretch>
-        </p:blipFill>
-        <p:spPr>
-          <a:xfrm>
-            <a:off x="1968500" y="1727200"/>
-            <a:ext cx="2514600" cy="2514600"/>
-          </a:xfrm>
-          <a:prstGeom prst="rect">
-            <a:avLst/>
-          </a:prstGeom>
-        </p:spPr>
-      </p:pic>
-      <p:sp>
-        <p:nvSpPr>
-          <p:cNvPr id="5" name="TextBox 5"/>
-          <p:cNvSpPr txBox="1"/>
-          <p:nvPr/>
-        </p:nvSpPr>
-        <p:spPr>
-          <a:xfrm>
-            <a:off x="4876800" y="2082800"/>
-            <a:ext cx="14605000" cy="1257300"/>
-          </a:xfrm>
-          <a:prstGeom prst="rect">
-            <a:avLst/>
-          </a:prstGeom>
-        </p:spPr>
-        <p:txBody>
-          <a:bodyPr lIns="0" tIns="89745" rIns="0" bIns="89745" anchor="ctr"/>
-          <a:lstStyle/>
-          <a:p>
-            <a:pPr lvl="0" algn="l">
-              <a:lnSpc>
-                <a:spcPct val="100000"/>
-              </a:lnSpc>
-              <a:defRPr/>
-            </a:pPr>
-            <a:r>
-              <a:rPr lang="ko-KR" sz="7065" b="0" i="0" u="none" strike="noStrike" spc="-71">
-                <a:solidFill>
-                  <a:srgbClr val="242424"/>
-                </a:solidFill>
-                <a:ea typeface="MapoDPP"/>
-              </a:rPr>
-              <a:t>월별</a:t>
-            </a:r>
-            <a:r>
-              <a:rPr lang="en-US" sz="7065" b="0" i="0" u="none" strike="noStrike" spc="-71">
-                <a:solidFill>
-                  <a:srgbClr val="242424"/>
-                </a:solidFill>
-                <a:latin typeface="MapoDPP"/>
-              </a:rPr>
-              <a:t>/</a:t>
-            </a:r>
-            <a:r>
-              <a:rPr lang="ko-KR" sz="7065" b="0" i="0" u="none" strike="noStrike" spc="-71">
-                <a:solidFill>
-                  <a:srgbClr val="242424"/>
-                </a:solidFill>
-                <a:ea typeface="MapoDPP"/>
-              </a:rPr>
-              <a:t>계절별</a:t>
-            </a:r>
-            <a:r>
-              <a:rPr lang="en-US" sz="7065" b="0" i="0" u="none" strike="noStrike" spc="-71">
-                <a:solidFill>
-                  <a:srgbClr val="242424"/>
-                </a:solidFill>
-                <a:latin typeface="MapoDPP"/>
-              </a:rPr>
-              <a:t> </a:t>
-            </a:r>
-            <a:r>
-              <a:rPr lang="ko-KR" sz="7065" b="0" i="0" u="none" strike="noStrike" spc="-71">
-                <a:solidFill>
-                  <a:srgbClr val="242424"/>
-                </a:solidFill>
-                <a:ea typeface="MapoDPP"/>
-              </a:rPr>
-              <a:t>발전</a:t>
-            </a:r>
-            <a:r>
-              <a:rPr lang="en-US" sz="7065" b="0" i="0" u="none" strike="noStrike" spc="-71">
-                <a:solidFill>
-                  <a:srgbClr val="242424"/>
-                </a:solidFill>
-                <a:latin typeface="MapoDPP"/>
-              </a:rPr>
-              <a:t> </a:t>
-            </a:r>
-            <a:r>
-              <a:rPr lang="ko-KR" sz="7065" b="0" i="0" u="none" strike="noStrike" spc="-71">
-                <a:solidFill>
-                  <a:srgbClr val="242424"/>
-                </a:solidFill>
-                <a:ea typeface="MapoDPP"/>
-              </a:rPr>
-              <a:t>패턴</a:t>
-            </a:r>
-          </a:p>
-        </p:txBody>
-      </p:sp>
-      <p:pic>
-        <p:nvPicPr>
-          <p:cNvPr id="6" name="Picture 6"/>
-          <p:cNvPicPr>
-            <a:picLocks noChangeAspect="1"/>
-          </p:cNvPicPr>
-          <p:nvPr/>
-        </p:nvPicPr>
-        <p:blipFill rotWithShape="1">
-          <a:blip r:embed="rId5"/>
-          <a:stretch>
-            <a:fillRect/>
-          </a:stretch>
-        </p:blipFill>
-        <p:spPr>
-          <a:xfrm>
-            <a:off x="1828800" y="4749800"/>
-            <a:ext cx="7734300" cy="7658100"/>
-          </a:xfrm>
-          <a:prstGeom prst="rect">
-            <a:avLst/>
-          </a:prstGeom>
-        </p:spPr>
-      </p:pic>
-      <p:pic>
-        <p:nvPicPr>
-          <p:cNvPr id="7" name="Picture 7"/>
-          <p:cNvPicPr>
-            <a:picLocks noChangeAspect="1"/>
-          </p:cNvPicPr>
-          <p:nvPr/>
-        </p:nvPicPr>
-        <p:blipFill rotWithShape="1">
-          <a:blip r:embed="rId6"/>
-          <a:stretch>
-            <a:fillRect/>
-          </a:stretch>
-        </p:blipFill>
-        <p:spPr>
-          <a:xfrm>
-            <a:off x="9575800" y="4902200"/>
-            <a:ext cx="13550900" cy="7442200"/>
-          </a:xfrm>
-          <a:prstGeom prst="rect">
-            <a:avLst/>
-          </a:prstGeom>
-        </p:spPr>
-      </p:pic>
-      <p:sp>
-        <p:nvSpPr>
-          <p:cNvPr id="8" name="TextBox 8"/>
-          <p:cNvSpPr txBox="1"/>
-          <p:nvPr/>
-        </p:nvSpPr>
-        <p:spPr>
-          <a:xfrm>
-            <a:off x="11671300" y="5715000"/>
-            <a:ext cx="10426700" cy="787400"/>
-          </a:xfrm>
-          <a:prstGeom prst="rect">
-            <a:avLst/>
-          </a:prstGeom>
-        </p:spPr>
-        <p:txBody>
-          <a:bodyPr anchor="b"/>
-          <a:lstStyle/>
-          <a:p>
-            <a:pPr lvl="0" algn="l">
-              <a:lnSpc>
-                <a:spcPct val="124000"/>
-              </a:lnSpc>
-              <a:defRPr/>
-            </a:pPr>
-            <a:r>
-              <a:rPr lang="ko-KR" sz="4400" b="0" i="0" u="none" strike="noStrike" spc="-176">
-                <a:solidFill>
-                  <a:schemeClr val="dk1"/>
-                </a:solidFill>
-                <a:ea typeface="MapoDPP"/>
-              </a:rPr>
-              <a:t>계절에</a:t>
-            </a:r>
-            <a:r>
-              <a:rPr lang="en-US" sz="4400" b="0" i="0" u="none" strike="noStrike" spc="-176">
-                <a:solidFill>
-                  <a:schemeClr val="dk1"/>
-                </a:solidFill>
-                <a:latin typeface="MapoDPP"/>
-              </a:rPr>
-              <a:t> </a:t>
-            </a:r>
-            <a:r>
-              <a:rPr lang="ko-KR" sz="4400" b="0" i="0" u="none" strike="noStrike" spc="-176">
-                <a:solidFill>
-                  <a:schemeClr val="dk1"/>
-                </a:solidFill>
-                <a:ea typeface="MapoDPP"/>
-              </a:rPr>
-              <a:t>따른</a:t>
-            </a:r>
-            <a:r>
-              <a:rPr lang="en-US" sz="4400" b="0" i="0" u="none" strike="noStrike" spc="-176">
-                <a:solidFill>
-                  <a:schemeClr val="dk1"/>
-                </a:solidFill>
-                <a:latin typeface="MapoDPP"/>
-              </a:rPr>
-              <a:t> </a:t>
-            </a:r>
-            <a:r>
-              <a:rPr lang="ko-KR" sz="4400" b="0" i="0" u="none" strike="noStrike" spc="-176">
-                <a:solidFill>
-                  <a:schemeClr val="dk1"/>
-                </a:solidFill>
-                <a:ea typeface="MapoDPP"/>
-              </a:rPr>
-              <a:t>태양광</a:t>
-            </a:r>
-            <a:r>
-              <a:rPr lang="en-US" sz="4400" b="0" i="0" u="none" strike="noStrike" spc="-176">
-                <a:solidFill>
-                  <a:schemeClr val="dk1"/>
-                </a:solidFill>
-                <a:latin typeface="MapoDPP"/>
-              </a:rPr>
-              <a:t> </a:t>
-            </a:r>
-            <a:r>
-              <a:rPr lang="ko-KR" sz="4400" b="0" i="0" u="none" strike="noStrike" spc="-176">
-                <a:solidFill>
-                  <a:schemeClr val="dk1"/>
-                </a:solidFill>
-                <a:ea typeface="MapoDPP"/>
-              </a:rPr>
-              <a:t>발전</a:t>
-            </a:r>
-            <a:r>
-              <a:rPr lang="en-US" sz="4400" b="0" i="0" u="none" strike="noStrike" spc="-176">
-                <a:solidFill>
-                  <a:schemeClr val="dk1"/>
-                </a:solidFill>
-                <a:latin typeface="MapoDPP"/>
-              </a:rPr>
-              <a:t> </a:t>
-            </a:r>
-            <a:r>
-              <a:rPr lang="ko-KR" sz="4400" b="0" i="0" u="none" strike="noStrike" spc="-176">
-                <a:solidFill>
-                  <a:schemeClr val="dk1"/>
-                </a:solidFill>
-                <a:ea typeface="MapoDPP"/>
-              </a:rPr>
-              <a:t>효율</a:t>
-            </a:r>
-            <a:r>
-              <a:rPr lang="en-US" sz="4400" b="0" i="0" u="none" strike="noStrike" spc="-176">
-                <a:solidFill>
-                  <a:schemeClr val="dk1"/>
-                </a:solidFill>
-                <a:latin typeface="MapoDPP"/>
-              </a:rPr>
-              <a:t> </a:t>
-            </a:r>
-            <a:r>
-              <a:rPr lang="ko-KR" sz="4400" b="0" i="0" u="none" strike="noStrike" spc="-176">
-                <a:solidFill>
-                  <a:schemeClr val="dk1"/>
-                </a:solidFill>
-                <a:ea typeface="MapoDPP"/>
-              </a:rPr>
-              <a:t>변화</a:t>
-            </a:r>
-          </a:p>
-        </p:txBody>
-      </p:sp>
-      <p:pic>
-        <p:nvPicPr>
-          <p:cNvPr id="9" name="Picture 9"/>
-          <p:cNvPicPr>
-            <a:picLocks noChangeAspect="1"/>
-          </p:cNvPicPr>
-          <p:nvPr/>
-        </p:nvPicPr>
-        <p:blipFill rotWithShape="1">
-          <a:blip r:embed="rId7"/>
-          <a:stretch>
-            <a:fillRect/>
-          </a:stretch>
-        </p:blipFill>
-        <p:spPr>
-          <a:xfrm>
-            <a:off x="508000" y="152400"/>
-            <a:ext cx="5486400" cy="5486400"/>
-          </a:xfrm>
-          <a:prstGeom prst="rect">
-            <a:avLst/>
-          </a:prstGeom>
-        </p:spPr>
-      </p:pic>
-      <p:sp>
-        <p:nvSpPr>
-          <p:cNvPr id="10" name="TextBox 10"/>
-          <p:cNvSpPr txBox="1"/>
-          <p:nvPr/>
-        </p:nvSpPr>
-        <p:spPr>
-          <a:xfrm>
-            <a:off x="9601200" y="6858000"/>
-            <a:ext cx="13411200" cy="4394200"/>
-          </a:xfrm>
-          <a:prstGeom prst="rect">
-            <a:avLst/>
-          </a:prstGeom>
-        </p:spPr>
-        <p:txBody>
-          <a:bodyPr anchor="t"/>
-          <a:lstStyle/>
-          <a:p>
-            <a:pPr lvl="0" algn="ctr">
-              <a:lnSpc>
-                <a:spcPct val="207000"/>
-              </a:lnSpc>
-              <a:defRPr/>
-            </a:pPr>
-            <a:r>
-              <a:rPr lang="en-GB" sz="3300" b="1" i="0" u="none" strike="noStrike" spc="-154">
-                <a:solidFill>
-                  <a:srgbClr val="000000"/>
-                </a:solidFill>
-                <a:latin typeface="Pretendard Regular"/>
-              </a:rPr>
-              <a:t>- </a:t>
-            </a:r>
-            <a:r>
-              <a:rPr lang="en-US" sz="3300" b="1" i="0" u="none" strike="noStrike" spc="-149">
-                <a:solidFill>
-                  <a:srgbClr val="000000"/>
-                </a:solidFill>
-                <a:latin typeface="Pretendard Regular"/>
-              </a:rPr>
-              <a:t>1</a:t>
-            </a:r>
-            <a:r>
-              <a:rPr lang="ko-KR" sz="3300" b="1" i="0" u="none" strike="noStrike" spc="-149">
-                <a:solidFill>
-                  <a:srgbClr val="000000"/>
-                </a:solidFill>
-                <a:ea typeface="Pretendard Regular"/>
-              </a:rPr>
-              <a:t>월</a:t>
-            </a:r>
-            <a:r>
-              <a:rPr lang="en-US" sz="3300" b="1" i="0" u="none" strike="noStrike" spc="-149">
-                <a:solidFill>
-                  <a:srgbClr val="000000"/>
-                </a:solidFill>
-                <a:latin typeface="Pretendard Regular"/>
-              </a:rPr>
-              <a:t>~12</a:t>
-            </a:r>
-            <a:r>
-              <a:rPr lang="ko-KR" sz="3300" b="1" i="0" u="none" strike="noStrike" spc="-149">
-                <a:solidFill>
-                  <a:srgbClr val="000000"/>
-                </a:solidFill>
-                <a:ea typeface="Pretendard Regular"/>
-              </a:rPr>
-              <a:t>월</a:t>
-            </a:r>
-            <a:r>
-              <a:rPr lang="en-US" sz="3300" b="1" i="0" u="none" strike="noStrike" spc="-149">
-                <a:solidFill>
-                  <a:srgbClr val="000000"/>
-                </a:solidFill>
-                <a:latin typeface="Pretendard Regular"/>
-              </a:rPr>
-              <a:t> </a:t>
-            </a:r>
-            <a:r>
-              <a:rPr lang="ko-KR" sz="3300" b="1" i="0" u="none" strike="noStrike" spc="-149">
-                <a:solidFill>
-                  <a:srgbClr val="000000"/>
-                </a:solidFill>
-                <a:ea typeface="Pretendard Regular"/>
-              </a:rPr>
-              <a:t>월별</a:t>
-            </a:r>
-            <a:r>
-              <a:rPr lang="en-US" sz="3300" b="1" i="0" u="none" strike="noStrike" spc="-149">
-                <a:solidFill>
-                  <a:srgbClr val="000000"/>
-                </a:solidFill>
-                <a:latin typeface="Pretendard Regular"/>
-              </a:rPr>
-              <a:t> </a:t>
-            </a:r>
-            <a:r>
-              <a:rPr lang="ko-KR" sz="3300" b="1" i="0" u="none" strike="noStrike" spc="-149">
-                <a:solidFill>
-                  <a:srgbClr val="000000"/>
-                </a:solidFill>
-                <a:ea typeface="Pretendard Regular"/>
-              </a:rPr>
-              <a:t>발전량</a:t>
-            </a:r>
-            <a:r>
-              <a:rPr lang="en-US" sz="3300" b="1" i="0" u="none" strike="noStrike" spc="-149">
-                <a:solidFill>
-                  <a:srgbClr val="000000"/>
-                </a:solidFill>
-                <a:latin typeface="Pretendard Regular"/>
-              </a:rPr>
-              <a:t> </a:t>
-            </a:r>
-            <a:r>
-              <a:rPr lang="ko-KR" sz="3300" b="1" i="0" u="none" strike="noStrike" spc="-149">
-                <a:solidFill>
-                  <a:srgbClr val="000000"/>
-                </a:solidFill>
-                <a:ea typeface="Pretendard Regular"/>
-              </a:rPr>
-              <a:t>분석</a:t>
-            </a:r>
-            <a:r>
-              <a:rPr lang="en-US" sz="3300" b="1" i="0" u="none" strike="noStrike" spc="-149">
-                <a:solidFill>
-                  <a:srgbClr val="000000"/>
-                </a:solidFill>
-                <a:latin typeface="Pretendard Regular"/>
-              </a:rPr>
-              <a:t> </a:t>
-            </a:r>
-            <a:r>
-              <a:rPr lang="ko-KR" sz="3300" b="1" i="0" u="none" strike="noStrike" spc="-149">
-                <a:solidFill>
-                  <a:srgbClr val="000000"/>
-                </a:solidFill>
-                <a:ea typeface="Pretendard Regular"/>
-              </a:rPr>
-              <a:t>결과</a:t>
-            </a:r>
-            <a:r>
-              <a:rPr lang="en-US" sz="3300" b="1" i="0" u="none" strike="noStrike" spc="-149">
-                <a:solidFill>
-                  <a:srgbClr val="000000"/>
-                </a:solidFill>
-                <a:latin typeface="Pretendard Regular"/>
-              </a:rPr>
-              <a:t>, </a:t>
-            </a:r>
-            <a:r>
-              <a:rPr lang="ko-KR" sz="3300" b="1" i="0" u="none" strike="noStrike" spc="-149">
-                <a:solidFill>
-                  <a:srgbClr val="000000"/>
-                </a:solidFill>
-                <a:ea typeface="Pretendard Regular"/>
-              </a:rPr>
-              <a:t>일조시간이</a:t>
-            </a:r>
-            <a:r>
-              <a:rPr lang="en-US" sz="3300" b="1" i="0" u="none" strike="noStrike" spc="-149">
-                <a:solidFill>
-                  <a:srgbClr val="000000"/>
-                </a:solidFill>
-                <a:latin typeface="Pretendard Regular"/>
-              </a:rPr>
-              <a:t> </a:t>
-            </a:r>
-            <a:r>
-              <a:rPr lang="ko-KR" sz="3300" b="1" i="0" u="none" strike="noStrike" spc="-149">
-                <a:solidFill>
-                  <a:srgbClr val="000000"/>
-                </a:solidFill>
-                <a:ea typeface="Pretendard Regular"/>
-              </a:rPr>
-              <a:t>긴</a:t>
-            </a:r>
-            <a:r>
-              <a:rPr lang="en-US" sz="3300" b="1" i="0" u="none" strike="noStrike" spc="-149">
-                <a:solidFill>
-                  <a:srgbClr val="000000"/>
-                </a:solidFill>
-                <a:latin typeface="Pretendard Regular"/>
-              </a:rPr>
-              <a:t> </a:t>
-            </a:r>
-            <a:r>
-              <a:rPr lang="ko-KR" sz="3300" b="1" i="0" u="none" strike="noStrike" spc="-149">
-                <a:solidFill>
-                  <a:srgbClr val="000000"/>
-                </a:solidFill>
-                <a:ea typeface="Pretendard Regular"/>
-              </a:rPr>
-              <a:t>봄</a:t>
-            </a:r>
-            <a:r>
-              <a:rPr lang="en-US" sz="3300" b="1" i="0" u="none" strike="noStrike" spc="-149">
-                <a:solidFill>
-                  <a:srgbClr val="000000"/>
-                </a:solidFill>
-                <a:latin typeface="Pretendard Regular"/>
-              </a:rPr>
-              <a:t>~</a:t>
-            </a:r>
-            <a:r>
-              <a:rPr lang="ko-KR" sz="3300" b="1" i="0" u="none" strike="noStrike" spc="-149">
-                <a:solidFill>
-                  <a:srgbClr val="000000"/>
-                </a:solidFill>
-                <a:ea typeface="Pretendard Regular"/>
-              </a:rPr>
-              <a:t>여름철에</a:t>
-            </a:r>
-            <a:r>
-              <a:rPr lang="en-US" sz="3300" b="1" i="0" u="none" strike="noStrike" spc="-149">
-                <a:solidFill>
-                  <a:srgbClr val="000000"/>
-                </a:solidFill>
-                <a:latin typeface="Pretendard Regular"/>
-              </a:rPr>
-              <a:t> </a:t>
-            </a:r>
-            <a:r>
-              <a:rPr lang="ko-KR" sz="3300" b="1" i="0" u="none" strike="noStrike" spc="-149">
-                <a:solidFill>
-                  <a:srgbClr val="000000"/>
-                </a:solidFill>
-                <a:ea typeface="Pretendard Regular"/>
-              </a:rPr>
-              <a:t>발전량</a:t>
-            </a:r>
-            <a:r>
-              <a:rPr lang="en-US" sz="3300" b="1" i="0" u="none" strike="noStrike" spc="-149">
-                <a:solidFill>
-                  <a:srgbClr val="000000"/>
-                </a:solidFill>
-                <a:latin typeface="Pretendard Regular"/>
-              </a:rPr>
-              <a:t> </a:t>
-            </a:r>
-            <a:r>
-              <a:rPr lang="ko-KR" sz="3300" b="1" i="0" u="none" strike="noStrike" spc="-149">
-                <a:solidFill>
-                  <a:srgbClr val="000000"/>
-                </a:solidFill>
-                <a:ea typeface="Pretendard Regular"/>
-              </a:rPr>
-              <a:t>집중</a:t>
-            </a:r>
-          </a:p>
-          <a:p>
-            <a:pPr lvl="0" algn="ctr">
-              <a:lnSpc>
-                <a:spcPct val="207000"/>
-              </a:lnSpc>
-              <a:defRPr/>
-            </a:pPr>
-            <a:r>
-              <a:rPr lang="en-US" sz="3300" b="1" i="0" u="none" strike="noStrike" spc="-149">
-                <a:solidFill>
-                  <a:srgbClr val="000000"/>
-                </a:solidFill>
-                <a:latin typeface="Pretendard Regular"/>
-              </a:rPr>
-              <a:t>- </a:t>
-            </a:r>
-            <a:r>
-              <a:rPr lang="ko-KR" sz="3300" b="1" i="0" u="none" strike="noStrike" spc="-149">
-                <a:solidFill>
-                  <a:srgbClr val="000000"/>
-                </a:solidFill>
-                <a:ea typeface="Pretendard Regular"/>
-              </a:rPr>
-              <a:t>일사량이</a:t>
-            </a:r>
-            <a:r>
-              <a:rPr lang="en-US" sz="3300" b="1" i="0" u="none" strike="noStrike" spc="-149">
-                <a:solidFill>
-                  <a:srgbClr val="000000"/>
-                </a:solidFill>
-                <a:latin typeface="Pretendard Regular"/>
-              </a:rPr>
-              <a:t> </a:t>
-            </a:r>
-            <a:r>
-              <a:rPr lang="ko-KR" sz="3300" b="1" i="0" u="none" strike="noStrike" spc="-149">
-                <a:solidFill>
-                  <a:srgbClr val="000000"/>
-                </a:solidFill>
-                <a:ea typeface="Pretendard Regular"/>
-              </a:rPr>
-              <a:t>가장</a:t>
-            </a:r>
-            <a:r>
-              <a:rPr lang="en-US" sz="3300" b="1" i="0" u="none" strike="noStrike" spc="-149">
-                <a:solidFill>
-                  <a:srgbClr val="000000"/>
-                </a:solidFill>
-                <a:latin typeface="Pretendard Regular"/>
-              </a:rPr>
-              <a:t> </a:t>
-            </a:r>
-            <a:r>
-              <a:rPr lang="ko-KR" sz="3300" b="1" i="0" u="none" strike="noStrike" spc="-149">
-                <a:solidFill>
-                  <a:srgbClr val="000000"/>
-                </a:solidFill>
-                <a:ea typeface="Pretendard Regular"/>
-              </a:rPr>
-              <a:t>풍부한</a:t>
-            </a:r>
-            <a:r>
-              <a:rPr lang="en-US" sz="3300" b="1" i="0" u="none" strike="noStrike" spc="-149">
-                <a:solidFill>
-                  <a:srgbClr val="000000"/>
-                </a:solidFill>
-                <a:latin typeface="Pretendard Regular"/>
-              </a:rPr>
-              <a:t> </a:t>
-            </a:r>
-            <a:r>
-              <a:rPr lang="ko-KR" sz="3300" b="1" i="0" u="none" strike="noStrike" spc="-149">
-                <a:solidFill>
-                  <a:srgbClr val="000000"/>
-                </a:solidFill>
-                <a:ea typeface="Pretendard Regular"/>
-              </a:rPr>
-              <a:t>여름철보다</a:t>
-            </a:r>
-            <a:r>
-              <a:rPr lang="en-US" sz="3300" b="1" i="0" u="none" strike="noStrike" spc="-149">
-                <a:solidFill>
-                  <a:srgbClr val="000000"/>
-                </a:solidFill>
-                <a:latin typeface="Pretendard Regular"/>
-              </a:rPr>
-              <a:t> </a:t>
-            </a:r>
-            <a:r>
-              <a:rPr lang="ko-KR" sz="3300" b="1" i="0" u="none" strike="noStrike" spc="-149">
-                <a:solidFill>
-                  <a:srgbClr val="000000"/>
-                </a:solidFill>
-                <a:ea typeface="Pretendard Regular"/>
-              </a:rPr>
-              <a:t>기온이</a:t>
-            </a:r>
-            <a:r>
-              <a:rPr lang="en-US" sz="3300" b="1" i="0" u="none" strike="noStrike" spc="-149">
-                <a:solidFill>
-                  <a:srgbClr val="000000"/>
-                </a:solidFill>
-                <a:latin typeface="Pretendard Regular"/>
-              </a:rPr>
-              <a:t> </a:t>
-            </a:r>
-            <a:r>
-              <a:rPr lang="ko-KR" sz="3300" b="1" i="0" u="none" strike="noStrike" spc="-149">
-                <a:solidFill>
-                  <a:srgbClr val="000000"/>
-                </a:solidFill>
-                <a:ea typeface="Pretendard Regular"/>
-              </a:rPr>
-              <a:t>적당한</a:t>
-            </a:r>
-            <a:r>
-              <a:rPr lang="en-US" sz="3300" b="1" i="0" u="none" strike="noStrike" spc="-149">
-                <a:solidFill>
-                  <a:srgbClr val="000000"/>
-                </a:solidFill>
-                <a:latin typeface="Pretendard Regular"/>
-              </a:rPr>
-              <a:t> 5</a:t>
-            </a:r>
-            <a:r>
-              <a:rPr lang="ko-KR" sz="3300" b="1" i="0" u="none" strike="noStrike" spc="-149">
-                <a:solidFill>
-                  <a:srgbClr val="000000"/>
-                </a:solidFill>
-                <a:ea typeface="Pretendard Regular"/>
-              </a:rPr>
-              <a:t>월경</a:t>
-            </a:r>
-            <a:r>
-              <a:rPr lang="en-US" sz="3300" b="1" i="0" u="none" strike="noStrike" spc="-149">
-                <a:solidFill>
-                  <a:srgbClr val="000000"/>
-                </a:solidFill>
-                <a:latin typeface="Pretendard Regular"/>
-              </a:rPr>
-              <a:t> </a:t>
-            </a:r>
-            <a:r>
-              <a:rPr lang="ko-KR" sz="3300" b="1" i="0" u="none" strike="noStrike" spc="-149">
-                <a:solidFill>
-                  <a:srgbClr val="000000"/>
-                </a:solidFill>
-                <a:ea typeface="Pretendard Regular"/>
-              </a:rPr>
-              <a:t>발전</a:t>
-            </a:r>
-            <a:r>
-              <a:rPr lang="en-US" sz="3300" b="1" i="0" u="none" strike="noStrike" spc="-149">
-                <a:solidFill>
-                  <a:srgbClr val="000000"/>
-                </a:solidFill>
-                <a:latin typeface="Pretendard Regular"/>
-              </a:rPr>
-              <a:t> </a:t>
-            </a:r>
-            <a:r>
-              <a:rPr lang="ko-KR" sz="3300" b="1" i="0" u="none" strike="noStrike" spc="-149">
-                <a:solidFill>
-                  <a:srgbClr val="000000"/>
-                </a:solidFill>
-                <a:ea typeface="Pretendard Regular"/>
-              </a:rPr>
-              <a:t>효율</a:t>
-            </a:r>
-            <a:r>
-              <a:rPr lang="en-US" sz="3300" b="1" i="0" u="none" strike="noStrike" spc="-149">
-                <a:solidFill>
-                  <a:srgbClr val="000000"/>
-                </a:solidFill>
-                <a:latin typeface="Pretendard Regular"/>
-              </a:rPr>
-              <a:t> </a:t>
-            </a:r>
-            <a:r>
-              <a:rPr lang="ko-KR" sz="3300" b="1" i="0" u="none" strike="noStrike" spc="-149">
-                <a:solidFill>
-                  <a:srgbClr val="000000"/>
-                </a:solidFill>
-                <a:ea typeface="Pretendard Regular"/>
-              </a:rPr>
-              <a:t>피크</a:t>
-            </a:r>
-            <a:r>
-              <a:rPr lang="en-US" sz="3300" b="1" i="0" u="none" strike="noStrike" spc="-149">
-                <a:solidFill>
-                  <a:srgbClr val="000000"/>
-                </a:solidFill>
-                <a:latin typeface="Pretendard Regular"/>
-              </a:rPr>
-              <a:t> </a:t>
-            </a:r>
-            <a:r>
-              <a:rPr lang="ko-KR" sz="3300" b="1" i="0" u="none" strike="noStrike" spc="-149">
-                <a:solidFill>
-                  <a:srgbClr val="000000"/>
-                </a:solidFill>
-                <a:ea typeface="Pretendard Regular"/>
-              </a:rPr>
-              <a:t>발생</a:t>
-            </a:r>
-          </a:p>
-          <a:p>
-            <a:pPr lvl="0" algn="ctr">
-              <a:lnSpc>
-                <a:spcPct val="207000"/>
-              </a:lnSpc>
-              <a:defRPr/>
-            </a:pPr>
-            <a:r>
-              <a:rPr lang="en-US" sz="3300" b="1" i="0" u="none" strike="noStrike" spc="-149">
-                <a:solidFill>
-                  <a:srgbClr val="000000"/>
-                </a:solidFill>
-                <a:latin typeface="Pretendard Regular"/>
-              </a:rPr>
-              <a:t>- </a:t>
-            </a:r>
-            <a:r>
-              <a:rPr lang="ko-KR" sz="3300" b="1" i="0" u="none" strike="noStrike" spc="-149">
-                <a:solidFill>
-                  <a:srgbClr val="000000"/>
-                </a:solidFill>
-                <a:ea typeface="Pretendard Regular"/>
-              </a:rPr>
-              <a:t>여름철</a:t>
-            </a:r>
-            <a:r>
-              <a:rPr lang="en-US" sz="3300" b="1" i="0" u="none" strike="noStrike" spc="-149">
-                <a:solidFill>
-                  <a:srgbClr val="000000"/>
-                </a:solidFill>
-                <a:latin typeface="Pretendard Regular"/>
-              </a:rPr>
-              <a:t> </a:t>
-            </a:r>
-            <a:r>
-              <a:rPr lang="ko-KR" sz="3300" b="1" i="0" u="none" strike="noStrike" spc="-149">
-                <a:solidFill>
-                  <a:srgbClr val="000000"/>
-                </a:solidFill>
-                <a:ea typeface="Pretendard Regular"/>
-              </a:rPr>
-              <a:t>고온으로</a:t>
-            </a:r>
-            <a:r>
-              <a:rPr lang="en-US" sz="3300" b="1" i="0" u="none" strike="noStrike" spc="-149">
-                <a:solidFill>
-                  <a:srgbClr val="000000"/>
-                </a:solidFill>
-                <a:latin typeface="Pretendard Regular"/>
-              </a:rPr>
-              <a:t> </a:t>
-            </a:r>
-            <a:r>
-              <a:rPr lang="ko-KR" sz="3300" b="1" i="0" u="none" strike="noStrike" spc="-149">
-                <a:solidFill>
-                  <a:srgbClr val="000000"/>
-                </a:solidFill>
-                <a:ea typeface="Pretendard Regular"/>
-              </a:rPr>
-              <a:t>인한</a:t>
-            </a:r>
-            <a:r>
-              <a:rPr lang="en-US" sz="3300" b="1" i="0" u="none" strike="noStrike" spc="-149">
-                <a:solidFill>
-                  <a:srgbClr val="000000"/>
-                </a:solidFill>
-                <a:latin typeface="Pretendard Regular"/>
-              </a:rPr>
-              <a:t> '</a:t>
-            </a:r>
-            <a:r>
-              <a:rPr lang="ko-KR" sz="3300" b="1" i="0" u="none" strike="noStrike" spc="-149">
-                <a:solidFill>
-                  <a:srgbClr val="000000"/>
-                </a:solidFill>
-                <a:ea typeface="Pretendard Regular"/>
-              </a:rPr>
-              <a:t>온도계수</a:t>
-            </a:r>
-            <a:r>
-              <a:rPr lang="en-US" sz="3300" b="1" i="0" u="none" strike="noStrike" spc="-149">
-                <a:solidFill>
-                  <a:srgbClr val="000000"/>
-                </a:solidFill>
-                <a:latin typeface="Pretendard Regular"/>
-              </a:rPr>
-              <a:t>' </a:t>
-            </a:r>
-            <a:r>
-              <a:rPr lang="ko-KR" sz="3300" b="1" i="0" u="none" strike="noStrike" spc="-149">
-                <a:solidFill>
-                  <a:srgbClr val="000000"/>
-                </a:solidFill>
-                <a:ea typeface="Pretendard Regular"/>
-              </a:rPr>
-              <a:t>현상으로</a:t>
-            </a:r>
-            <a:r>
-              <a:rPr lang="en-US" sz="3300" b="1" i="0" u="none" strike="noStrike" spc="-149">
-                <a:solidFill>
-                  <a:srgbClr val="000000"/>
-                </a:solidFill>
-                <a:latin typeface="Pretendard Regular"/>
-              </a:rPr>
-              <a:t> </a:t>
-            </a:r>
-            <a:r>
-              <a:rPr lang="ko-KR" sz="3300" b="1" i="0" u="none" strike="noStrike" spc="-149">
-                <a:solidFill>
-                  <a:srgbClr val="000000"/>
-                </a:solidFill>
-                <a:ea typeface="Pretendard Regular"/>
-              </a:rPr>
-              <a:t>패널</a:t>
-            </a:r>
-            <a:r>
-              <a:rPr lang="en-US" sz="3300" b="1" i="0" u="none" strike="noStrike" spc="-149">
-                <a:solidFill>
-                  <a:srgbClr val="000000"/>
-                </a:solidFill>
-                <a:latin typeface="Pretendard Regular"/>
-              </a:rPr>
-              <a:t> </a:t>
-            </a:r>
-            <a:r>
-              <a:rPr lang="ko-KR" sz="3300" b="1" i="0" u="none" strike="noStrike" spc="-149">
-                <a:solidFill>
-                  <a:srgbClr val="000000"/>
-                </a:solidFill>
-                <a:ea typeface="Pretendard Regular"/>
-              </a:rPr>
-              <a:t>효율</a:t>
-            </a:r>
-            <a:r>
-              <a:rPr lang="en-US" sz="3300" b="1" i="0" u="none" strike="noStrike" spc="-149">
-                <a:solidFill>
-                  <a:srgbClr val="000000"/>
-                </a:solidFill>
-                <a:latin typeface="Pretendard Regular"/>
-              </a:rPr>
-              <a:t> </a:t>
-            </a:r>
-            <a:r>
-              <a:rPr lang="ko-KR" sz="3300" b="1" i="0" u="none" strike="noStrike" spc="-149">
-                <a:solidFill>
-                  <a:srgbClr val="000000"/>
-                </a:solidFill>
-                <a:ea typeface="Pretendard Regular"/>
-              </a:rPr>
-              <a:t>저하</a:t>
-            </a:r>
-            <a:r>
-              <a:rPr lang="en-US" sz="3300" b="1" i="0" u="none" strike="noStrike" spc="-149">
-                <a:solidFill>
-                  <a:srgbClr val="000000"/>
-                </a:solidFill>
-                <a:latin typeface="Pretendard Regular"/>
-              </a:rPr>
-              <a:t> </a:t>
-            </a:r>
-            <a:r>
-              <a:rPr lang="ko-KR" sz="3300" b="1" i="0" u="none" strike="noStrike" spc="-149">
-                <a:solidFill>
-                  <a:srgbClr val="000000"/>
-                </a:solidFill>
-                <a:ea typeface="Pretendard Regular"/>
-              </a:rPr>
-              <a:t>확인</a:t>
-            </a:r>
-          </a:p>
-          <a:p>
-            <a:pPr lvl="0" algn="ctr">
-              <a:lnSpc>
-                <a:spcPct val="207000"/>
-              </a:lnSpc>
-              <a:defRPr/>
-            </a:pPr>
-            <a:r>
-              <a:rPr lang="en-US" sz="3300" b="1" i="0" u="none" strike="noStrike" spc="-249">
-                <a:solidFill>
-                  <a:srgbClr val="000000"/>
-                </a:solidFill>
-                <a:latin typeface="Pretendard Regular"/>
-              </a:rPr>
-              <a:t>- </a:t>
-            </a:r>
-            <a:r>
-              <a:rPr lang="ko-KR" sz="3300" b="1" i="0" u="none" strike="noStrike" spc="-249">
-                <a:solidFill>
-                  <a:srgbClr val="000000"/>
-                </a:solidFill>
-                <a:ea typeface="Pretendard Regular"/>
-              </a:rPr>
-              <a:t>계절별</a:t>
-            </a:r>
-            <a:r>
-              <a:rPr lang="en-US" sz="3300" b="1" i="0" u="none" strike="noStrike" spc="-249">
-                <a:solidFill>
-                  <a:srgbClr val="000000"/>
-                </a:solidFill>
-                <a:latin typeface="Pretendard Regular"/>
-              </a:rPr>
-              <a:t> </a:t>
-            </a:r>
-            <a:r>
-              <a:rPr lang="ko-KR" sz="3300" b="1" i="0" u="none" strike="noStrike" spc="-249">
-                <a:solidFill>
-                  <a:srgbClr val="000000"/>
-                </a:solidFill>
-                <a:ea typeface="Pretendard Regular"/>
-              </a:rPr>
-              <a:t>특성을</a:t>
-            </a:r>
-            <a:r>
-              <a:rPr lang="en-US" sz="3300" b="1" i="0" u="none" strike="noStrike" spc="-249">
-                <a:solidFill>
-                  <a:srgbClr val="000000"/>
-                </a:solidFill>
-                <a:latin typeface="Pretendard Regular"/>
-              </a:rPr>
-              <a:t> </a:t>
-            </a:r>
-            <a:r>
-              <a:rPr lang="ko-KR" sz="3300" b="1" i="0" u="none" strike="noStrike" spc="-249">
-                <a:solidFill>
-                  <a:srgbClr val="000000"/>
-                </a:solidFill>
-                <a:ea typeface="Pretendard Regular"/>
-              </a:rPr>
-              <a:t>고려한</a:t>
-            </a:r>
-            <a:r>
-              <a:rPr lang="en-US" sz="3300" b="1" i="0" u="none" strike="noStrike" spc="-249">
-                <a:solidFill>
-                  <a:srgbClr val="000000"/>
-                </a:solidFill>
-                <a:latin typeface="Pretendard Regular"/>
-              </a:rPr>
-              <a:t> </a:t>
-            </a:r>
-            <a:r>
-              <a:rPr lang="ko-KR" sz="3300" b="1" i="0" u="none" strike="noStrike" spc="-249">
-                <a:solidFill>
-                  <a:srgbClr val="000000"/>
-                </a:solidFill>
-                <a:ea typeface="Pretendard Regular"/>
-              </a:rPr>
-              <a:t>발전</a:t>
-            </a:r>
-            <a:r>
-              <a:rPr lang="en-US" sz="3300" b="1" i="0" u="none" strike="noStrike" spc="-249">
-                <a:solidFill>
-                  <a:srgbClr val="000000"/>
-                </a:solidFill>
-                <a:latin typeface="Pretendard Regular"/>
-              </a:rPr>
-              <a:t> </a:t>
-            </a:r>
-            <a:r>
-              <a:rPr lang="ko-KR" sz="3300" b="1" i="0" u="none" strike="noStrike" spc="-249">
-                <a:solidFill>
-                  <a:srgbClr val="000000"/>
-                </a:solidFill>
-                <a:ea typeface="Pretendard Regular"/>
-              </a:rPr>
-              <a:t>시스템</a:t>
-            </a:r>
-            <a:r>
-              <a:rPr lang="en-US" sz="3300" b="1" i="0" u="none" strike="noStrike" spc="-249">
-                <a:solidFill>
-                  <a:srgbClr val="000000"/>
-                </a:solidFill>
-                <a:latin typeface="Pretendard Regular"/>
-              </a:rPr>
-              <a:t> </a:t>
-            </a:r>
-            <a:r>
-              <a:rPr lang="ko-KR" sz="3300" b="1" i="0" u="none" strike="noStrike" spc="-249">
-                <a:solidFill>
-                  <a:srgbClr val="000000"/>
-                </a:solidFill>
-                <a:ea typeface="Pretendard Regular"/>
-              </a:rPr>
-              <a:t>최적화</a:t>
-            </a:r>
-            <a:r>
-              <a:rPr lang="en-US" sz="3300" b="1" i="0" u="none" strike="noStrike" spc="-249">
-                <a:solidFill>
-                  <a:srgbClr val="000000"/>
-                </a:solidFill>
-                <a:latin typeface="Pretendard Regular"/>
-              </a:rPr>
-              <a:t> </a:t>
-            </a:r>
-            <a:r>
-              <a:rPr lang="ko-KR" sz="3300" b="1" i="0" u="none" strike="noStrike" spc="-249">
-                <a:solidFill>
-                  <a:srgbClr val="000000"/>
-                </a:solidFill>
-                <a:ea typeface="Pretendard Regular"/>
-              </a:rPr>
-              <a:t>및</a:t>
-            </a:r>
-            <a:r>
-              <a:rPr lang="en-US" sz="3300" b="1" i="0" u="none" strike="noStrike" spc="-249">
-                <a:solidFill>
-                  <a:srgbClr val="000000"/>
-                </a:solidFill>
-                <a:latin typeface="Pretendard Regular"/>
-              </a:rPr>
-              <a:t> </a:t>
-            </a:r>
-            <a:r>
-              <a:rPr lang="ko-KR" sz="3300" b="1" i="0" u="none" strike="noStrike" spc="-249">
-                <a:solidFill>
-                  <a:srgbClr val="000000"/>
-                </a:solidFill>
-                <a:ea typeface="Pretendard Regular"/>
-              </a:rPr>
-              <a:t>유지보수</a:t>
-            </a:r>
-            <a:r>
-              <a:rPr lang="en-US" sz="3300" b="1" i="0" u="none" strike="noStrike" spc="-249">
-                <a:solidFill>
-                  <a:srgbClr val="000000"/>
-                </a:solidFill>
-                <a:latin typeface="Pretendard Regular"/>
-              </a:rPr>
-              <a:t> </a:t>
-            </a:r>
-            <a:r>
-              <a:rPr lang="ko-KR" sz="3300" b="1" i="0" u="none" strike="noStrike" spc="-249">
-                <a:solidFill>
-                  <a:srgbClr val="000000"/>
-                </a:solidFill>
-                <a:ea typeface="Pretendard Regular"/>
-              </a:rPr>
-              <a:t>전략</a:t>
-            </a:r>
-            <a:r>
-              <a:rPr lang="en-US" sz="3300" b="1" i="0" u="none" strike="noStrike" spc="-249">
-                <a:solidFill>
-                  <a:srgbClr val="000000"/>
-                </a:solidFill>
-                <a:latin typeface="Pretendard Regular"/>
-              </a:rPr>
-              <a:t> </a:t>
-            </a:r>
-            <a:r>
-              <a:rPr lang="ko-KR" sz="3300" b="1" i="0" u="none" strike="noStrike" spc="-249">
-                <a:solidFill>
-                  <a:srgbClr val="000000"/>
-                </a:solidFill>
-                <a:ea typeface="Pretendard Regular"/>
-              </a:rPr>
-              <a:t>필요</a:t>
-            </a:r>
-          </a:p>
-        </p:txBody>
-      </p:sp>
-    </p:spTree>
-  </p:cSld>
-  <p:clrMapOvr>
-    <a:masterClrMapping/>
-  </p:clrMapOvr>
-  <mc:AlternateContent xmlns:mc="http://schemas.openxmlformats.org/markup-compatibility/2006" xmlns:p14="http://schemas.microsoft.com/office/powerpoint/2010/main">
-    <mc:Choice Requires="p14">
-      <p:transition/>
-    </mc:Choice>
-    <mc:Fallback xmlns="">
-      <p:transition/>
-    </mc:Fallback>
-  </mc:AlternateContent>
-</p:sld>
-</file>
-
-<file path=ppt/slides/slide11.xml><?xml version="1.0" encoding="utf-8"?>
 <p:sld xmlns:a="http://schemas.openxmlformats.org/drawingml/2006/main" xmlns:r="http://schemas.openxmlformats.org/officeDocument/2006/relationships" xmlns:p="http://schemas.openxmlformats.org/presentationml/2006/main">
   <p:cSld>
     <p:bg>
@@ -6398,7 +5182,7 @@
 </p:sld>
 </file>
 
-<file path=ppt/slides/slide12.xml><?xml version="1.0" encoding="utf-8"?>
+<file path=ppt/slides/slide11.xml><?xml version="1.0" encoding="utf-8"?>
 <p:sld xmlns:a="http://schemas.openxmlformats.org/drawingml/2006/main" xmlns:r="http://schemas.openxmlformats.org/officeDocument/2006/relationships" xmlns:p="http://schemas.openxmlformats.org/presentationml/2006/main">
   <p:cSld>
     <p:bg>
@@ -8320,7 +7104,7 @@
 </p:sld>
 </file>
 
-<file path=ppt/slides/slide13.xml><?xml version="1.0" encoding="utf-8"?>
+<file path=ppt/slides/slide12.xml><?xml version="1.0" encoding="utf-8"?>
 <p:sld xmlns:a="http://schemas.openxmlformats.org/drawingml/2006/main" xmlns:r="http://schemas.openxmlformats.org/officeDocument/2006/relationships" xmlns:p="http://schemas.openxmlformats.org/presentationml/2006/main">
   <p:cSld>
     <p:bg>
@@ -10231,7 +9015,7 @@
 </p:sld>
 </file>
 
-<file path=ppt/slides/slide14.xml><?xml version="1.0" encoding="utf-8"?>
+<file path=ppt/slides/slide13.xml><?xml version="1.0" encoding="utf-8"?>
 <p:sld xmlns:a="http://schemas.openxmlformats.org/drawingml/2006/main" xmlns:r="http://schemas.openxmlformats.org/officeDocument/2006/relationships" xmlns:p="http://schemas.openxmlformats.org/presentationml/2006/main">
   <p:cSld>
     <p:bg>
@@ -11546,7 +10330,7 @@
 </p:sld>
 </file>
 
-<file path=ppt/slides/slide15.xml><?xml version="1.0" encoding="utf-8"?>
+<file path=ppt/slides/slide14.xml><?xml version="1.0" encoding="utf-8"?>
 <p:sld xmlns:a="http://schemas.openxmlformats.org/drawingml/2006/main" xmlns:r="http://schemas.openxmlformats.org/officeDocument/2006/relationships" xmlns:p="http://schemas.openxmlformats.org/presentationml/2006/main">
   <p:cSld>
     <p:bg>
@@ -13726,7 +12510,7 @@
 </p:sld>
 </file>
 
-<file path=ppt/slides/slide16.xml><?xml version="1.0" encoding="utf-8"?>
+<file path=ppt/slides/slide15.xml><?xml version="1.0" encoding="utf-8"?>
 <p:sld xmlns:a="http://schemas.openxmlformats.org/drawingml/2006/main" xmlns:r="http://schemas.openxmlformats.org/officeDocument/2006/relationships" xmlns:p="http://schemas.openxmlformats.org/presentationml/2006/main">
   <p:cSld>
     <p:bg>
@@ -16966,7 +15750,7 @@
         <p:spPr>
           <a:xfrm>
             <a:off x="3429000" y="8864600"/>
-            <a:ext cx="6477000" cy="965200"/>
+            <a:ext cx="7175500" cy="965200"/>
           </a:xfrm>
           <a:prstGeom prst="rect">
             <a:avLst/>
@@ -16983,10 +15767,10 @@
               <a:defRPr/>
             </a:pPr>
             <a:r>
-              <a:rPr lang="ko-KR" altLang="en-US" sz="3000" dirty="0"/>
-              <a:t>국내 태양광 발전 및 지역별 편차</a:t>
-            </a:r>
-            <a:endParaRPr lang="ko-KR" altLang="en-US" sz="3000" b="0" i="0" u="none" strike="noStrike" dirty="0">
+              <a:rPr lang="ko-KR" altLang="en-US" sz="2800" dirty="0"/>
+              <a:t>국내 지역별 태양광 발전 실적 및 현황 분석</a:t>
+            </a:r>
+            <a:endParaRPr lang="ko-KR" altLang="en-US" sz="2800" b="0" i="0" u="none" strike="noStrike" dirty="0">
               <a:solidFill>
                 <a:srgbClr val="242424"/>
               </a:solidFill>
@@ -17014,41 +15798,17 @@
           <a:bodyPr anchor="ctr"/>
           <a:lstStyle/>
           <a:p>
-            <a:pPr lvl="0" algn="l">
+            <a:pPr lvl="0">
               <a:lnSpc>
                 <a:spcPct val="133000"/>
               </a:lnSpc>
               <a:defRPr/>
             </a:pPr>
             <a:r>
-              <a:rPr lang="ko-KR" altLang="en-US" sz="3000" dirty="0"/>
-              <a:t>기상 요인</a:t>
-            </a:r>
-            <a:r>
-              <a:rPr lang="en-US" altLang="ko-KR" sz="3000" dirty="0"/>
-              <a:t>(</a:t>
-            </a:r>
-            <a:r>
-              <a:rPr lang="ko-KR" altLang="en-US" sz="3000" dirty="0"/>
-              <a:t>일사량</a:t>
-            </a:r>
-            <a:r>
-              <a:rPr lang="en-US" altLang="ko-KR" sz="3000" dirty="0"/>
-              <a:t>·</a:t>
-            </a:r>
-            <a:r>
-              <a:rPr lang="ko-KR" altLang="en-US" sz="3000" dirty="0"/>
-              <a:t>기온</a:t>
-            </a:r>
-            <a:r>
-              <a:rPr lang="en-US" altLang="ko-KR" sz="3000" dirty="0"/>
-              <a:t>)</a:t>
-            </a:r>
-            <a:r>
-              <a:rPr lang="ko-KR" altLang="en-US" sz="3000" dirty="0"/>
-              <a:t>과 효율의 상관관계</a:t>
-            </a:r>
-            <a:endParaRPr lang="ko-KR" altLang="en-US" sz="3000" b="0" i="0" u="none" strike="noStrike" dirty="0">
+              <a:rPr lang="ko-KR" altLang="en-US" sz="3200" dirty="0"/>
+              <a:t>기상 요인에 따른 발전 효율 상관관계 분석</a:t>
+            </a:r>
+            <a:endParaRPr lang="ko-KR" altLang="en-US" sz="3000" i="0" u="none" strike="noStrike" dirty="0">
               <a:solidFill>
                 <a:srgbClr val="242424"/>
               </a:solidFill>
@@ -17219,7 +15979,7 @@
             </a:pPr>
             <a:r>
               <a:rPr lang="ko-KR" altLang="en-US" sz="3000" dirty="0"/>
-              <a:t>지역별 맞춤형 최적화 로드맵</a:t>
+              <a:t>데이터 분석 결과</a:t>
             </a:r>
             <a:endParaRPr lang="en-US" altLang="ko-KR" sz="3000" b="0" i="0" u="none" strike="noStrike" dirty="0">
               <a:solidFill>
@@ -17280,8 +16040,13 @@
               <a:defRPr/>
             </a:pPr>
             <a:r>
-              <a:rPr lang="ko-KR" altLang="en-US" sz="3000" dirty="0"/>
-              <a:t>기대효과 및 정책 제언</a:t>
+              <a:rPr lang="ko-KR" altLang="en-US" sz="3000" b="0" i="0" u="none" strike="noStrike" dirty="0">
+                <a:solidFill>
+                  <a:srgbClr val="242424"/>
+                </a:solidFill>
+                <a:ea typeface="Pretendard Bold"/>
+              </a:rPr>
+              <a:t>지역별 최적화 전략 및 기대효과</a:t>
             </a:r>
             <a:endParaRPr lang="ko-KR" sz="3000" b="0" i="0" u="none" strike="noStrike" dirty="0">
               <a:solidFill>
@@ -17441,8 +16206,8 @@
         </p:nvCxnSpPr>
         <p:spPr>
           <a:xfrm>
-            <a:off x="9144000" y="9448655"/>
-            <a:ext cx="1346200" cy="0"/>
+            <a:off x="10198100" y="9448655"/>
+            <a:ext cx="292100" cy="0"/>
           </a:xfrm>
           <a:prstGeom prst="line">
             <a:avLst/>
@@ -17474,8 +16239,8 @@
         </p:nvCxnSpPr>
         <p:spPr>
           <a:xfrm>
-            <a:off x="9269412" y="10807700"/>
-            <a:ext cx="1296988" cy="0"/>
+            <a:off x="8610600" y="10805160"/>
+            <a:ext cx="1955800" cy="2540"/>
           </a:xfrm>
           <a:prstGeom prst="line">
             <a:avLst/>
@@ -17506,8 +16271,8 @@
         </p:nvCxnSpPr>
         <p:spPr>
           <a:xfrm>
-            <a:off x="17068800" y="9497060"/>
-            <a:ext cx="3136900" cy="0"/>
+            <a:off x="18669000" y="9497060"/>
+            <a:ext cx="1536700" cy="0"/>
           </a:xfrm>
           <a:prstGeom prst="line">
             <a:avLst/>
@@ -17537,9 +16302,9 @@
           <p:nvPr/>
         </p:nvCxnSpPr>
         <p:spPr>
-          <a:xfrm flipV="1">
-            <a:off x="18364200" y="8064500"/>
-            <a:ext cx="1828800" cy="25400"/>
+          <a:xfrm>
+            <a:off x="16383000" y="8051800"/>
+            <a:ext cx="3810000" cy="12700"/>
           </a:xfrm>
           <a:prstGeom prst="line">
             <a:avLst/>
@@ -17598,16 +16363,7 @@
                 </a:solidFill>
                 <a:ea typeface="Pretendard Bold"/>
               </a:rPr>
-              <a:t>출처 및 </a:t>
-            </a:r>
-            <a:r>
-              <a:rPr lang="en-US" altLang="ko-KR" sz="3000" b="0" i="0" u="none" strike="noStrike" dirty="0" err="1">
-                <a:solidFill>
-                  <a:srgbClr val="242424"/>
-                </a:solidFill>
-                <a:ea typeface="Pretendard Bold"/>
-              </a:rPr>
-              <a:t>QnA</a:t>
+              <a:t>최종 제안 및 출처</a:t>
             </a:r>
             <a:endParaRPr lang="ko-KR" sz="3000" b="0" i="0" u="none" strike="noStrike" dirty="0">
               <a:solidFill>
@@ -17634,8 +16390,8 @@
         </p:nvCxnSpPr>
         <p:spPr>
           <a:xfrm>
-            <a:off x="15500350" y="10805160"/>
-            <a:ext cx="4819650" cy="0"/>
+            <a:off x="16383000" y="10805160"/>
+            <a:ext cx="3937000" cy="0"/>
           </a:xfrm>
           <a:prstGeom prst="line">
             <a:avLst/>
@@ -17936,7 +16692,7 @@
         <p:cNvPr id="1" name="">
           <a:extLst>
             <a:ext uri="{FF2B5EF4-FFF2-40B4-BE49-F238E27FC236}">
-              <a16:creationId xmlns:a16="http://schemas.microsoft.com/office/drawing/2014/main" id="{7C8EA800-9A4E-43C4-C7A9-C1971D9BD6D1}"/>
+              <a16:creationId xmlns:a16="http://schemas.microsoft.com/office/drawing/2014/main" id="{C0E17DB3-96F3-B379-1BB7-4CFF8866F120}"/>
             </a:ext>
           </a:extLst>
         </p:cNvPr>
@@ -17956,7 +16712,7 @@
           <p:cNvPr id="2" name="Picture 2">
             <a:extLst>
               <a:ext uri="{FF2B5EF4-FFF2-40B4-BE49-F238E27FC236}">
-                <a16:creationId xmlns:a16="http://schemas.microsoft.com/office/drawing/2014/main" id="{B239350E-2052-5858-206B-C37F93967844}"/>
+                <a16:creationId xmlns:a16="http://schemas.microsoft.com/office/drawing/2014/main" id="{E7ED7405-A1FD-C010-7A45-385F715D4C17}"/>
               </a:ext>
             </a:extLst>
           </p:cNvPr>
@@ -17986,7 +16742,7 @@
           <p:cNvPr id="3" name="Picture 3">
             <a:extLst>
               <a:ext uri="{FF2B5EF4-FFF2-40B4-BE49-F238E27FC236}">
-                <a16:creationId xmlns:a16="http://schemas.microsoft.com/office/drawing/2014/main" id="{5B71562B-F22E-664A-DA0E-F23A4079E8DA}"/>
+                <a16:creationId xmlns:a16="http://schemas.microsoft.com/office/drawing/2014/main" id="{0635A0D5-861E-3BE1-AEF2-3584E6EDCAC8}"/>
               </a:ext>
             </a:extLst>
           </p:cNvPr>
@@ -18016,7 +16772,7 @@
           <p:cNvPr id="4" name="Picture 4">
             <a:extLst>
               <a:ext uri="{FF2B5EF4-FFF2-40B4-BE49-F238E27FC236}">
-                <a16:creationId xmlns:a16="http://schemas.microsoft.com/office/drawing/2014/main" id="{77A6FBB3-6677-5D56-DECD-9C4231EB0195}"/>
+                <a16:creationId xmlns:a16="http://schemas.microsoft.com/office/drawing/2014/main" id="{2E83402A-1F61-C408-7096-B33FECA0AAF2}"/>
               </a:ext>
             </a:extLst>
           </p:cNvPr>
@@ -18046,7 +16802,7 @@
           <p:cNvPr id="5" name="TextBox 5">
             <a:extLst>
               <a:ext uri="{FF2B5EF4-FFF2-40B4-BE49-F238E27FC236}">
-                <a16:creationId xmlns:a16="http://schemas.microsoft.com/office/drawing/2014/main" id="{815FDE6F-CB93-9B04-0898-3A0D76F9397D}"/>
+                <a16:creationId xmlns:a16="http://schemas.microsoft.com/office/drawing/2014/main" id="{035285B8-FF0B-F7CE-4961-D6F70B6ED9B5}"/>
               </a:ext>
             </a:extLst>
           </p:cNvPr>
@@ -18107,7 +16863,7 @@
           <p:cNvPr id="6" name="Picture 6">
             <a:extLst>
               <a:ext uri="{FF2B5EF4-FFF2-40B4-BE49-F238E27FC236}">
-                <a16:creationId xmlns:a16="http://schemas.microsoft.com/office/drawing/2014/main" id="{A7D02219-4D47-CACB-0F2B-FE73C5DAC8A7}"/>
+                <a16:creationId xmlns:a16="http://schemas.microsoft.com/office/drawing/2014/main" id="{B8B1A637-7720-DB00-1B44-A4125FCF8D08}"/>
               </a:ext>
             </a:extLst>
           </p:cNvPr>
@@ -18125,7 +16881,7 @@
         <p:spPr>
           <a:xfrm>
             <a:off x="1016000" y="4584700"/>
-            <a:ext cx="22402800" cy="7645400"/>
+            <a:ext cx="10829260" cy="3695700"/>
           </a:xfrm>
           <a:prstGeom prst="rect">
             <a:avLst/>
@@ -18137,7 +16893,7 @@
           <p:cNvPr id="8" name="Picture 8">
             <a:extLst>
               <a:ext uri="{FF2B5EF4-FFF2-40B4-BE49-F238E27FC236}">
-                <a16:creationId xmlns:a16="http://schemas.microsoft.com/office/drawing/2014/main" id="{165975C6-9A98-54CF-3A95-4D6B9FB5614C}"/>
+                <a16:creationId xmlns:a16="http://schemas.microsoft.com/office/drawing/2014/main" id="{2E97051E-8C2C-7E17-F039-C484B7202AC5}"/>
               </a:ext>
             </a:extLst>
           </p:cNvPr>
@@ -18162,12 +16918,72 @@
           </a:prstGeom>
         </p:spPr>
       </p:pic>
+      <p:pic>
+        <p:nvPicPr>
+          <p:cNvPr id="7" name="Picture 6">
+            <a:extLst>
+              <a:ext uri="{FF2B5EF4-FFF2-40B4-BE49-F238E27FC236}">
+                <a16:creationId xmlns:a16="http://schemas.microsoft.com/office/drawing/2014/main" id="{3A60E6B0-FB41-8C62-68FE-15BFA36439B6}"/>
+              </a:ext>
+            </a:extLst>
+          </p:cNvPr>
+          <p:cNvPicPr>
+            <a:picLocks noChangeAspect="1"/>
+          </p:cNvPicPr>
+          <p:nvPr/>
+        </p:nvPicPr>
+        <p:blipFill rotWithShape="1">
+          <a:blip r:embed="rId5"/>
+          <a:stretch>
+            <a:fillRect/>
+          </a:stretch>
+        </p:blipFill>
+        <p:spPr>
+          <a:xfrm>
+            <a:off x="12255500" y="4584700"/>
+            <a:ext cx="10829260" cy="3695700"/>
+          </a:xfrm>
+          <a:prstGeom prst="rect">
+            <a:avLst/>
+          </a:prstGeom>
+        </p:spPr>
+      </p:pic>
+      <p:pic>
+        <p:nvPicPr>
+          <p:cNvPr id="10" name="Picture 6">
+            <a:extLst>
+              <a:ext uri="{FF2B5EF4-FFF2-40B4-BE49-F238E27FC236}">
+                <a16:creationId xmlns:a16="http://schemas.microsoft.com/office/drawing/2014/main" id="{B97B2EA9-9354-91DA-AA85-346CE4A7F9BA}"/>
+              </a:ext>
+            </a:extLst>
+          </p:cNvPr>
+          <p:cNvPicPr>
+            <a:picLocks noChangeAspect="1"/>
+          </p:cNvPicPr>
+          <p:nvPr/>
+        </p:nvPicPr>
+        <p:blipFill rotWithShape="1">
+          <a:blip r:embed="rId5"/>
+          <a:stretch>
+            <a:fillRect/>
+          </a:stretch>
+        </p:blipFill>
+        <p:spPr>
+          <a:xfrm>
+            <a:off x="1035050" y="8680450"/>
+            <a:ext cx="22049710" cy="3695700"/>
+          </a:xfrm>
+          <a:prstGeom prst="rect">
+            <a:avLst/>
+          </a:prstGeom>
+        </p:spPr>
+      </p:pic>
       <p:sp>
         <p:nvSpPr>
           <p:cNvPr id="9" name="TextBox 9">
             <a:extLst>
               <a:ext uri="{FF2B5EF4-FFF2-40B4-BE49-F238E27FC236}">
-                <a16:creationId xmlns:a16="http://schemas.microsoft.com/office/drawing/2014/main" id="{AC551B92-9918-3185-399E-CD84D8384204}"/>
+                <a16:creationId xmlns:a16="http://schemas.microsoft.com/office/drawing/2014/main" id="{5FF673C9-AF73-CBCD-4166-50DEE741BE44}"/>
               </a:ext>
             </a:extLst>
           </p:cNvPr>
@@ -18176,8 +16992,8 @@
         </p:nvSpPr>
         <p:spPr>
           <a:xfrm>
-            <a:off x="1562100" y="4863825"/>
-            <a:ext cx="21450300" cy="7023650"/>
+            <a:off x="1278859" y="4724124"/>
+            <a:ext cx="10566401" cy="3416575"/>
           </a:xfrm>
           <a:prstGeom prst="rect">
             <a:avLst/>
@@ -18187,250 +17003,129 @@
           <a:bodyPr anchor="t"/>
           <a:lstStyle/>
           <a:p>
-            <a:r>
-              <a:rPr lang="ko-KR" altLang="en-US" sz="3600" dirty="0"/>
-              <a:t>최근 탄소중립 시나리오와 신재생에너지 의무할당제</a:t>
-            </a:r>
-            <a:r>
-              <a:rPr lang="en-US" altLang="ko-KR" sz="3600" dirty="0"/>
-              <a:t>(RPS) </a:t>
-            </a:r>
-            <a:r>
-              <a:rPr lang="ko-KR" altLang="en-US" sz="3600" dirty="0"/>
-              <a:t>확대 등 정부의 에너지 전환 정책에 힘입어 국내 태양광 발전 설비는 전국적으로 가파른 보급 확대를 보이고 있습니다</a:t>
-            </a:r>
-            <a:r>
-              <a:rPr lang="en-US" altLang="ko-KR" sz="3600" dirty="0"/>
-              <a:t>. </a:t>
-            </a:r>
-            <a:r>
-              <a:rPr lang="ko-KR" altLang="en-US" sz="3600" dirty="0"/>
-              <a:t>실제로 </a:t>
-            </a:r>
-            <a:r>
-              <a:rPr lang="en-US" altLang="ko-KR" sz="3600" dirty="0"/>
-              <a:t>2021</a:t>
-            </a:r>
-            <a:r>
-              <a:rPr lang="ko-KR" altLang="en-US" sz="3600" dirty="0"/>
-              <a:t>년부터 </a:t>
-            </a:r>
-            <a:r>
-              <a:rPr lang="en-US" altLang="ko-KR" sz="3600" dirty="0"/>
-              <a:t>2024</a:t>
-            </a:r>
-            <a:r>
-              <a:rPr lang="ko-KR" altLang="en-US" sz="3600" dirty="0"/>
-              <a:t>년까지의 실적을 살펴보면</a:t>
-            </a:r>
-            <a:r>
-              <a:rPr lang="en-US" altLang="ko-KR" sz="3600" dirty="0"/>
-              <a:t>, </a:t>
-            </a:r>
-            <a:r>
-              <a:rPr lang="ko-KR" altLang="en-US" sz="3600" dirty="0">
-                <a:solidFill>
-                  <a:srgbClr val="FF0000"/>
-                </a:solidFill>
-              </a:rPr>
-              <a:t>전국 시도별 설비 용량은 매년 지속적인 성장을 기록</a:t>
-            </a:r>
-            <a:r>
-              <a:rPr lang="ko-KR" altLang="en-US" sz="3600" dirty="0"/>
-              <a:t>하며 </a:t>
-            </a:r>
-            <a:r>
-              <a:rPr lang="ko-KR" altLang="en-US" sz="3600" dirty="0">
-                <a:solidFill>
-                  <a:srgbClr val="FF0000"/>
-                </a:solidFill>
-              </a:rPr>
-              <a:t>국내 신재생에너지의 핵심 전력원</a:t>
-            </a:r>
-            <a:r>
-              <a:rPr lang="ko-KR" altLang="en-US" sz="3600" dirty="0"/>
-              <a:t>으로 자리 잡았습니다</a:t>
-            </a:r>
-            <a:r>
-              <a:rPr lang="en-US" altLang="ko-KR" sz="3600" dirty="0"/>
-              <a:t>.</a:t>
-            </a:r>
-          </a:p>
-          <a:p>
-            <a:r>
-              <a:rPr lang="ko-KR" altLang="en-US" sz="3600" dirty="0"/>
-              <a:t>하지만 이러한 양적 성장에도 불구하고</a:t>
-            </a:r>
-            <a:r>
-              <a:rPr lang="en-US" altLang="ko-KR" sz="3600" dirty="0"/>
-              <a:t>, </a:t>
-            </a:r>
-            <a:r>
-              <a:rPr lang="ko-KR" altLang="en-US" sz="3600" dirty="0"/>
-              <a:t>태양광 발전은 입지 조건에 따른 발전 효율 편차가 매우 크게 나타나고 있습니다</a:t>
-            </a:r>
-            <a:r>
-              <a:rPr lang="en-US" altLang="ko-KR" sz="3600" dirty="0"/>
-              <a:t>. </a:t>
-            </a:r>
-            <a:r>
-              <a:rPr lang="ko-KR" altLang="en-US" sz="3600" dirty="0">
-                <a:solidFill>
-                  <a:srgbClr val="FF0000"/>
-                </a:solidFill>
-              </a:rPr>
-              <a:t>전남</a:t>
-            </a:r>
-            <a:r>
-              <a:rPr lang="en-US" altLang="ko-KR" sz="3600" dirty="0">
-                <a:solidFill>
-                  <a:srgbClr val="FF0000"/>
-                </a:solidFill>
-              </a:rPr>
-              <a:t>, </a:t>
-            </a:r>
-            <a:r>
-              <a:rPr lang="ko-KR" altLang="en-US" sz="3600" dirty="0">
-                <a:solidFill>
-                  <a:srgbClr val="FF0000"/>
-                </a:solidFill>
-              </a:rPr>
-              <a:t>경북 등 일사량이 풍부한 남부권에 설비가 집중</a:t>
-            </a:r>
-            <a:r>
-              <a:rPr lang="ko-KR" altLang="en-US" sz="3600" dirty="0"/>
-              <a:t>되어 있으나</a:t>
-            </a:r>
-            <a:r>
-              <a:rPr lang="en-US" altLang="ko-KR" sz="3600" dirty="0"/>
-              <a:t>, </a:t>
-            </a:r>
-            <a:r>
-              <a:rPr lang="ko-KR" altLang="en-US" sz="3600" dirty="0"/>
-              <a:t>최근 이상기후로 인한 기록적인 폭염과 지역별 미세먼지 농도 차이 등 </a:t>
-            </a:r>
-            <a:r>
-              <a:rPr lang="ko-KR" altLang="en-US" sz="3600" dirty="0">
-                <a:solidFill>
-                  <a:srgbClr val="FF0000"/>
-                </a:solidFill>
-              </a:rPr>
-              <a:t>기상 요인이 실제 발전량에 미치는 영향</a:t>
-            </a:r>
-            <a:r>
-              <a:rPr lang="ko-KR" altLang="en-US" sz="3600" dirty="0"/>
-              <a:t>이 커지고 있습니다</a:t>
-            </a:r>
-            <a:r>
-              <a:rPr lang="en-US" altLang="ko-KR" sz="3600" dirty="0"/>
-              <a:t>. </a:t>
-            </a:r>
-            <a:r>
-              <a:rPr lang="ko-KR" altLang="en-US" sz="3600" dirty="0"/>
-              <a:t>이는 </a:t>
-            </a:r>
-            <a:r>
-              <a:rPr lang="ko-KR" altLang="en-US" sz="3600" dirty="0">
-                <a:solidFill>
-                  <a:srgbClr val="FF0000"/>
-                </a:solidFill>
-              </a:rPr>
-              <a:t>단순 설비 증설만으로는 안정적인 전력 공급을 보장하기 어렵다</a:t>
-            </a:r>
-            <a:r>
-              <a:rPr lang="ko-KR" altLang="en-US" sz="3600" dirty="0"/>
-              <a:t>는 점을 시사합니다</a:t>
-            </a:r>
-            <a:r>
-              <a:rPr lang="en-US" altLang="ko-KR" sz="3600" dirty="0"/>
-              <a:t>.</a:t>
-            </a:r>
-          </a:p>
-          <a:p>
-            <a:r>
-              <a:rPr lang="ko-KR" altLang="en-US" sz="3600" dirty="0"/>
-              <a:t>현재 제공되는 태양광 데이터는 주로 단순 발전량 합계나 설비 현황 위주의 수치로 구성되어 있어</a:t>
-            </a:r>
-            <a:r>
-              <a:rPr lang="en-US" altLang="ko-KR" sz="3600" dirty="0"/>
-              <a:t>, </a:t>
-            </a:r>
-            <a:r>
-              <a:rPr lang="ko-KR" altLang="en-US" sz="3600" dirty="0"/>
-              <a:t>기온 변화에 따른 발전 효율 저하</a:t>
-            </a:r>
-            <a:r>
-              <a:rPr lang="en-US" altLang="ko-KR" sz="3600" dirty="0"/>
-              <a:t>(</a:t>
-            </a:r>
-            <a:r>
-              <a:rPr lang="ko-KR" altLang="en-US" sz="3600" dirty="0"/>
-              <a:t>온도계수</a:t>
-            </a:r>
-            <a:r>
-              <a:rPr lang="en-US" altLang="ko-KR" sz="3600" dirty="0"/>
-              <a:t>)</a:t>
-            </a:r>
-            <a:r>
-              <a:rPr lang="ko-KR" altLang="en-US" sz="3600" dirty="0"/>
-              <a:t>와 같은 실질적인 변수들이 정량적으로 충분히 고려되지 않고 있습니다</a:t>
-            </a:r>
-            <a:r>
-              <a:rPr lang="en-US" altLang="ko-KR" sz="3600" dirty="0"/>
-              <a:t>. </a:t>
-            </a:r>
-            <a:r>
-              <a:rPr lang="ko-KR" altLang="en-US" sz="3600" dirty="0"/>
-              <a:t>따라서 </a:t>
-            </a:r>
-            <a:r>
-              <a:rPr lang="ko-KR" altLang="en-US" sz="3600" dirty="0">
-                <a:solidFill>
-                  <a:srgbClr val="FF0000"/>
-                </a:solidFill>
-              </a:rPr>
-              <a:t>전국 지역별 발전량과 기상 데이터를 결합하여 발전 효율의 최적 지역을 도출</a:t>
-            </a:r>
-            <a:r>
-              <a:rPr lang="ko-KR" altLang="en-US" sz="3600" dirty="0"/>
-              <a:t>하고</a:t>
-            </a:r>
-            <a:r>
-              <a:rPr lang="en-US" altLang="ko-KR" sz="3600" dirty="0"/>
-              <a:t>, </a:t>
-            </a:r>
-            <a:r>
-              <a:rPr lang="ko-KR" altLang="en-US" sz="3600" dirty="0">
-                <a:solidFill>
-                  <a:srgbClr val="FF0000"/>
-                </a:solidFill>
-              </a:rPr>
-              <a:t>지역 특성에 맞는 유지보수 및 입지 전략을 수립</a:t>
-            </a:r>
-            <a:r>
-              <a:rPr lang="ko-KR" altLang="en-US" sz="3600" dirty="0"/>
-              <a:t>하는 것이 탄소중립 목표 달성을 위한 핵심 과제입니다</a:t>
-            </a:r>
-            <a:r>
-              <a:rPr lang="en-US" altLang="ko-KR" sz="3600" dirty="0"/>
-              <a:t>.</a:t>
-            </a:r>
-          </a:p>
-          <a:p>
             <a:pPr lvl="0" algn="l">
               <a:lnSpc>
                 <a:spcPct val="204000"/>
               </a:lnSpc>
               <a:defRPr/>
             </a:pPr>
-            <a:endParaRPr lang="en-GB" sz="4400" b="0" i="0" u="none" strike="noStrike" spc="-317" dirty="0">
-              <a:solidFill>
-                <a:srgbClr val="000000"/>
-              </a:solidFill>
-              <a:latin typeface="Pretendard Regular"/>
-              <a:ea typeface="Pretendard Regular"/>
-            </a:endParaRPr>
-          </a:p>
+            <a:r>
+              <a:rPr lang="ko-KR" altLang="en-US" sz="3600" spc="-317" dirty="0">
+                <a:solidFill>
+                  <a:srgbClr val="000000"/>
+                </a:solidFill>
+                <a:latin typeface="맑은 고딕" panose="020B0503020000020004" pitchFamily="50" charset="-127"/>
+                <a:ea typeface="맑은 고딕" panose="020B0503020000020004" pitchFamily="50" charset="-127"/>
+              </a:rPr>
+              <a:t>분석 </a:t>
+            </a:r>
+            <a:r>
+              <a:rPr lang="ko-KR" altLang="en-US" sz="3600" b="0" i="0" u="none" strike="noStrike" spc="-317" dirty="0">
+                <a:solidFill>
+                  <a:srgbClr val="000000"/>
+                </a:solidFill>
+                <a:latin typeface="맑은 고딕" panose="020B0503020000020004" pitchFamily="50" charset="-127"/>
+                <a:ea typeface="맑은 고딕" panose="020B0503020000020004" pitchFamily="50" charset="-127"/>
+              </a:rPr>
+              <a:t>배경 </a:t>
+            </a:r>
+            <a:r>
+              <a:rPr lang="en-US" altLang="ko-KR" sz="3600" b="0" i="0" u="none" strike="noStrike" spc="-317" dirty="0">
+                <a:solidFill>
+                  <a:srgbClr val="000000"/>
+                </a:solidFill>
+                <a:latin typeface="맑은 고딕" panose="020B0503020000020004" pitchFamily="50" charset="-127"/>
+                <a:ea typeface="맑은 고딕" panose="020B0503020000020004" pitchFamily="50" charset="-127"/>
+              </a:rPr>
+              <a:t>: </a:t>
+            </a:r>
+            <a:r>
+              <a:rPr lang="ko-KR" altLang="en-US" sz="3600" b="0" i="0" u="none" strike="noStrike" spc="-317" dirty="0">
+                <a:solidFill>
+                  <a:srgbClr val="FF0000"/>
+                </a:solidFill>
+                <a:latin typeface="맑은 고딕" panose="020B0503020000020004" pitchFamily="50" charset="-127"/>
+                <a:ea typeface="맑은 고딕" panose="020B0503020000020004" pitchFamily="50" charset="-127"/>
+              </a:rPr>
+              <a:t>국내 태양광 발전 설비는 급격히 증가</a:t>
+            </a:r>
+            <a:r>
+              <a:rPr lang="ko-KR" altLang="en-US" sz="3600" b="0" i="0" u="none" strike="noStrike" spc="-317" dirty="0">
+                <a:solidFill>
+                  <a:srgbClr val="000000"/>
+                </a:solidFill>
+                <a:latin typeface="맑은 고딕" panose="020B0503020000020004" pitchFamily="50" charset="-127"/>
+                <a:ea typeface="맑은 고딕" panose="020B0503020000020004" pitchFamily="50" charset="-127"/>
+              </a:rPr>
+              <a:t>했으나</a:t>
+            </a:r>
+            <a:r>
+              <a:rPr lang="en-US" altLang="ko-KR" sz="3600" b="0" i="0" u="none" strike="noStrike" spc="-317" dirty="0">
+                <a:solidFill>
+                  <a:srgbClr val="000000"/>
+                </a:solidFill>
+                <a:latin typeface="맑은 고딕" panose="020B0503020000020004" pitchFamily="50" charset="-127"/>
+                <a:ea typeface="맑은 고딕" panose="020B0503020000020004" pitchFamily="50" charset="-127"/>
+              </a:rPr>
+              <a:t>, </a:t>
+            </a:r>
+            <a:r>
+              <a:rPr lang="ko-KR" altLang="en-US" sz="3600" b="0" i="0" u="none" strike="noStrike" spc="-317" dirty="0">
+                <a:solidFill>
+                  <a:srgbClr val="FF0000"/>
+                </a:solidFill>
+                <a:latin typeface="맑은 고딕" panose="020B0503020000020004" pitchFamily="50" charset="-127"/>
+                <a:ea typeface="맑은 고딕" panose="020B0503020000020004" pitchFamily="50" charset="-127"/>
+              </a:rPr>
+              <a:t>기상조건 및 지역적 특성에 다른 실제 발전 효율에 대한 정밀 분석은 부족</a:t>
+            </a:r>
+            <a:r>
+              <a:rPr lang="ko-KR" altLang="en-US" sz="3600" b="0" i="0" u="none" strike="noStrike" spc="-317" dirty="0">
+                <a:solidFill>
+                  <a:srgbClr val="000000"/>
+                </a:solidFill>
+                <a:latin typeface="맑은 고딕" panose="020B0503020000020004" pitchFamily="50" charset="-127"/>
+                <a:ea typeface="맑은 고딕" panose="020B0503020000020004" pitchFamily="50" charset="-127"/>
+              </a:rPr>
+              <a:t>한 실정이다</a:t>
+            </a:r>
+            <a:r>
+              <a:rPr lang="en-US" altLang="ko-KR" sz="3600" b="0" i="0" u="none" strike="noStrike" spc="-317" dirty="0">
+                <a:solidFill>
+                  <a:srgbClr val="000000"/>
+                </a:solidFill>
+                <a:latin typeface="맑은 고딕" panose="020B0503020000020004" pitchFamily="50" charset="-127"/>
+                <a:ea typeface="맑은 고딕" panose="020B0503020000020004" pitchFamily="50" charset="-127"/>
+              </a:rPr>
+              <a:t>.</a:t>
+            </a:r>
+          </a:p>
+        </p:txBody>
+      </p:sp>
+      <p:sp>
+        <p:nvSpPr>
+          <p:cNvPr id="11" name="TextBox 9">
+            <a:extLst>
+              <a:ext uri="{FF2B5EF4-FFF2-40B4-BE49-F238E27FC236}">
+                <a16:creationId xmlns:a16="http://schemas.microsoft.com/office/drawing/2014/main" id="{D7E4EABD-935C-264B-EADA-B1D53AEB3586}"/>
+              </a:ext>
+            </a:extLst>
+          </p:cNvPr>
+          <p:cNvSpPr txBox="1"/>
+          <p:nvPr/>
+        </p:nvSpPr>
+        <p:spPr>
+          <a:xfrm>
+            <a:off x="12350750" y="4685751"/>
+            <a:ext cx="11163300" cy="2679974"/>
+          </a:xfrm>
+          <a:prstGeom prst="rect">
+            <a:avLst/>
+          </a:prstGeom>
+        </p:spPr>
+        <p:txBody>
+          <a:bodyPr anchor="t"/>
+          <a:lstStyle/>
           <a:p>
             <a:pPr lvl="0" algn="l">
               <a:lnSpc>
@@ -18438,20 +17133,324 @@
               </a:lnSpc>
               <a:defRPr/>
             </a:pPr>
-            <a:endParaRPr lang="en-GB" sz="4400" b="0" i="0" u="none" strike="noStrike" spc="-317" dirty="0">
+            <a:r>
+              <a:rPr lang="ko-KR" altLang="en-US" sz="3600" b="0" i="0" u="none" strike="noStrike" spc="-317" dirty="0">
+                <a:solidFill>
+                  <a:srgbClr val="000000"/>
+                </a:solidFill>
+                <a:latin typeface="맑은 고딕" panose="020B0503020000020004" pitchFamily="50" charset="-127"/>
+                <a:ea typeface="맑은 고딕" panose="020B0503020000020004" pitchFamily="50" charset="-127"/>
+              </a:rPr>
+              <a:t>분석 목적</a:t>
+            </a:r>
+            <a:r>
+              <a:rPr lang="en-US" altLang="ko-KR" sz="3600" b="0" i="0" u="none" strike="noStrike" spc="-317" dirty="0">
+                <a:solidFill>
+                  <a:srgbClr val="000000"/>
+                </a:solidFill>
+                <a:latin typeface="맑은 고딕" panose="020B0503020000020004" pitchFamily="50" charset="-127"/>
+                <a:ea typeface="맑은 고딕" panose="020B0503020000020004" pitchFamily="50" charset="-127"/>
+              </a:rPr>
+              <a:t>: </a:t>
+            </a:r>
+            <a:r>
+              <a:rPr lang="ko-KR" altLang="en-US" sz="3600" b="0" i="0" u="none" strike="noStrike" spc="-317" dirty="0">
+                <a:solidFill>
+                  <a:srgbClr val="000000"/>
+                </a:solidFill>
+                <a:latin typeface="맑은 고딕" panose="020B0503020000020004" pitchFamily="50" charset="-127"/>
+                <a:ea typeface="맑은 고딕" panose="020B0503020000020004" pitchFamily="50" charset="-127"/>
+              </a:rPr>
+              <a:t>지역별 환경 데이터를 기반으로 </a:t>
+            </a:r>
+            <a:r>
+              <a:rPr lang="ko-KR" altLang="en-US" sz="3600" b="0" i="0" u="none" strike="noStrike" spc="-317" dirty="0">
+                <a:solidFill>
+                  <a:srgbClr val="FF0000"/>
+                </a:solidFill>
+                <a:latin typeface="맑은 고딕" panose="020B0503020000020004" pitchFamily="50" charset="-127"/>
+                <a:ea typeface="맑은 고딕" panose="020B0503020000020004" pitchFamily="50" charset="-127"/>
+              </a:rPr>
+              <a:t>지역별 태양광 발전 효율 순위를 도출</a:t>
+            </a:r>
+            <a:r>
+              <a:rPr lang="ko-KR" altLang="en-US" sz="3600" b="0" i="0" u="none" strike="noStrike" spc="-317" dirty="0">
+                <a:solidFill>
+                  <a:srgbClr val="000000"/>
+                </a:solidFill>
+                <a:latin typeface="맑은 고딕" panose="020B0503020000020004" pitchFamily="50" charset="-127"/>
+                <a:ea typeface="맑은 고딕" panose="020B0503020000020004" pitchFamily="50" charset="-127"/>
+              </a:rPr>
+              <a:t>하고</a:t>
+            </a:r>
+            <a:r>
+              <a:rPr lang="en-US" altLang="ko-KR" sz="3600" b="0" i="0" u="none" strike="noStrike" spc="-317" dirty="0">
+                <a:solidFill>
+                  <a:srgbClr val="000000"/>
+                </a:solidFill>
+                <a:latin typeface="맑은 고딕" panose="020B0503020000020004" pitchFamily="50" charset="-127"/>
+                <a:ea typeface="맑은 고딕" panose="020B0503020000020004" pitchFamily="50" charset="-127"/>
+              </a:rPr>
+              <a:t>, </a:t>
+            </a:r>
+            <a:r>
+              <a:rPr lang="ko-KR" altLang="en-US" sz="3600" b="0" i="0" u="none" strike="noStrike" spc="-317" dirty="0">
+                <a:solidFill>
+                  <a:srgbClr val="000000"/>
+                </a:solidFill>
+                <a:latin typeface="맑은 고딕" panose="020B0503020000020004" pitchFamily="50" charset="-127"/>
+                <a:ea typeface="맑은 고딕" panose="020B0503020000020004" pitchFamily="50" charset="-127"/>
+              </a:rPr>
+              <a:t>이를 바탕으로 </a:t>
+            </a:r>
+            <a:r>
+              <a:rPr lang="ko-KR" altLang="en-US" sz="3600" b="0" i="0" u="none" strike="noStrike" spc="-317" dirty="0">
+                <a:solidFill>
+                  <a:srgbClr val="FF0000"/>
+                </a:solidFill>
+                <a:latin typeface="맑은 고딕" panose="020B0503020000020004" pitchFamily="50" charset="-127"/>
+                <a:ea typeface="맑은 고딕" panose="020B0503020000020004" pitchFamily="50" charset="-127"/>
+              </a:rPr>
+              <a:t>지역별 맞춤 전략 및 정책 가이드를 제안</a:t>
+            </a:r>
+            <a:r>
+              <a:rPr lang="ko-KR" altLang="en-US" sz="3600" b="0" i="0" u="none" strike="noStrike" spc="-317" dirty="0">
+                <a:solidFill>
+                  <a:srgbClr val="000000"/>
+                </a:solidFill>
+                <a:latin typeface="맑은 고딕" panose="020B0503020000020004" pitchFamily="50" charset="-127"/>
+                <a:ea typeface="맑은 고딕" panose="020B0503020000020004" pitchFamily="50" charset="-127"/>
+              </a:rPr>
+              <a:t>하고자 한다</a:t>
+            </a:r>
+            <a:r>
+              <a:rPr lang="en-US" altLang="ko-KR" sz="3600" b="0" i="0" u="none" strike="noStrike" spc="-317" dirty="0">
+                <a:solidFill>
+                  <a:srgbClr val="000000"/>
+                </a:solidFill>
+                <a:latin typeface="맑은 고딕" panose="020B0503020000020004" pitchFamily="50" charset="-127"/>
+                <a:ea typeface="맑은 고딕" panose="020B0503020000020004" pitchFamily="50" charset="-127"/>
+              </a:rPr>
+              <a:t>.</a:t>
+            </a:r>
+            <a:endParaRPr lang="en-GB" sz="3600" b="0" i="0" u="none" strike="noStrike" spc="-317" dirty="0">
               <a:solidFill>
                 <a:srgbClr val="000000"/>
               </a:solidFill>
-              <a:latin typeface="Pretendard Regular"/>
-              <a:ea typeface="Pretendard Regular"/>
+              <a:latin typeface="맑은 고딕" panose="020B0503020000020004" pitchFamily="50" charset="-127"/>
+              <a:ea typeface="맑은 고딕" panose="020B0503020000020004" pitchFamily="50" charset="-127"/>
             </a:endParaRPr>
+          </a:p>
+        </p:txBody>
+      </p:sp>
+      <p:sp>
+        <p:nvSpPr>
+          <p:cNvPr id="12" name="TextBox 9">
+            <a:extLst>
+              <a:ext uri="{FF2B5EF4-FFF2-40B4-BE49-F238E27FC236}">
+                <a16:creationId xmlns:a16="http://schemas.microsoft.com/office/drawing/2014/main" id="{83AF5CD5-960D-F095-9444-63B16AC6E0E2}"/>
+              </a:ext>
+            </a:extLst>
+          </p:cNvPr>
+          <p:cNvSpPr txBox="1"/>
+          <p:nvPr/>
+        </p:nvSpPr>
+        <p:spPr>
+          <a:xfrm>
+            <a:off x="1238250" y="9216888"/>
+            <a:ext cx="22402801" cy="3207025"/>
+          </a:xfrm>
+          <a:prstGeom prst="rect">
+            <a:avLst/>
+          </a:prstGeom>
+        </p:spPr>
+        <p:txBody>
+          <a:bodyPr anchor="t"/>
+          <a:lstStyle/>
+          <a:p>
+            <a:pPr lvl="0" algn="l">
+              <a:lnSpc>
+                <a:spcPct val="204000"/>
+              </a:lnSpc>
+              <a:defRPr/>
+            </a:pPr>
+            <a:r>
+              <a:rPr lang="ko-KR" altLang="en-US" sz="3600" spc="-317" dirty="0">
+                <a:solidFill>
+                  <a:srgbClr val="000000"/>
+                </a:solidFill>
+                <a:latin typeface="맑은 고딕" panose="020B0503020000020004" pitchFamily="50" charset="-127"/>
+                <a:ea typeface="맑은 고딕" panose="020B0503020000020004" pitchFamily="50" charset="-127"/>
+              </a:rPr>
+              <a:t>문제제기</a:t>
+            </a:r>
+            <a:r>
+              <a:rPr lang="en-US" altLang="ko-KR" sz="3600" spc="-317" dirty="0">
+                <a:solidFill>
+                  <a:srgbClr val="000000"/>
+                </a:solidFill>
+                <a:latin typeface="맑은 고딕" panose="020B0503020000020004" pitchFamily="50" charset="-127"/>
+                <a:ea typeface="맑은 고딕" panose="020B0503020000020004" pitchFamily="50" charset="-127"/>
+              </a:rPr>
+              <a:t>: </a:t>
+            </a:r>
+            <a:r>
+              <a:rPr lang="ko-KR" altLang="en-US" sz="3600" spc="-317" dirty="0">
+                <a:solidFill>
+                  <a:srgbClr val="FF0000"/>
+                </a:solidFill>
+                <a:latin typeface="맑은 고딕" panose="020B0503020000020004" pitchFamily="50" charset="-127"/>
+                <a:ea typeface="맑은 고딕" panose="020B0503020000020004" pitchFamily="50" charset="-127"/>
+              </a:rPr>
+              <a:t>동일 설비 용량 대비 지역별 발전량 편차가 발생하는 원인</a:t>
+            </a:r>
+            <a:r>
+              <a:rPr lang="en-US" altLang="ko-KR" sz="3600" spc="-317" dirty="0">
+                <a:solidFill>
+                  <a:srgbClr val="FF0000"/>
+                </a:solidFill>
+                <a:latin typeface="맑은 고딕" panose="020B0503020000020004" pitchFamily="50" charset="-127"/>
+                <a:ea typeface="맑은 고딕" panose="020B0503020000020004" pitchFamily="50" charset="-127"/>
+              </a:rPr>
+              <a:t>(</a:t>
+            </a:r>
+            <a:r>
+              <a:rPr lang="ko-KR" altLang="en-US" sz="3600" spc="-317" dirty="0">
+                <a:solidFill>
+                  <a:srgbClr val="FF0000"/>
+                </a:solidFill>
+                <a:latin typeface="맑은 고딕" panose="020B0503020000020004" pitchFamily="50" charset="-127"/>
+                <a:ea typeface="맑은 고딕" panose="020B0503020000020004" pitchFamily="50" charset="-127"/>
+              </a:rPr>
+              <a:t>기온</a:t>
+            </a:r>
+            <a:r>
+              <a:rPr lang="en-US" altLang="ko-KR" sz="3600" spc="-317" dirty="0">
+                <a:solidFill>
+                  <a:srgbClr val="FF0000"/>
+                </a:solidFill>
+                <a:latin typeface="맑은 고딕" panose="020B0503020000020004" pitchFamily="50" charset="-127"/>
+                <a:ea typeface="맑은 고딕" panose="020B0503020000020004" pitchFamily="50" charset="-127"/>
+              </a:rPr>
+              <a:t>, </a:t>
+            </a:r>
+            <a:r>
+              <a:rPr lang="ko-KR" altLang="en-US" sz="3600" spc="-317" dirty="0">
+                <a:solidFill>
+                  <a:srgbClr val="FF0000"/>
+                </a:solidFill>
+                <a:latin typeface="맑은 고딕" panose="020B0503020000020004" pitchFamily="50" charset="-127"/>
+                <a:ea typeface="맑은 고딕" panose="020B0503020000020004" pitchFamily="50" charset="-127"/>
+              </a:rPr>
+              <a:t>일사량</a:t>
+            </a:r>
+            <a:r>
+              <a:rPr lang="en-US" altLang="ko-KR" sz="3600" spc="-317" dirty="0">
+                <a:solidFill>
+                  <a:srgbClr val="FF0000"/>
+                </a:solidFill>
+                <a:latin typeface="맑은 고딕" panose="020B0503020000020004" pitchFamily="50" charset="-127"/>
+                <a:ea typeface="맑은 고딕" panose="020B0503020000020004" pitchFamily="50" charset="-127"/>
+              </a:rPr>
+              <a:t>, </a:t>
+            </a:r>
+            <a:r>
+              <a:rPr lang="ko-KR" altLang="en-US" sz="3600" spc="-317" dirty="0">
+                <a:solidFill>
+                  <a:srgbClr val="FF0000"/>
+                </a:solidFill>
+                <a:latin typeface="맑은 고딕" panose="020B0503020000020004" pitchFamily="50" charset="-127"/>
+                <a:ea typeface="맑은 고딕" panose="020B0503020000020004" pitchFamily="50" charset="-127"/>
+              </a:rPr>
+              <a:t>미세먼지 등</a:t>
+            </a:r>
+            <a:r>
+              <a:rPr lang="en-US" altLang="ko-KR" sz="3600" spc="-317" dirty="0">
+                <a:solidFill>
+                  <a:srgbClr val="FF0000"/>
+                </a:solidFill>
+                <a:latin typeface="맑은 고딕" panose="020B0503020000020004" pitchFamily="50" charset="-127"/>
+                <a:ea typeface="맑은 고딕" panose="020B0503020000020004" pitchFamily="50" charset="-127"/>
+              </a:rPr>
+              <a:t>)</a:t>
+            </a:r>
+            <a:r>
+              <a:rPr lang="ko-KR" altLang="en-US" sz="3600" spc="-317" dirty="0">
+                <a:solidFill>
+                  <a:srgbClr val="000000"/>
+                </a:solidFill>
+                <a:latin typeface="맑은 고딕" panose="020B0503020000020004" pitchFamily="50" charset="-127"/>
+                <a:ea typeface="맑은 고딕" panose="020B0503020000020004" pitchFamily="50" charset="-127"/>
+              </a:rPr>
+              <a:t>을 규명할 필요가 있다</a:t>
+            </a:r>
+            <a:r>
+              <a:rPr lang="en-US" altLang="ko-KR" sz="3600" spc="-317" dirty="0">
+                <a:solidFill>
+                  <a:srgbClr val="000000"/>
+                </a:solidFill>
+                <a:latin typeface="맑은 고딕" panose="020B0503020000020004" pitchFamily="50" charset="-127"/>
+                <a:ea typeface="맑은 고딕" panose="020B0503020000020004" pitchFamily="50" charset="-127"/>
+              </a:rPr>
+              <a:t>. </a:t>
+            </a:r>
+            <a:r>
+              <a:rPr lang="ko-KR" altLang="en-US" sz="3600" spc="-317" dirty="0">
+                <a:solidFill>
+                  <a:srgbClr val="000000"/>
+                </a:solidFill>
+                <a:latin typeface="맑은 고딕" panose="020B0503020000020004" pitchFamily="50" charset="-127"/>
+                <a:ea typeface="맑은 고딕" panose="020B0503020000020004" pitchFamily="50" charset="-127"/>
+              </a:rPr>
+              <a:t>특히</a:t>
+            </a:r>
+            <a:r>
+              <a:rPr lang="en-US" altLang="ko-KR" sz="3600" spc="-317" dirty="0">
+                <a:solidFill>
+                  <a:srgbClr val="000000"/>
+                </a:solidFill>
+                <a:latin typeface="맑은 고딕" panose="020B0503020000020004" pitchFamily="50" charset="-127"/>
+                <a:ea typeface="맑은 고딕" panose="020B0503020000020004" pitchFamily="50" charset="-127"/>
+              </a:rPr>
+              <a:t>, </a:t>
+            </a:r>
+            <a:r>
+              <a:rPr lang="ko-KR" altLang="en-US" sz="3600" spc="-317" dirty="0">
+                <a:solidFill>
+                  <a:srgbClr val="000000"/>
+                </a:solidFill>
+                <a:latin typeface="맑은 고딕" panose="020B0503020000020004" pitchFamily="50" charset="-127"/>
+                <a:ea typeface="맑은 고딕" panose="020B0503020000020004" pitchFamily="50" charset="-127"/>
+              </a:rPr>
+              <a:t>고온일때 발생하는 패널 효율 저하 현상 등 </a:t>
+            </a:r>
+            <a:r>
+              <a:rPr lang="ko-KR" altLang="en-US" sz="3600" spc="-317" dirty="0">
+                <a:solidFill>
+                  <a:srgbClr val="FF0000"/>
+                </a:solidFill>
+                <a:latin typeface="맑은 고딕" panose="020B0503020000020004" pitchFamily="50" charset="-127"/>
+                <a:ea typeface="맑은 고딕" panose="020B0503020000020004" pitchFamily="50" charset="-127"/>
+              </a:rPr>
+              <a:t>외부요인에 따른 실질 효율 분석이 시급하다</a:t>
+            </a:r>
+            <a:r>
+              <a:rPr lang="en-US" altLang="ko-KR" sz="3600" spc="-317" dirty="0">
+                <a:solidFill>
+                  <a:srgbClr val="FF0000"/>
+                </a:solidFill>
+                <a:latin typeface="맑은 고딕" panose="020B0503020000020004" pitchFamily="50" charset="-127"/>
+                <a:ea typeface="맑은 고딕" panose="020B0503020000020004" pitchFamily="50" charset="-127"/>
+              </a:rPr>
+              <a:t>.</a:t>
+            </a:r>
           </a:p>
         </p:txBody>
       </p:sp>
     </p:spTree>
     <p:extLst>
       <p:ext uri="{BB962C8B-B14F-4D97-AF65-F5344CB8AC3E}">
-        <p14:creationId xmlns:p14="http://schemas.microsoft.com/office/powerpoint/2010/main" val="582025076"/>
+        <p14:creationId xmlns:p14="http://schemas.microsoft.com/office/powerpoint/2010/main" val="2082418429"/>
       </p:ext>
     </p:extLst>
   </p:cSld>
@@ -18470,1141 +17469,6 @@
 </file>
 
 <file path=ppt/slides/slide5.xml><?xml version="1.0" encoding="utf-8"?>
-<p:sld xmlns:a="http://schemas.openxmlformats.org/drawingml/2006/main" xmlns:r="http://schemas.openxmlformats.org/officeDocument/2006/relationships" xmlns:p="http://schemas.openxmlformats.org/presentationml/2006/main">
-  <p:cSld>
-    <p:bg>
-      <p:bgPr>
-        <a:solidFill>
-          <a:srgbClr val="E4E5EB"/>
-        </a:solidFill>
-        <a:effectLst/>
-      </p:bgPr>
-    </p:bg>
-    <p:spTree>
-      <p:nvGrpSpPr>
-        <p:cNvPr id="1" name=""/>
-        <p:cNvGrpSpPr/>
-        <p:nvPr/>
-      </p:nvGrpSpPr>
-      <p:grpSpPr>
-        <a:xfrm>
-          <a:off x="0" y="0"/>
-          <a:ext cx="0" cy="0"/>
-          <a:chOff x="0" y="0"/>
-          <a:chExt cx="0" cy="0"/>
-        </a:xfrm>
-      </p:grpSpPr>
-      <p:pic>
-        <p:nvPicPr>
-          <p:cNvPr id="2" name="Picture 2"/>
-          <p:cNvPicPr>
-            <a:picLocks noChangeAspect="1"/>
-          </p:cNvPicPr>
-          <p:nvPr/>
-        </p:nvPicPr>
-        <p:blipFill rotWithShape="1">
-          <a:blip r:embed="rId2"/>
-          <a:stretch>
-            <a:fillRect/>
-          </a:stretch>
-        </p:blipFill>
-        <p:spPr>
-          <a:xfrm>
-            <a:off x="889000" y="736600"/>
-            <a:ext cx="22606000" cy="3695700"/>
-          </a:xfrm>
-          <a:prstGeom prst="rect">
-            <a:avLst/>
-          </a:prstGeom>
-        </p:spPr>
-      </p:pic>
-      <p:pic>
-        <p:nvPicPr>
-          <p:cNvPr id="3" name="Picture 3"/>
-          <p:cNvPicPr>
-            <a:picLocks noChangeAspect="1"/>
-          </p:cNvPicPr>
-          <p:nvPr/>
-        </p:nvPicPr>
-        <p:blipFill rotWithShape="1">
-          <a:blip r:embed="rId3"/>
-          <a:stretch>
-            <a:fillRect/>
-          </a:stretch>
-        </p:blipFill>
-        <p:spPr>
-          <a:xfrm rot="16200000">
-            <a:off x="7073900" y="-3289300"/>
-            <a:ext cx="10236200" cy="22606000"/>
-          </a:xfrm>
-          <a:prstGeom prst="rect">
-            <a:avLst/>
-          </a:prstGeom>
-        </p:spPr>
-      </p:pic>
-      <p:pic>
-        <p:nvPicPr>
-          <p:cNvPr id="4" name="Picture 4"/>
-          <p:cNvPicPr>
-            <a:picLocks noChangeAspect="1"/>
-          </p:cNvPicPr>
-          <p:nvPr/>
-        </p:nvPicPr>
-        <p:blipFill rotWithShape="1">
-          <a:blip r:embed="rId4"/>
-          <a:stretch>
-            <a:fillRect/>
-          </a:stretch>
-        </p:blipFill>
-        <p:spPr>
-          <a:xfrm>
-            <a:off x="1562100" y="1257300"/>
-            <a:ext cx="2514600" cy="2514600"/>
-          </a:xfrm>
-          <a:prstGeom prst="rect">
-            <a:avLst/>
-          </a:prstGeom>
-        </p:spPr>
-      </p:pic>
-      <p:sp>
-        <p:nvSpPr>
-          <p:cNvPr id="5" name="TextBox 5"/>
-          <p:cNvSpPr txBox="1"/>
-          <p:nvPr/>
-        </p:nvSpPr>
-        <p:spPr>
-          <a:xfrm>
-            <a:off x="4076700" y="1828525"/>
-            <a:ext cx="14605000" cy="1257300"/>
-          </a:xfrm>
-          <a:prstGeom prst="rect">
-            <a:avLst/>
-          </a:prstGeom>
-        </p:spPr>
-        <p:txBody>
-          <a:bodyPr lIns="0" tIns="89745" rIns="0" bIns="89745" anchor="ctr"/>
-          <a:lstStyle/>
-          <a:p>
-            <a:pPr lvl="0" algn="l">
-              <a:lnSpc>
-                <a:spcPct val="100000"/>
-              </a:lnSpc>
-              <a:defRPr/>
-            </a:pPr>
-            <a:r>
-              <a:rPr lang="ko-KR" sz="7065" b="0" i="0" u="none" strike="noStrike" spc="-71" dirty="0">
-                <a:solidFill>
-                  <a:srgbClr val="242424"/>
-                </a:solidFill>
-                <a:ea typeface="MapoDPP"/>
-              </a:rPr>
-              <a:t>분석</a:t>
-            </a:r>
-            <a:r>
-              <a:rPr lang="en-US" sz="7065" b="0" i="0" u="none" strike="noStrike" spc="-71" dirty="0">
-                <a:solidFill>
-                  <a:srgbClr val="242424"/>
-                </a:solidFill>
-                <a:latin typeface="MapoDPP"/>
-              </a:rPr>
-              <a:t> </a:t>
-            </a:r>
-            <a:r>
-              <a:rPr lang="ko-KR" altLang="en-US" sz="7065" b="0" i="0" u="none" strike="noStrike" spc="-71" dirty="0">
-                <a:solidFill>
-                  <a:srgbClr val="242424"/>
-                </a:solidFill>
-                <a:latin typeface="MapoDPP"/>
-              </a:rPr>
-              <a:t>배경 및 목적</a:t>
-            </a:r>
-          </a:p>
-        </p:txBody>
-      </p:sp>
-      <p:pic>
-        <p:nvPicPr>
-          <p:cNvPr id="6" name="Picture 6"/>
-          <p:cNvPicPr>
-            <a:picLocks noChangeAspect="1"/>
-          </p:cNvPicPr>
-          <p:nvPr/>
-        </p:nvPicPr>
-        <p:blipFill rotWithShape="1">
-          <a:blip r:embed="rId5"/>
-          <a:stretch>
-            <a:fillRect/>
-          </a:stretch>
-        </p:blipFill>
-        <p:spPr>
-          <a:xfrm>
-            <a:off x="1016000" y="4584700"/>
-            <a:ext cx="22402800" cy="7645400"/>
-          </a:xfrm>
-          <a:prstGeom prst="rect">
-            <a:avLst/>
-          </a:prstGeom>
-        </p:spPr>
-      </p:pic>
-      <p:pic>
-        <p:nvPicPr>
-          <p:cNvPr id="8" name="Picture 8"/>
-          <p:cNvPicPr>
-            <a:picLocks noChangeAspect="1"/>
-          </p:cNvPicPr>
-          <p:nvPr/>
-        </p:nvPicPr>
-        <p:blipFill rotWithShape="1">
-          <a:blip r:embed="rId6"/>
-          <a:stretch>
-            <a:fillRect/>
-          </a:stretch>
-        </p:blipFill>
-        <p:spPr>
-          <a:xfrm>
-            <a:off x="101600" y="-215900"/>
-            <a:ext cx="5486400" cy="5486400"/>
-          </a:xfrm>
-          <a:prstGeom prst="rect">
-            <a:avLst/>
-          </a:prstGeom>
-        </p:spPr>
-      </p:pic>
-      <p:sp>
-        <p:nvSpPr>
-          <p:cNvPr id="9" name="TextBox 9"/>
-          <p:cNvSpPr txBox="1"/>
-          <p:nvPr/>
-        </p:nvSpPr>
-        <p:spPr>
-          <a:xfrm>
-            <a:off x="1562099" y="4800600"/>
-            <a:ext cx="21450300" cy="6553200"/>
-          </a:xfrm>
-          <a:prstGeom prst="rect">
-            <a:avLst/>
-          </a:prstGeom>
-        </p:spPr>
-        <p:txBody>
-          <a:bodyPr anchor="t"/>
-          <a:lstStyle/>
-          <a:p>
-            <a:pPr lvl="0" algn="l">
-              <a:lnSpc>
-                <a:spcPct val="204000"/>
-              </a:lnSpc>
-              <a:defRPr/>
-            </a:pPr>
-            <a:r>
-              <a:rPr lang="en-US" sz="4535" b="0" i="0" u="none" strike="noStrike" spc="-317" dirty="0">
-                <a:solidFill>
-                  <a:srgbClr val="000000"/>
-                </a:solidFill>
-                <a:latin typeface="Pretendard Regular"/>
-              </a:rPr>
-              <a:t>-</a:t>
-            </a:r>
-            <a:r>
-              <a:rPr lang="ko-KR" altLang="en-US" sz="4400" b="0" i="0" u="none" strike="noStrike" spc="-317" dirty="0">
-                <a:solidFill>
-                  <a:srgbClr val="000000"/>
-                </a:solidFill>
-                <a:latin typeface="Pretendard Regular"/>
-              </a:rPr>
-              <a:t> </a:t>
-            </a:r>
-            <a:r>
-              <a:rPr lang="en-GB" sz="4400" b="0" i="0" u="none" strike="noStrike" spc="-317" dirty="0" err="1">
-                <a:solidFill>
-                  <a:srgbClr val="000000"/>
-                </a:solidFill>
-                <a:latin typeface="Pretendard Regular"/>
-                <a:ea typeface="Pretendard Regular"/>
-              </a:rPr>
-              <a:t>분석의</a:t>
-            </a:r>
-            <a:r>
-              <a:rPr lang="en-GB" sz="4400" b="0" i="0" u="none" strike="noStrike" spc="-317" dirty="0">
-                <a:solidFill>
-                  <a:srgbClr val="000000"/>
-                </a:solidFill>
-                <a:latin typeface="Pretendard Regular"/>
-                <a:ea typeface="Pretendard Regular"/>
-              </a:rPr>
-              <a:t> </a:t>
-            </a:r>
-            <a:r>
-              <a:rPr lang="en-GB" sz="4400" b="0" i="0" u="none" strike="noStrike" spc="-317" dirty="0" err="1">
-                <a:solidFill>
-                  <a:srgbClr val="000000"/>
-                </a:solidFill>
-                <a:latin typeface="Pretendard Regular"/>
-                <a:ea typeface="Pretendard Regular"/>
-              </a:rPr>
-              <a:t>목적</a:t>
-            </a:r>
-            <a:r>
-              <a:rPr lang="en-GB" sz="4400" b="0" i="0" u="none" strike="noStrike" spc="-317" dirty="0">
-                <a:solidFill>
-                  <a:srgbClr val="000000"/>
-                </a:solidFill>
-                <a:latin typeface="Pretendard Regular"/>
-                <a:ea typeface="Pretendard Regular"/>
-              </a:rPr>
-              <a:t>: </a:t>
-            </a:r>
-            <a:r>
-              <a:rPr lang="en-GB" sz="4400" b="0" i="0" u="none" strike="noStrike" spc="-317" dirty="0" err="1">
-                <a:solidFill>
-                  <a:srgbClr val="000000"/>
-                </a:solidFill>
-                <a:latin typeface="Pretendard Regular"/>
-                <a:ea typeface="Pretendard Regular"/>
-              </a:rPr>
-              <a:t>단순한</a:t>
-            </a:r>
-            <a:r>
-              <a:rPr lang="en-GB" sz="4400" b="0" i="0" u="none" strike="noStrike" spc="-317" dirty="0">
-                <a:solidFill>
-                  <a:srgbClr val="000000"/>
-                </a:solidFill>
-                <a:latin typeface="Pretendard Regular"/>
-                <a:ea typeface="Pretendard Regular"/>
-              </a:rPr>
-              <a:t> </a:t>
-            </a:r>
-            <a:r>
-              <a:rPr lang="ko-KR" altLang="en-US" sz="4400" b="0" i="0" u="none" strike="noStrike" spc="-317" dirty="0">
-                <a:solidFill>
-                  <a:srgbClr val="000000"/>
-                </a:solidFill>
-                <a:latin typeface="Pretendard Regular"/>
-                <a:ea typeface="Pretendard Regular"/>
-              </a:rPr>
-              <a:t>태양광 </a:t>
-            </a:r>
-            <a:r>
-              <a:rPr lang="en-GB" sz="4400" b="0" i="0" u="none" strike="noStrike" spc="-317" dirty="0" err="1">
-                <a:solidFill>
-                  <a:srgbClr val="000000"/>
-                </a:solidFill>
-                <a:latin typeface="Pretendard Regular"/>
-                <a:ea typeface="Pretendard Regular"/>
-              </a:rPr>
-              <a:t>설치</a:t>
-            </a:r>
-            <a:r>
-              <a:rPr lang="en-GB" sz="4400" b="0" i="0" u="none" strike="noStrike" spc="-317" dirty="0">
-                <a:solidFill>
-                  <a:srgbClr val="000000"/>
-                </a:solidFill>
-                <a:latin typeface="Pretendard Regular"/>
-                <a:ea typeface="Pretendard Regular"/>
-              </a:rPr>
-              <a:t> </a:t>
-            </a:r>
-            <a:r>
-              <a:rPr lang="en-GB" sz="4400" b="0" i="0" u="none" strike="noStrike" spc="-317" dirty="0" err="1">
-                <a:solidFill>
-                  <a:srgbClr val="000000"/>
-                </a:solidFill>
-                <a:latin typeface="Pretendard Regular"/>
-                <a:ea typeface="Pretendard Regular"/>
-              </a:rPr>
-              <a:t>확대가</a:t>
-            </a:r>
-            <a:r>
-              <a:rPr lang="en-GB" sz="4400" b="0" i="0" u="none" strike="noStrike" spc="-317" dirty="0">
-                <a:solidFill>
-                  <a:srgbClr val="000000"/>
-                </a:solidFill>
-                <a:latin typeface="Pretendard Regular"/>
-                <a:ea typeface="Pretendard Regular"/>
-              </a:rPr>
-              <a:t> </a:t>
-            </a:r>
-            <a:r>
-              <a:rPr lang="en-GB" sz="4400" b="0" i="0" u="none" strike="noStrike" spc="-317" dirty="0" err="1">
-                <a:solidFill>
-                  <a:srgbClr val="000000"/>
-                </a:solidFill>
-                <a:latin typeface="Pretendard Regular"/>
-                <a:ea typeface="Pretendard Regular"/>
-              </a:rPr>
-              <a:t>아닌</a:t>
-            </a:r>
-            <a:r>
-              <a:rPr lang="en-GB" sz="4400" b="0" i="0" u="none" strike="noStrike" spc="-317" dirty="0">
-                <a:solidFill>
-                  <a:srgbClr val="000000"/>
-                </a:solidFill>
-                <a:latin typeface="Pretendard Regular"/>
-                <a:ea typeface="Pretendard Regular"/>
-              </a:rPr>
-              <a:t>, </a:t>
-            </a:r>
-            <a:r>
-              <a:rPr lang="en-GB" sz="4400" b="0" i="0" u="none" strike="noStrike" spc="-317" dirty="0" err="1">
-                <a:solidFill>
-                  <a:srgbClr val="000000"/>
-                </a:solidFill>
-                <a:latin typeface="Pretendard Regular"/>
-                <a:ea typeface="Pretendard Regular"/>
-              </a:rPr>
-              <a:t>데이터</a:t>
-            </a:r>
-            <a:r>
-              <a:rPr lang="en-GB" sz="4400" b="0" i="0" u="none" strike="noStrike" spc="-317" dirty="0">
-                <a:solidFill>
-                  <a:srgbClr val="000000"/>
-                </a:solidFill>
-                <a:latin typeface="Pretendard Regular"/>
-                <a:ea typeface="Pretendard Regular"/>
-              </a:rPr>
-              <a:t> </a:t>
-            </a:r>
-            <a:r>
-              <a:rPr lang="en-GB" sz="4400" b="0" i="0" u="none" strike="noStrike" spc="-317" dirty="0" err="1">
-                <a:solidFill>
-                  <a:srgbClr val="000000"/>
-                </a:solidFill>
-                <a:latin typeface="Pretendard Regular"/>
-                <a:ea typeface="Pretendard Regular"/>
-              </a:rPr>
-              <a:t>분석을</a:t>
-            </a:r>
-            <a:r>
-              <a:rPr lang="en-GB" sz="4400" b="0" i="0" u="none" strike="noStrike" spc="-317" dirty="0">
-                <a:solidFill>
-                  <a:srgbClr val="000000"/>
-                </a:solidFill>
-                <a:latin typeface="Pretendard Regular"/>
-                <a:ea typeface="Pretendard Regular"/>
-              </a:rPr>
-              <a:t> </a:t>
-            </a:r>
-            <a:r>
-              <a:rPr lang="en-GB" sz="4400" b="0" i="0" u="none" strike="noStrike" spc="-317" dirty="0" err="1">
-                <a:solidFill>
-                  <a:srgbClr val="000000"/>
-                </a:solidFill>
-                <a:latin typeface="Pretendard Regular"/>
-                <a:ea typeface="Pretendard Regular"/>
-              </a:rPr>
-              <a:t>통한</a:t>
-            </a:r>
-            <a:r>
-              <a:rPr lang="en-GB" sz="4400" b="0" i="0" u="none" strike="noStrike" spc="-317" dirty="0">
-                <a:solidFill>
-                  <a:srgbClr val="000000"/>
-                </a:solidFill>
-                <a:latin typeface="Pretendard Regular"/>
-                <a:ea typeface="Pretendard Regular"/>
-              </a:rPr>
-              <a:t> </a:t>
-            </a:r>
-            <a:r>
-              <a:rPr lang="en-GB" sz="4400" b="0" i="0" u="none" strike="noStrike" spc="-317" dirty="0">
-                <a:solidFill>
-                  <a:srgbClr val="FF0000"/>
-                </a:solidFill>
-                <a:latin typeface="Pretendard Regular"/>
-                <a:ea typeface="Pretendard Regular"/>
-              </a:rPr>
-              <a:t>'</a:t>
-            </a:r>
-            <a:r>
-              <a:rPr lang="ko-KR" altLang="en-US" sz="4400" b="0" i="0" u="sng" strike="noStrike" spc="-317" dirty="0">
-                <a:solidFill>
-                  <a:srgbClr val="FF0000"/>
-                </a:solidFill>
-                <a:latin typeface="Pretendard Regular"/>
-                <a:ea typeface="Pretendard Regular"/>
-              </a:rPr>
-              <a:t>최적의</a:t>
-            </a:r>
-            <a:r>
-              <a:rPr lang="en-GB" sz="4400" b="0" i="0" u="sng" strike="noStrike" spc="-317" dirty="0">
-                <a:solidFill>
-                  <a:srgbClr val="FF0000"/>
-                </a:solidFill>
-                <a:latin typeface="Pretendard Regular"/>
-                <a:ea typeface="Pretendard Regular"/>
-              </a:rPr>
-              <a:t> </a:t>
-            </a:r>
-            <a:r>
-              <a:rPr lang="en-GB" sz="4400" b="0" i="0" u="sng" strike="noStrike" spc="-317" dirty="0" err="1">
-                <a:solidFill>
-                  <a:srgbClr val="FF0000"/>
-                </a:solidFill>
-                <a:latin typeface="Pretendard Regular"/>
-                <a:ea typeface="Pretendard Regular"/>
-              </a:rPr>
-              <a:t>효율</a:t>
-            </a:r>
-            <a:r>
-              <a:rPr lang="ko-KR" altLang="en-US" sz="4400" b="0" i="0" u="sng" strike="noStrike" spc="-317" dirty="0">
-                <a:solidFill>
-                  <a:srgbClr val="FF0000"/>
-                </a:solidFill>
-                <a:latin typeface="Pretendard Regular"/>
-                <a:ea typeface="Pretendard Regular"/>
-              </a:rPr>
-              <a:t> 분석</a:t>
-            </a:r>
-            <a:r>
-              <a:rPr lang="en-GB" sz="4400" b="0" i="0" u="none" strike="noStrike" spc="-317" dirty="0">
-                <a:solidFill>
-                  <a:srgbClr val="FF0000"/>
-                </a:solidFill>
-                <a:latin typeface="Pretendard Regular"/>
-                <a:ea typeface="Pretendard Regular"/>
-              </a:rPr>
-              <a:t>' </a:t>
-            </a:r>
-            <a:r>
-              <a:rPr lang="ko-KR" altLang="en-US" sz="4400" b="0" i="0" u="none" strike="noStrike" spc="-317" dirty="0">
-                <a:solidFill>
-                  <a:schemeClr val="tx1"/>
-                </a:solidFill>
-                <a:latin typeface="Pretendard Regular"/>
-                <a:ea typeface="Pretendard Regular"/>
-              </a:rPr>
-              <a:t>을</a:t>
-            </a:r>
-            <a:r>
-              <a:rPr lang="ko-KR" altLang="en-US" sz="4400" b="0" i="0" u="none" strike="noStrike" spc="-317" dirty="0">
-                <a:solidFill>
-                  <a:srgbClr val="FF0000"/>
-                </a:solidFill>
-                <a:latin typeface="Pretendard Regular"/>
-                <a:ea typeface="Pretendard Regular"/>
-              </a:rPr>
-              <a:t> </a:t>
-            </a:r>
-            <a:r>
-              <a:rPr lang="en-GB" sz="4400" b="0" i="0" u="none" strike="noStrike" spc="-317" dirty="0" err="1">
-                <a:solidFill>
-                  <a:srgbClr val="000000"/>
-                </a:solidFill>
-                <a:latin typeface="Pretendard Regular"/>
-                <a:ea typeface="Pretendard Regular"/>
-              </a:rPr>
-              <a:t>파악</a:t>
-            </a:r>
-            <a:endParaRPr lang="en-GB" sz="4400" b="0" i="0" u="none" strike="noStrike" spc="-317" dirty="0">
-              <a:solidFill>
-                <a:srgbClr val="000000"/>
-              </a:solidFill>
-              <a:latin typeface="Pretendard Regular"/>
-              <a:ea typeface="Pretendard Regular"/>
-            </a:endParaRPr>
-          </a:p>
-          <a:p>
-            <a:pPr lvl="0" algn="l">
-              <a:lnSpc>
-                <a:spcPct val="204000"/>
-              </a:lnSpc>
-              <a:defRPr/>
-            </a:pPr>
-            <a:r>
-              <a:rPr lang="en-US" altLang="ko-KR" sz="4400" b="0" i="0" u="none" strike="noStrike" spc="-317" dirty="0">
-                <a:solidFill>
-                  <a:srgbClr val="000000"/>
-                </a:solidFill>
-                <a:latin typeface="Pretendard Regular"/>
-                <a:ea typeface="Pretendard Regular"/>
-              </a:rPr>
-              <a:t>-</a:t>
-            </a:r>
-            <a:r>
-              <a:rPr lang="ko-KR" altLang="en-US" sz="4400" b="0" i="0" u="none" strike="noStrike" spc="-317" dirty="0">
-                <a:solidFill>
-                  <a:srgbClr val="000000"/>
-                </a:solidFill>
-                <a:latin typeface="Pretendard Regular"/>
-                <a:ea typeface="Pretendard Regular"/>
-              </a:rPr>
-              <a:t> </a:t>
-            </a:r>
-            <a:r>
-              <a:rPr lang="en-GB" sz="4400" b="0" i="0" u="none" strike="noStrike" spc="-317" dirty="0" err="1">
-                <a:solidFill>
-                  <a:srgbClr val="000000"/>
-                </a:solidFill>
-                <a:latin typeface="Pretendard Regular"/>
-                <a:ea typeface="Pretendard Regular"/>
-              </a:rPr>
-              <a:t>활용</a:t>
-            </a:r>
-            <a:r>
-              <a:rPr lang="en-GB" sz="4400" b="0" i="0" u="none" strike="noStrike" spc="-317" dirty="0">
-                <a:solidFill>
-                  <a:srgbClr val="000000"/>
-                </a:solidFill>
-                <a:latin typeface="Pretendard Regular"/>
-                <a:ea typeface="Pretendard Regular"/>
-              </a:rPr>
-              <a:t> </a:t>
-            </a:r>
-            <a:r>
-              <a:rPr lang="en-GB" sz="4400" b="0" i="0" u="none" strike="noStrike" spc="-317" dirty="0" err="1">
-                <a:solidFill>
-                  <a:srgbClr val="000000"/>
-                </a:solidFill>
-                <a:latin typeface="Pretendard Regular"/>
-                <a:ea typeface="Pretendard Regular"/>
-              </a:rPr>
-              <a:t>데이터</a:t>
-            </a:r>
-            <a:r>
-              <a:rPr lang="en-GB" sz="4400" b="0" i="0" u="none" strike="noStrike" spc="-317" dirty="0">
-                <a:solidFill>
-                  <a:srgbClr val="000000"/>
-                </a:solidFill>
-                <a:latin typeface="Pretendard Regular"/>
-                <a:ea typeface="Pretendard Regular"/>
-              </a:rPr>
-              <a:t>:</a:t>
-            </a:r>
-          </a:p>
-          <a:p>
-            <a:pPr lvl="0" algn="l">
-              <a:lnSpc>
-                <a:spcPct val="204000"/>
-              </a:lnSpc>
-              <a:defRPr/>
-            </a:pPr>
-            <a:r>
-              <a:rPr lang="en-GB" sz="4400" b="0" i="0" u="none" strike="noStrike" spc="-317" dirty="0">
-                <a:solidFill>
-                  <a:srgbClr val="000000"/>
-                </a:solidFill>
-                <a:latin typeface="Pretendard Regular"/>
-                <a:ea typeface="Pretendard Regular"/>
-              </a:rPr>
-              <a:t>2021~2024년 </a:t>
-            </a:r>
-            <a:r>
-              <a:rPr lang="en-GB" sz="4400" b="0" i="0" u="none" strike="noStrike" spc="-317" dirty="0" err="1">
-                <a:solidFill>
-                  <a:srgbClr val="000000"/>
-                </a:solidFill>
-                <a:latin typeface="Pretendard Regular"/>
-                <a:ea typeface="Pretendard Regular"/>
-              </a:rPr>
-              <a:t>지역별</a:t>
-            </a:r>
-            <a:r>
-              <a:rPr lang="en-GB" sz="4400" b="0" i="0" u="none" strike="noStrike" spc="-317" dirty="0">
-                <a:solidFill>
-                  <a:srgbClr val="000000"/>
-                </a:solidFill>
-                <a:latin typeface="Pretendard Regular"/>
-                <a:ea typeface="Pretendard Regular"/>
-              </a:rPr>
-              <a:t>/</a:t>
-            </a:r>
-            <a:r>
-              <a:rPr lang="en-GB" sz="4400" b="0" i="0" u="none" strike="noStrike" spc="-317" dirty="0" err="1">
-                <a:solidFill>
-                  <a:srgbClr val="000000"/>
-                </a:solidFill>
-                <a:latin typeface="Pretendard Regular"/>
-                <a:ea typeface="Pretendard Regular"/>
-              </a:rPr>
-              <a:t>월별</a:t>
-            </a:r>
-            <a:r>
-              <a:rPr lang="en-GB" sz="4400" b="0" i="0" u="none" strike="noStrike" spc="-317" dirty="0">
-                <a:solidFill>
-                  <a:srgbClr val="000000"/>
-                </a:solidFill>
-                <a:latin typeface="Pretendard Regular"/>
-                <a:ea typeface="Pretendard Regular"/>
-              </a:rPr>
-              <a:t> </a:t>
-            </a:r>
-            <a:r>
-              <a:rPr lang="en-GB" sz="4400" b="0" i="0" u="none" strike="noStrike" spc="-317" dirty="0" err="1">
-                <a:solidFill>
-                  <a:srgbClr val="000000"/>
-                </a:solidFill>
-                <a:latin typeface="Pretendard Regular"/>
-                <a:ea typeface="Pretendard Regular"/>
-              </a:rPr>
-              <a:t>실제</a:t>
-            </a:r>
-            <a:r>
-              <a:rPr lang="en-GB" sz="4400" b="0" i="0" u="none" strike="noStrike" spc="-317" dirty="0">
-                <a:solidFill>
-                  <a:srgbClr val="000000"/>
-                </a:solidFill>
-                <a:latin typeface="Pretendard Regular"/>
-                <a:ea typeface="Pretendard Regular"/>
-              </a:rPr>
-              <a:t> </a:t>
-            </a:r>
-            <a:r>
-              <a:rPr lang="en-GB" sz="4400" b="0" i="0" u="none" strike="noStrike" spc="-317" dirty="0" err="1">
-                <a:solidFill>
-                  <a:srgbClr val="000000"/>
-                </a:solidFill>
-                <a:latin typeface="Pretendard Regular"/>
-                <a:ea typeface="Pretendard Regular"/>
-              </a:rPr>
-              <a:t>발전량</a:t>
-            </a:r>
-            <a:r>
-              <a:rPr lang="en-GB" sz="4400" b="0" i="0" u="none" strike="noStrike" spc="-317" dirty="0">
-                <a:solidFill>
-                  <a:srgbClr val="000000"/>
-                </a:solidFill>
-                <a:latin typeface="Pretendard Regular"/>
-                <a:ea typeface="Pretendard Regular"/>
-              </a:rPr>
-              <a:t> 및 </a:t>
-            </a:r>
-            <a:r>
-              <a:rPr lang="ko-KR" altLang="en-US" sz="4400" b="0" i="0" u="none" strike="noStrike" spc="-317" dirty="0">
-                <a:solidFill>
-                  <a:srgbClr val="000000"/>
-                </a:solidFill>
-                <a:latin typeface="Pretendard Regular"/>
-                <a:ea typeface="Pretendard Regular"/>
-              </a:rPr>
-              <a:t>누적 </a:t>
-            </a:r>
-            <a:r>
-              <a:rPr lang="en-GB" sz="4400" b="0" i="0" u="none" strike="noStrike" spc="-317" dirty="0" err="1">
-                <a:solidFill>
-                  <a:srgbClr val="000000"/>
-                </a:solidFill>
-                <a:latin typeface="Pretendard Regular"/>
-                <a:ea typeface="Pretendard Regular"/>
-              </a:rPr>
-              <a:t>설비용량</a:t>
-            </a:r>
-            <a:endParaRPr lang="ko-KR" altLang="en-US" sz="4400" b="0" i="0" u="none" strike="noStrike" spc="-317" dirty="0">
-              <a:solidFill>
-                <a:srgbClr val="000000"/>
-              </a:solidFill>
-              <a:latin typeface="Pretendard Regular"/>
-              <a:ea typeface="Pretendard Regular"/>
-            </a:endParaRPr>
-          </a:p>
-          <a:p>
-            <a:pPr lvl="0" algn="l">
-              <a:lnSpc>
-                <a:spcPct val="204000"/>
-              </a:lnSpc>
-              <a:defRPr/>
-            </a:pPr>
-            <a:r>
-              <a:rPr lang="en-GB" sz="4400" b="0" i="0" u="none" strike="noStrike" spc="-317" dirty="0" err="1">
-                <a:solidFill>
-                  <a:srgbClr val="000000"/>
-                </a:solidFill>
-                <a:latin typeface="Pretendard Regular"/>
-                <a:ea typeface="Pretendard Regular"/>
-              </a:rPr>
-              <a:t>대기권</a:t>
-            </a:r>
-            <a:r>
-              <a:rPr lang="en-GB" sz="4400" b="0" i="0" u="none" strike="noStrike" spc="-317" dirty="0">
-                <a:solidFill>
-                  <a:srgbClr val="000000"/>
-                </a:solidFill>
-                <a:latin typeface="Pretendard Regular"/>
-                <a:ea typeface="Pretendard Regular"/>
-              </a:rPr>
-              <a:t> 밖 </a:t>
-            </a:r>
-            <a:r>
-              <a:rPr lang="en-GB" sz="4400" b="0" i="0" u="none" strike="noStrike" spc="-317" dirty="0" err="1">
-                <a:solidFill>
-                  <a:srgbClr val="000000"/>
-                </a:solidFill>
-                <a:latin typeface="Pretendard Regular"/>
-                <a:ea typeface="Pretendard Regular"/>
-              </a:rPr>
-              <a:t>일사량</a:t>
-            </a:r>
-            <a:r>
-              <a:rPr lang="ko-KR" altLang="en-US" sz="4400" b="0" i="0" u="none" strike="noStrike" spc="-317" dirty="0">
-                <a:solidFill>
-                  <a:srgbClr val="000000"/>
-                </a:solidFill>
-                <a:latin typeface="Pretendard Regular"/>
-                <a:ea typeface="Pretendard Regular"/>
-              </a:rPr>
-              <a:t> </a:t>
-            </a:r>
-            <a:r>
-              <a:rPr lang="en-GB" sz="4400" b="0" i="0" u="none" strike="noStrike" spc="-317" dirty="0">
-                <a:solidFill>
-                  <a:srgbClr val="000000"/>
-                </a:solidFill>
-                <a:latin typeface="Pretendard Regular"/>
-                <a:ea typeface="Pretendard Regular"/>
-              </a:rPr>
-              <a:t>: </a:t>
-            </a:r>
-            <a:r>
-              <a:rPr lang="en-GB" sz="4400" b="0" i="0" u="none" strike="noStrike" spc="-317" dirty="0" err="1">
-                <a:solidFill>
-                  <a:srgbClr val="000000"/>
-                </a:solidFill>
-                <a:latin typeface="Pretendard Regular"/>
-                <a:ea typeface="Pretendard Regular"/>
-              </a:rPr>
-              <a:t>지구가</a:t>
-            </a:r>
-            <a:r>
-              <a:rPr lang="en-GB" sz="4400" b="0" i="0" u="none" strike="noStrike" spc="-317" dirty="0">
-                <a:solidFill>
-                  <a:srgbClr val="000000"/>
-                </a:solidFill>
-                <a:latin typeface="Pretendard Regular"/>
-                <a:ea typeface="Pretendard Regular"/>
-              </a:rPr>
-              <a:t> </a:t>
-            </a:r>
-            <a:r>
-              <a:rPr lang="en-GB" sz="4400" b="0" i="0" u="none" strike="noStrike" spc="-317" dirty="0" err="1">
-                <a:solidFill>
-                  <a:srgbClr val="000000"/>
-                </a:solidFill>
-                <a:latin typeface="Pretendard Regular"/>
-                <a:ea typeface="Pretendard Regular"/>
-              </a:rPr>
-              <a:t>받는</a:t>
-            </a:r>
-            <a:r>
-              <a:rPr lang="en-GB" sz="4400" b="0" i="0" u="none" strike="noStrike" spc="-317" dirty="0">
-                <a:solidFill>
-                  <a:srgbClr val="000000"/>
-                </a:solidFill>
-                <a:latin typeface="Pretendard Regular"/>
-                <a:ea typeface="Pretendard Regular"/>
-              </a:rPr>
-              <a:t> </a:t>
-            </a:r>
-            <a:r>
-              <a:rPr lang="en-GB" sz="4400" b="0" i="0" u="none" strike="noStrike" spc="-317" dirty="0" err="1">
-                <a:solidFill>
-                  <a:srgbClr val="000000"/>
-                </a:solidFill>
-                <a:latin typeface="Pretendard Regular"/>
-                <a:ea typeface="Pretendard Regular"/>
-              </a:rPr>
-              <a:t>순수</a:t>
-            </a:r>
-            <a:r>
-              <a:rPr lang="en-GB" sz="4400" b="0" i="0" u="none" strike="noStrike" spc="-317" dirty="0">
-                <a:solidFill>
-                  <a:srgbClr val="000000"/>
-                </a:solidFill>
-                <a:latin typeface="Pretendard Regular"/>
-                <a:ea typeface="Pretendard Regular"/>
-              </a:rPr>
-              <a:t> </a:t>
-            </a:r>
-            <a:r>
-              <a:rPr lang="en-GB" sz="4400" b="0" i="0" u="none" strike="noStrike" spc="-317" dirty="0" err="1">
-                <a:solidFill>
-                  <a:srgbClr val="000000"/>
-                </a:solidFill>
-                <a:latin typeface="Pretendard Regular"/>
-                <a:ea typeface="Pretendard Regular"/>
-              </a:rPr>
-              <a:t>에너지</a:t>
-            </a:r>
-            <a:r>
-              <a:rPr lang="en-GB" sz="4400" b="0" i="0" u="none" strike="noStrike" spc="-317" dirty="0">
-                <a:solidFill>
-                  <a:srgbClr val="000000"/>
-                </a:solidFill>
-                <a:latin typeface="Pretendard Regular"/>
-                <a:ea typeface="Pretendard Regular"/>
-              </a:rPr>
-              <a:t> (</a:t>
-            </a:r>
-            <a:r>
-              <a:rPr lang="en-GB" sz="4400" b="0" i="0" u="none" strike="noStrike" spc="-317" dirty="0" err="1">
-                <a:solidFill>
-                  <a:srgbClr val="000000"/>
-                </a:solidFill>
-                <a:latin typeface="Pretendard Regular"/>
-                <a:ea typeface="Pretendard Regular"/>
-              </a:rPr>
-              <a:t>이론적</a:t>
-            </a:r>
-            <a:r>
-              <a:rPr lang="en-GB" sz="4400" b="0" i="0" u="none" strike="noStrike" spc="-317" dirty="0">
-                <a:solidFill>
-                  <a:srgbClr val="000000"/>
-                </a:solidFill>
-                <a:latin typeface="Pretendard Regular"/>
-                <a:ea typeface="Pretendard Regular"/>
-              </a:rPr>
-              <a:t> </a:t>
-            </a:r>
-            <a:r>
-              <a:rPr lang="en-GB" sz="4400" b="0" i="0" u="none" strike="noStrike" spc="-317" dirty="0" err="1">
-                <a:solidFill>
-                  <a:srgbClr val="000000"/>
-                </a:solidFill>
-                <a:latin typeface="Pretendard Regular"/>
-                <a:ea typeface="Pretendard Regular"/>
-              </a:rPr>
-              <a:t>최대치</a:t>
-            </a:r>
-            <a:r>
-              <a:rPr lang="en-GB" sz="4400" b="0" i="0" u="none" strike="noStrike" spc="-317" dirty="0">
-                <a:solidFill>
-                  <a:srgbClr val="000000"/>
-                </a:solidFill>
-                <a:latin typeface="Pretendard Regular"/>
-                <a:ea typeface="Pretendard Regular"/>
-              </a:rPr>
-              <a:t>)</a:t>
-            </a:r>
-          </a:p>
-          <a:p>
-            <a:pPr lvl="0" algn="l">
-              <a:lnSpc>
-                <a:spcPct val="204000"/>
-              </a:lnSpc>
-              <a:defRPr/>
-            </a:pPr>
-            <a:r>
-              <a:rPr lang="en-GB" sz="4400" b="0" i="0" u="none" strike="noStrike" spc="-317" dirty="0" err="1">
-                <a:solidFill>
-                  <a:srgbClr val="000000"/>
-                </a:solidFill>
-                <a:latin typeface="Pretendard Regular"/>
-                <a:ea typeface="Pretendard Regular"/>
-              </a:rPr>
-              <a:t>평균</a:t>
-            </a:r>
-            <a:r>
-              <a:rPr lang="en-GB" sz="4400" b="0" i="0" u="none" strike="noStrike" spc="-317" dirty="0">
-                <a:solidFill>
-                  <a:srgbClr val="000000"/>
-                </a:solidFill>
-                <a:latin typeface="Pretendard Regular"/>
-                <a:ea typeface="Pretendard Regular"/>
-              </a:rPr>
-              <a:t> </a:t>
-            </a:r>
-            <a:r>
-              <a:rPr lang="en-GB" sz="4400" b="0" i="0" u="none" strike="noStrike" spc="-317" dirty="0" err="1">
-                <a:solidFill>
-                  <a:srgbClr val="000000"/>
-                </a:solidFill>
-                <a:latin typeface="Pretendard Regular"/>
-                <a:ea typeface="Pretendard Regular"/>
-              </a:rPr>
-              <a:t>기온</a:t>
-            </a:r>
-            <a:r>
-              <a:rPr lang="en-GB" sz="4400" b="0" i="0" u="none" strike="noStrike" spc="-317" dirty="0">
-                <a:solidFill>
-                  <a:srgbClr val="000000"/>
-                </a:solidFill>
-                <a:latin typeface="Pretendard Regular"/>
-                <a:ea typeface="Pretendard Regular"/>
-              </a:rPr>
-              <a:t> </a:t>
-            </a:r>
-            <a:r>
-              <a:rPr lang="en-GB" sz="4400" b="0" i="0" u="none" strike="noStrike" spc="-317" dirty="0" err="1">
-                <a:solidFill>
-                  <a:srgbClr val="000000"/>
-                </a:solidFill>
-                <a:latin typeface="Pretendard Regular"/>
-                <a:ea typeface="Pretendard Regular"/>
-              </a:rPr>
-              <a:t>데이터</a:t>
-            </a:r>
-            <a:r>
-              <a:rPr lang="ko-KR" altLang="en-US" sz="4400" b="0" i="0" u="none" strike="noStrike" spc="-317" dirty="0">
-                <a:solidFill>
-                  <a:srgbClr val="000000"/>
-                </a:solidFill>
-                <a:latin typeface="Pretendard Regular"/>
-                <a:ea typeface="Pretendard Regular"/>
-              </a:rPr>
-              <a:t> </a:t>
-            </a:r>
-            <a:r>
-              <a:rPr lang="en-GB" sz="4400" b="0" i="0" u="none" strike="noStrike" spc="-317" dirty="0">
-                <a:solidFill>
-                  <a:srgbClr val="000000"/>
-                </a:solidFill>
-                <a:latin typeface="Pretendard Regular"/>
-                <a:ea typeface="Pretendard Regular"/>
-              </a:rPr>
-              <a:t>: </a:t>
-            </a:r>
-            <a:r>
-              <a:rPr lang="en-GB" sz="4400" b="0" i="0" u="none" strike="noStrike" spc="-317" dirty="0" err="1">
-                <a:solidFill>
-                  <a:srgbClr val="000000"/>
-                </a:solidFill>
-                <a:latin typeface="Pretendard Regular"/>
-                <a:ea typeface="Pretendard Regular"/>
-              </a:rPr>
-              <a:t>기온</a:t>
-            </a:r>
-            <a:r>
-              <a:rPr lang="en-GB" sz="4400" b="0" i="0" u="none" strike="noStrike" spc="-317" dirty="0">
-                <a:solidFill>
-                  <a:srgbClr val="000000"/>
-                </a:solidFill>
-                <a:latin typeface="Pretendard Regular"/>
-                <a:ea typeface="Pretendard Regular"/>
-              </a:rPr>
-              <a:t> </a:t>
-            </a:r>
-            <a:r>
-              <a:rPr lang="en-GB" sz="4400" b="0" i="0" u="none" strike="noStrike" spc="-317" dirty="0" err="1">
-                <a:solidFill>
-                  <a:srgbClr val="000000"/>
-                </a:solidFill>
-                <a:latin typeface="Pretendard Regular"/>
-                <a:ea typeface="Pretendard Regular"/>
-              </a:rPr>
-              <a:t>변화에</a:t>
-            </a:r>
-            <a:r>
-              <a:rPr lang="en-GB" sz="4400" b="0" i="0" u="none" strike="noStrike" spc="-317" dirty="0">
-                <a:solidFill>
-                  <a:srgbClr val="000000"/>
-                </a:solidFill>
-                <a:latin typeface="Pretendard Regular"/>
-                <a:ea typeface="Pretendard Regular"/>
-              </a:rPr>
-              <a:t> </a:t>
-            </a:r>
-            <a:r>
-              <a:rPr lang="en-GB" sz="4400" b="0" i="0" u="none" strike="noStrike" spc="-317" dirty="0" err="1">
-                <a:solidFill>
-                  <a:srgbClr val="000000"/>
-                </a:solidFill>
-                <a:latin typeface="Pretendard Regular"/>
-                <a:ea typeface="Pretendard Regular"/>
-              </a:rPr>
-              <a:t>따른</a:t>
-            </a:r>
-            <a:r>
-              <a:rPr lang="en-GB" sz="4400" b="0" i="0" u="none" strike="noStrike" spc="-317" dirty="0">
-                <a:solidFill>
-                  <a:srgbClr val="000000"/>
-                </a:solidFill>
-                <a:latin typeface="Pretendard Regular"/>
-                <a:ea typeface="Pretendard Regular"/>
-              </a:rPr>
-              <a:t> </a:t>
-            </a:r>
-            <a:r>
-              <a:rPr lang="en-GB" sz="4400" b="0" i="0" u="none" strike="noStrike" spc="-317" dirty="0" err="1">
-                <a:solidFill>
-                  <a:srgbClr val="000000"/>
-                </a:solidFill>
-                <a:latin typeface="Pretendard Regular"/>
-                <a:ea typeface="Pretendard Regular"/>
-              </a:rPr>
-              <a:t>발전</a:t>
-            </a:r>
-            <a:r>
-              <a:rPr lang="en-GB" sz="4400" b="0" i="0" u="none" strike="noStrike" spc="-317" dirty="0">
-                <a:solidFill>
-                  <a:srgbClr val="000000"/>
-                </a:solidFill>
-                <a:latin typeface="Pretendard Regular"/>
-                <a:ea typeface="Pretendard Regular"/>
-              </a:rPr>
-              <a:t> </a:t>
-            </a:r>
-            <a:r>
-              <a:rPr lang="en-GB" sz="4400" b="0" i="0" u="none" strike="noStrike" spc="-317" dirty="0" err="1">
-                <a:solidFill>
-                  <a:srgbClr val="000000"/>
-                </a:solidFill>
-                <a:latin typeface="Pretendard Regular"/>
-                <a:ea typeface="Pretendard Regular"/>
-              </a:rPr>
-              <a:t>효율</a:t>
-            </a:r>
-            <a:r>
-              <a:rPr lang="en-GB" sz="4400" b="0" i="0" u="none" strike="noStrike" spc="-317" dirty="0">
-                <a:solidFill>
-                  <a:srgbClr val="000000"/>
-                </a:solidFill>
-                <a:latin typeface="Pretendard Regular"/>
-                <a:ea typeface="Pretendard Regular"/>
-              </a:rPr>
-              <a:t> </a:t>
-            </a:r>
-            <a:r>
-              <a:rPr lang="en-GB" sz="4400" b="0" i="0" u="none" strike="noStrike" spc="-317" dirty="0" err="1">
-                <a:solidFill>
-                  <a:srgbClr val="000000"/>
-                </a:solidFill>
-                <a:latin typeface="Pretendard Regular"/>
-                <a:ea typeface="Pretendard Regular"/>
-              </a:rPr>
-              <a:t>상관관계</a:t>
-            </a:r>
-            <a:r>
-              <a:rPr lang="en-GB" sz="4400" b="0" i="0" u="none" strike="noStrike" spc="-317" dirty="0">
-                <a:solidFill>
-                  <a:srgbClr val="000000"/>
-                </a:solidFill>
-                <a:latin typeface="Pretendard Regular"/>
-                <a:ea typeface="Pretendard Regular"/>
-              </a:rPr>
-              <a:t> </a:t>
-            </a:r>
-            <a:r>
-              <a:rPr lang="en-GB" sz="4400" b="0" i="0" u="none" strike="noStrike" spc="-317" dirty="0" err="1">
-                <a:solidFill>
-                  <a:srgbClr val="000000"/>
-                </a:solidFill>
-                <a:latin typeface="Pretendard Regular"/>
-                <a:ea typeface="Pretendard Regular"/>
-              </a:rPr>
-              <a:t>도출</a:t>
-            </a:r>
-            <a:endParaRPr lang="en-GB" sz="4400" b="0" i="0" u="none" strike="noStrike" spc="-317" dirty="0">
-              <a:solidFill>
-                <a:srgbClr val="000000"/>
-              </a:solidFill>
-              <a:latin typeface="Pretendard Regular"/>
-              <a:ea typeface="Pretendard Regular"/>
-            </a:endParaRPr>
-          </a:p>
-        </p:txBody>
-      </p:sp>
-    </p:spTree>
-  </p:cSld>
-  <p:clrMapOvr>
-    <a:masterClrMapping/>
-  </p:clrMapOvr>
-  <mc:AlternateContent xmlns:mc="http://schemas.openxmlformats.org/markup-compatibility/2006" xmlns:p14="http://schemas.microsoft.com/office/powerpoint/2010/main">
-    <mc:Choice Requires="p14">
-      <p:transition/>
-    </mc:Choice>
-    <mc:Fallback xmlns="">
-      <p:transition/>
-    </mc:Fallback>
-  </mc:AlternateContent>
-</p:sld>
-</file>
-
-<file path=ppt/slides/slide6.xml><?xml version="1.0" encoding="utf-8"?>
 <p:sld xmlns:a="http://schemas.openxmlformats.org/drawingml/2006/main" xmlns:r="http://schemas.openxmlformats.org/officeDocument/2006/relationships" xmlns:p="http://schemas.openxmlformats.org/presentationml/2006/main">
   <p:cSld>
     <p:bg>
@@ -19711,7 +17575,7 @@
         </p:nvSpPr>
         <p:spPr>
           <a:xfrm>
-            <a:off x="4547427" y="2082800"/>
+            <a:off x="4483100" y="2019300"/>
             <a:ext cx="14605000" cy="1257300"/>
           </a:xfrm>
           <a:prstGeom prst="rect">
@@ -19729,6 +17593,15 @@
               <a:defRPr/>
             </a:pPr>
             <a:r>
+              <a:rPr lang="ko-KR" altLang="en-US" sz="7065" spc="-71" dirty="0">
+                <a:solidFill>
+                  <a:srgbClr val="FFFFFF"/>
+                </a:solidFill>
+                <a:ea typeface="MapoDPP"/>
+              </a:rPr>
+              <a:t>국내 </a:t>
+            </a:r>
+            <a:r>
               <a:rPr lang="ko-KR" altLang="en-US" sz="7065" b="0" i="0" u="none" strike="noStrike" spc="-71" dirty="0">
                 <a:solidFill>
                   <a:srgbClr val="FFFFFF"/>
@@ -19789,7 +17662,7 @@
                 </a:solidFill>
                 <a:ea typeface="MapoDPP"/>
               </a:rPr>
-              <a:t>및 지역별 편차</a:t>
+              <a:t>및 현황분석</a:t>
             </a:r>
             <a:endParaRPr lang="ko-KR" sz="7065" b="0" i="0" u="none" strike="noStrike" spc="-71" dirty="0">
               <a:solidFill>
@@ -19840,7 +17713,7 @@
         </p:blipFill>
         <p:spPr>
           <a:xfrm>
-            <a:off x="18592800" y="914400"/>
+            <a:off x="18727420" y="965200"/>
             <a:ext cx="4775200" cy="4394200"/>
           </a:xfrm>
           <a:prstGeom prst="rect">
@@ -19905,7 +17778,288 @@
     <mc:Choice Requires="p14">
       <p:transition/>
     </mc:Choice>
-    <mc:Fallback xmlns:dsp="http://schemas.microsoft.com/office/drawing/2008/diagram" xmlns:dgm="http://schemas.openxmlformats.org/drawingml/2006/diagram" xmlns:c="http://schemas.openxmlformats.org/drawingml/2006/chart" xmlns="">
+    <mc:Fallback xmlns="" xmlns:c="http://schemas.openxmlformats.org/drawingml/2006/chart" xmlns:dgm="http://schemas.openxmlformats.org/drawingml/2006/diagram" xmlns:dsp="http://schemas.microsoft.com/office/drawing/2008/diagram">
+      <p:transition/>
+    </mc:Fallback>
+  </mc:AlternateContent>
+</p:sld>
+</file>
+
+<file path=ppt/slides/slide6.xml><?xml version="1.0" encoding="utf-8"?>
+<p:sld xmlns:a="http://schemas.openxmlformats.org/drawingml/2006/main" xmlns:r="http://schemas.openxmlformats.org/officeDocument/2006/relationships" xmlns:p="http://schemas.openxmlformats.org/presentationml/2006/main">
+  <p:cSld>
+    <p:spTree>
+      <p:nvGrpSpPr>
+        <p:cNvPr id="1" name=""/>
+        <p:cNvGrpSpPr/>
+        <p:nvPr/>
+      </p:nvGrpSpPr>
+      <p:grpSpPr>
+        <a:xfrm>
+          <a:off x="0" y="0"/>
+          <a:ext cx="0" cy="0"/>
+          <a:chOff x="0" y="0"/>
+          <a:chExt cx="0" cy="0"/>
+        </a:xfrm>
+      </p:grpSpPr>
+      <p:pic>
+        <p:nvPicPr>
+          <p:cNvPr id="2" name="Picture 2"/>
+          <p:cNvPicPr>
+            <a:picLocks noChangeAspect="1"/>
+          </p:cNvPicPr>
+          <p:nvPr/>
+        </p:nvPicPr>
+        <p:blipFill rotWithShape="1">
+          <a:blip r:embed="rId2"/>
+          <a:stretch>
+            <a:fillRect/>
+          </a:stretch>
+        </p:blipFill>
+        <p:spPr>
+          <a:xfrm>
+            <a:off x="889000" y="736600"/>
+            <a:ext cx="22606000" cy="3695700"/>
+          </a:xfrm>
+          <a:prstGeom prst="rect">
+            <a:avLst/>
+          </a:prstGeom>
+        </p:spPr>
+      </p:pic>
+      <p:pic>
+        <p:nvPicPr>
+          <p:cNvPr id="3" name="Picture 3"/>
+          <p:cNvPicPr>
+            <a:picLocks noChangeAspect="1"/>
+          </p:cNvPicPr>
+          <p:nvPr/>
+        </p:nvPicPr>
+        <p:blipFill rotWithShape="1">
+          <a:blip r:embed="rId3"/>
+          <a:stretch>
+            <a:fillRect/>
+          </a:stretch>
+        </p:blipFill>
+        <p:spPr>
+          <a:xfrm rot="16200000">
+            <a:off x="7073900" y="-3289300"/>
+            <a:ext cx="10236200" cy="22606000"/>
+          </a:xfrm>
+          <a:prstGeom prst="rect">
+            <a:avLst/>
+          </a:prstGeom>
+        </p:spPr>
+      </p:pic>
+      <p:pic>
+        <p:nvPicPr>
+          <p:cNvPr id="5" name="Picture 5"/>
+          <p:cNvPicPr>
+            <a:picLocks noChangeAspect="1"/>
+          </p:cNvPicPr>
+          <p:nvPr/>
+        </p:nvPicPr>
+        <p:blipFill rotWithShape="1">
+          <a:blip r:embed="rId4">
+            <a:alphaModFix amt="50000"/>
+          </a:blip>
+          <a:stretch>
+            <a:fillRect/>
+          </a:stretch>
+        </p:blipFill>
+        <p:spPr>
+          <a:xfrm>
+            <a:off x="844550" y="3429000"/>
+            <a:ext cx="22694900" cy="9906000"/>
+          </a:xfrm>
+          <a:prstGeom prst="rect">
+            <a:avLst/>
+          </a:prstGeom>
+        </p:spPr>
+      </p:pic>
+      <p:sp>
+        <p:nvSpPr>
+          <p:cNvPr id="12" name="TextBox 12"/>
+          <p:cNvSpPr txBox="1"/>
+          <p:nvPr/>
+        </p:nvSpPr>
+        <p:spPr>
+          <a:xfrm>
+            <a:off x="4547427" y="2082800"/>
+            <a:ext cx="14605000" cy="1257300"/>
+          </a:xfrm>
+          <a:prstGeom prst="rect">
+            <a:avLst/>
+          </a:prstGeom>
+        </p:spPr>
+        <p:txBody>
+          <a:bodyPr lIns="0" tIns="89745" rIns="0" bIns="89745" anchor="ctr"/>
+          <a:lstStyle/>
+          <a:p>
+            <a:pPr lvl="0" algn="l">
+              <a:lnSpc>
+                <a:spcPct val="100000"/>
+              </a:lnSpc>
+              <a:defRPr/>
+            </a:pPr>
+            <a:r>
+              <a:rPr lang="ko-KR" altLang="en-US" sz="7065" b="0" i="0" u="none" strike="noStrike" spc="-71" dirty="0">
+                <a:solidFill>
+                  <a:srgbClr val="FFFFFF"/>
+                </a:solidFill>
+                <a:ea typeface="MapoDPP"/>
+              </a:rPr>
+              <a:t>지역별</a:t>
+            </a:r>
+            <a:r>
+              <a:rPr lang="en-US" sz="7065" b="0" i="0" u="none" strike="noStrike" spc="-71" dirty="0">
+                <a:solidFill>
+                  <a:srgbClr val="FFFFFF"/>
+                </a:solidFill>
+                <a:latin typeface="MapoDPP"/>
+              </a:rPr>
+              <a:t> </a:t>
+            </a:r>
+            <a:r>
+              <a:rPr lang="ko-KR" sz="7065" b="0" i="0" u="none" strike="noStrike" spc="-71" dirty="0">
+                <a:solidFill>
+                  <a:srgbClr val="FFFFFF"/>
+                </a:solidFill>
+                <a:ea typeface="MapoDPP"/>
+              </a:rPr>
+              <a:t>태양광</a:t>
+            </a:r>
+            <a:r>
+              <a:rPr lang="en-US" sz="7065" b="0" i="0" u="none" strike="noStrike" spc="-71" dirty="0">
+                <a:solidFill>
+                  <a:srgbClr val="FFFFFF"/>
+                </a:solidFill>
+                <a:latin typeface="MapoDPP"/>
+              </a:rPr>
+              <a:t> </a:t>
+            </a:r>
+            <a:r>
+              <a:rPr lang="ko-KR" sz="7065" b="0" i="0" u="none" strike="noStrike" spc="-71" dirty="0">
+                <a:solidFill>
+                  <a:srgbClr val="FFFFFF"/>
+                </a:solidFill>
+                <a:ea typeface="MapoDPP"/>
+              </a:rPr>
+              <a:t>발전</a:t>
+            </a:r>
+            <a:r>
+              <a:rPr lang="en-US" altLang="ko-KR" sz="7065" b="0" i="0" u="none" strike="noStrike" spc="-71" dirty="0">
+                <a:solidFill>
+                  <a:srgbClr val="FFFFFF"/>
+                </a:solidFill>
+                <a:ea typeface="MapoDPP"/>
+              </a:rPr>
+              <a:t> </a:t>
+            </a:r>
+            <a:r>
+              <a:rPr lang="ko-KR" altLang="en-US" sz="7065" spc="-71" dirty="0">
+                <a:solidFill>
+                  <a:srgbClr val="FFFFFF"/>
+                </a:solidFill>
+                <a:ea typeface="MapoDPP"/>
+              </a:rPr>
+              <a:t>및 지역별 편차</a:t>
+            </a:r>
+            <a:endParaRPr lang="ko-KR" sz="7065" b="0" i="0" u="none" strike="noStrike" spc="-71" dirty="0">
+              <a:solidFill>
+                <a:srgbClr val="FFFFFF"/>
+              </a:solidFill>
+              <a:ea typeface="MapoDPP"/>
+            </a:endParaRPr>
+          </a:p>
+        </p:txBody>
+      </p:sp>
+      <p:pic>
+        <p:nvPicPr>
+          <p:cNvPr id="4" name="Picture 4"/>
+          <p:cNvPicPr>
+            <a:picLocks noChangeAspect="1"/>
+          </p:cNvPicPr>
+          <p:nvPr/>
+        </p:nvPicPr>
+        <p:blipFill rotWithShape="1">
+          <a:blip r:embed="rId5"/>
+          <a:stretch>
+            <a:fillRect/>
+          </a:stretch>
+        </p:blipFill>
+        <p:spPr>
+          <a:xfrm>
+            <a:off x="18592800" y="914400"/>
+            <a:ext cx="4775200" cy="4394200"/>
+          </a:xfrm>
+          <a:prstGeom prst="rect">
+            <a:avLst/>
+          </a:prstGeom>
+        </p:spPr>
+      </p:pic>
+      <p:pic>
+        <p:nvPicPr>
+          <p:cNvPr id="11" name="Picture 11"/>
+          <p:cNvPicPr>
+            <a:picLocks noChangeAspect="1"/>
+          </p:cNvPicPr>
+          <p:nvPr/>
+        </p:nvPicPr>
+        <p:blipFill rotWithShape="1">
+          <a:blip r:embed="rId6"/>
+          <a:stretch>
+            <a:fillRect/>
+          </a:stretch>
+        </p:blipFill>
+        <p:spPr>
+          <a:xfrm>
+            <a:off x="1968500" y="1727200"/>
+            <a:ext cx="2514600" cy="2514600"/>
+          </a:xfrm>
+          <a:prstGeom prst="rect">
+            <a:avLst/>
+          </a:prstGeom>
+        </p:spPr>
+      </p:pic>
+      <p:pic>
+        <p:nvPicPr>
+          <p:cNvPr id="13" name="Picture 13"/>
+          <p:cNvPicPr>
+            <a:picLocks noChangeAspect="1"/>
+          </p:cNvPicPr>
+          <p:nvPr/>
+        </p:nvPicPr>
+        <p:blipFill rotWithShape="1">
+          <a:blip r:embed="rId7"/>
+          <a:stretch>
+            <a:fillRect/>
+          </a:stretch>
+        </p:blipFill>
+        <p:spPr>
+          <a:xfrm>
+            <a:off x="457200" y="241300"/>
+            <a:ext cx="5486400" cy="5486400"/>
+          </a:xfrm>
+          <a:prstGeom prst="rect">
+            <a:avLst/>
+          </a:prstGeom>
+        </p:spPr>
+      </p:pic>
+    </p:spTree>
+    <p:extLst>
+      <p:ext uri="{BB962C8B-B14F-4D97-AF65-F5344CB8AC3E}">
+        <p14:creationId xmlns:p14="http://schemas.microsoft.com/office/powerpoint/2010/main" val="1777278001"/>
+      </p:ext>
+    </p:extLst>
+  </p:cSld>
+  <p:clrMapOvr>
+    <a:masterClrMapping/>
+  </p:clrMapOvr>
+  <mc:AlternateContent xmlns:mc="http://schemas.openxmlformats.org/markup-compatibility/2006" xmlns:p14="http://schemas.microsoft.com/office/powerpoint/2010/main">
+    <mc:Choice Requires="p14">
+      <p:transition/>
+    </mc:Choice>
+    <mc:Fallback xmlns="" xmlns:c="http://schemas.openxmlformats.org/drawingml/2006/chart" xmlns:dgm="http://schemas.openxmlformats.org/drawingml/2006/diagram" xmlns:dsp="http://schemas.microsoft.com/office/drawing/2008/diagram">
       <p:transition/>
     </mc:Fallback>
   </mc:AlternateContent>
@@ -20175,287 +18329,6 @@
     </p:spTree>
     <p:extLst>
       <p:ext uri="{BB962C8B-B14F-4D97-AF65-F5344CB8AC3E}">
-        <p14:creationId xmlns:p14="http://schemas.microsoft.com/office/powerpoint/2010/main" val="1777278001"/>
-      </p:ext>
-    </p:extLst>
-  </p:cSld>
-  <p:clrMapOvr>
-    <a:masterClrMapping/>
-  </p:clrMapOvr>
-  <mc:AlternateContent xmlns:mc="http://schemas.openxmlformats.org/markup-compatibility/2006" xmlns:p14="http://schemas.microsoft.com/office/powerpoint/2010/main">
-    <mc:Choice Requires="p14">
-      <p:transition/>
-    </mc:Choice>
-    <mc:Fallback xmlns:dsp="http://schemas.microsoft.com/office/drawing/2008/diagram" xmlns:dgm="http://schemas.openxmlformats.org/drawingml/2006/diagram" xmlns:c="http://schemas.openxmlformats.org/drawingml/2006/chart" xmlns="">
-      <p:transition/>
-    </mc:Fallback>
-  </mc:AlternateContent>
-</p:sld>
-</file>
-
-<file path=ppt/slides/slide8.xml><?xml version="1.0" encoding="utf-8"?>
-<p:sld xmlns:a="http://schemas.openxmlformats.org/drawingml/2006/main" xmlns:r="http://schemas.openxmlformats.org/officeDocument/2006/relationships" xmlns:p="http://schemas.openxmlformats.org/presentationml/2006/main">
-  <p:cSld>
-    <p:spTree>
-      <p:nvGrpSpPr>
-        <p:cNvPr id="1" name=""/>
-        <p:cNvGrpSpPr/>
-        <p:nvPr/>
-      </p:nvGrpSpPr>
-      <p:grpSpPr>
-        <a:xfrm>
-          <a:off x="0" y="0"/>
-          <a:ext cx="0" cy="0"/>
-          <a:chOff x="0" y="0"/>
-          <a:chExt cx="0" cy="0"/>
-        </a:xfrm>
-      </p:grpSpPr>
-      <p:pic>
-        <p:nvPicPr>
-          <p:cNvPr id="2" name="Picture 2"/>
-          <p:cNvPicPr>
-            <a:picLocks noChangeAspect="1"/>
-          </p:cNvPicPr>
-          <p:nvPr/>
-        </p:nvPicPr>
-        <p:blipFill rotWithShape="1">
-          <a:blip r:embed="rId2"/>
-          <a:stretch>
-            <a:fillRect/>
-          </a:stretch>
-        </p:blipFill>
-        <p:spPr>
-          <a:xfrm>
-            <a:off x="889000" y="736600"/>
-            <a:ext cx="22606000" cy="3695700"/>
-          </a:xfrm>
-          <a:prstGeom prst="rect">
-            <a:avLst/>
-          </a:prstGeom>
-        </p:spPr>
-      </p:pic>
-      <p:pic>
-        <p:nvPicPr>
-          <p:cNvPr id="3" name="Picture 3"/>
-          <p:cNvPicPr>
-            <a:picLocks noChangeAspect="1"/>
-          </p:cNvPicPr>
-          <p:nvPr/>
-        </p:nvPicPr>
-        <p:blipFill rotWithShape="1">
-          <a:blip r:embed="rId3"/>
-          <a:stretch>
-            <a:fillRect/>
-          </a:stretch>
-        </p:blipFill>
-        <p:spPr>
-          <a:xfrm rot="16200000">
-            <a:off x="7073900" y="-3289300"/>
-            <a:ext cx="10236200" cy="22606000"/>
-          </a:xfrm>
-          <a:prstGeom prst="rect">
-            <a:avLst/>
-          </a:prstGeom>
-        </p:spPr>
-      </p:pic>
-      <p:pic>
-        <p:nvPicPr>
-          <p:cNvPr id="5" name="Picture 5"/>
-          <p:cNvPicPr>
-            <a:picLocks noChangeAspect="1"/>
-          </p:cNvPicPr>
-          <p:nvPr/>
-        </p:nvPicPr>
-        <p:blipFill rotWithShape="1">
-          <a:blip r:embed="rId4">
-            <a:alphaModFix amt="50000"/>
-          </a:blip>
-          <a:stretch>
-            <a:fillRect/>
-          </a:stretch>
-        </p:blipFill>
-        <p:spPr>
-          <a:xfrm>
-            <a:off x="844550" y="3429000"/>
-            <a:ext cx="22694900" cy="9906000"/>
-          </a:xfrm>
-          <a:prstGeom prst="rect">
-            <a:avLst/>
-          </a:prstGeom>
-        </p:spPr>
-      </p:pic>
-      <p:sp>
-        <p:nvSpPr>
-          <p:cNvPr id="12" name="TextBox 12"/>
-          <p:cNvSpPr txBox="1"/>
-          <p:nvPr/>
-        </p:nvSpPr>
-        <p:spPr>
-          <a:xfrm>
-            <a:off x="4547427" y="2082800"/>
-            <a:ext cx="14605000" cy="1257300"/>
-          </a:xfrm>
-          <a:prstGeom prst="rect">
-            <a:avLst/>
-          </a:prstGeom>
-        </p:spPr>
-        <p:txBody>
-          <a:bodyPr lIns="0" tIns="89745" rIns="0" bIns="89745" anchor="ctr"/>
-          <a:lstStyle/>
-          <a:p>
-            <a:pPr lvl="0" algn="l">
-              <a:lnSpc>
-                <a:spcPct val="100000"/>
-              </a:lnSpc>
-              <a:defRPr/>
-            </a:pPr>
-            <a:r>
-              <a:rPr lang="ko-KR" altLang="en-US" sz="7065" b="0" i="0" u="none" strike="noStrike" spc="-71" dirty="0">
-                <a:solidFill>
-                  <a:srgbClr val="FFFFFF"/>
-                </a:solidFill>
-                <a:ea typeface="MapoDPP"/>
-              </a:rPr>
-              <a:t>지역별</a:t>
-            </a:r>
-            <a:r>
-              <a:rPr lang="en-US" sz="7065" b="0" i="0" u="none" strike="noStrike" spc="-71" dirty="0">
-                <a:solidFill>
-                  <a:srgbClr val="FFFFFF"/>
-                </a:solidFill>
-                <a:latin typeface="MapoDPP"/>
-              </a:rPr>
-              <a:t> </a:t>
-            </a:r>
-            <a:r>
-              <a:rPr lang="ko-KR" sz="7065" b="0" i="0" u="none" strike="noStrike" spc="-71" dirty="0">
-                <a:solidFill>
-                  <a:srgbClr val="FFFFFF"/>
-                </a:solidFill>
-                <a:ea typeface="MapoDPP"/>
-              </a:rPr>
-              <a:t>태양광</a:t>
-            </a:r>
-            <a:r>
-              <a:rPr lang="en-US" sz="7065" b="0" i="0" u="none" strike="noStrike" spc="-71" dirty="0">
-                <a:solidFill>
-                  <a:srgbClr val="FFFFFF"/>
-                </a:solidFill>
-                <a:latin typeface="MapoDPP"/>
-              </a:rPr>
-              <a:t> </a:t>
-            </a:r>
-            <a:r>
-              <a:rPr lang="ko-KR" sz="7065" b="0" i="0" u="none" strike="noStrike" spc="-71" dirty="0">
-                <a:solidFill>
-                  <a:srgbClr val="FFFFFF"/>
-                </a:solidFill>
-                <a:ea typeface="MapoDPP"/>
-              </a:rPr>
-              <a:t>발전</a:t>
-            </a:r>
-            <a:r>
-              <a:rPr lang="en-US" altLang="ko-KR" sz="7065" b="0" i="0" u="none" strike="noStrike" spc="-71" dirty="0">
-                <a:solidFill>
-                  <a:srgbClr val="FFFFFF"/>
-                </a:solidFill>
-                <a:ea typeface="MapoDPP"/>
-              </a:rPr>
-              <a:t> </a:t>
-            </a:r>
-            <a:r>
-              <a:rPr lang="ko-KR" altLang="en-US" sz="7065" spc="-71" dirty="0">
-                <a:solidFill>
-                  <a:srgbClr val="FFFFFF"/>
-                </a:solidFill>
-                <a:ea typeface="MapoDPP"/>
-              </a:rPr>
-              <a:t>및 지역별 편차</a:t>
-            </a:r>
-            <a:endParaRPr lang="ko-KR" sz="7065" b="0" i="0" u="none" strike="noStrike" spc="-71" dirty="0">
-              <a:solidFill>
-                <a:srgbClr val="FFFFFF"/>
-              </a:solidFill>
-              <a:ea typeface="MapoDPP"/>
-            </a:endParaRPr>
-          </a:p>
-        </p:txBody>
-      </p:sp>
-      <p:pic>
-        <p:nvPicPr>
-          <p:cNvPr id="4" name="Picture 4"/>
-          <p:cNvPicPr>
-            <a:picLocks noChangeAspect="1"/>
-          </p:cNvPicPr>
-          <p:nvPr/>
-        </p:nvPicPr>
-        <p:blipFill rotWithShape="1">
-          <a:blip r:embed="rId5"/>
-          <a:stretch>
-            <a:fillRect/>
-          </a:stretch>
-        </p:blipFill>
-        <p:spPr>
-          <a:xfrm>
-            <a:off x="18592800" y="914400"/>
-            <a:ext cx="4775200" cy="4394200"/>
-          </a:xfrm>
-          <a:prstGeom prst="rect">
-            <a:avLst/>
-          </a:prstGeom>
-        </p:spPr>
-      </p:pic>
-      <p:pic>
-        <p:nvPicPr>
-          <p:cNvPr id="11" name="Picture 11"/>
-          <p:cNvPicPr>
-            <a:picLocks noChangeAspect="1"/>
-          </p:cNvPicPr>
-          <p:nvPr/>
-        </p:nvPicPr>
-        <p:blipFill rotWithShape="1">
-          <a:blip r:embed="rId6"/>
-          <a:stretch>
-            <a:fillRect/>
-          </a:stretch>
-        </p:blipFill>
-        <p:spPr>
-          <a:xfrm>
-            <a:off x="1968500" y="1727200"/>
-            <a:ext cx="2514600" cy="2514600"/>
-          </a:xfrm>
-          <a:prstGeom prst="rect">
-            <a:avLst/>
-          </a:prstGeom>
-        </p:spPr>
-      </p:pic>
-      <p:pic>
-        <p:nvPicPr>
-          <p:cNvPr id="13" name="Picture 13"/>
-          <p:cNvPicPr>
-            <a:picLocks noChangeAspect="1"/>
-          </p:cNvPicPr>
-          <p:nvPr/>
-        </p:nvPicPr>
-        <p:blipFill rotWithShape="1">
-          <a:blip r:embed="rId7"/>
-          <a:stretch>
-            <a:fillRect/>
-          </a:stretch>
-        </p:blipFill>
-        <p:spPr>
-          <a:xfrm>
-            <a:off x="457200" y="241300"/>
-            <a:ext cx="5486400" cy="5486400"/>
-          </a:xfrm>
-          <a:prstGeom prst="rect">
-            <a:avLst/>
-          </a:prstGeom>
-        </p:spPr>
-      </p:pic>
-    </p:spTree>
-    <p:extLst>
-      <p:ext uri="{BB962C8B-B14F-4D97-AF65-F5344CB8AC3E}">
         <p14:creationId xmlns:p14="http://schemas.microsoft.com/office/powerpoint/2010/main" val="3179374496"/>
       </p:ext>
     </p:extLst>
@@ -20467,14 +18340,14 @@
     <mc:Choice Requires="p14">
       <p:transition/>
     </mc:Choice>
-    <mc:Fallback xmlns:dsp="http://schemas.microsoft.com/office/drawing/2008/diagram" xmlns:dgm="http://schemas.openxmlformats.org/drawingml/2006/diagram" xmlns:c="http://schemas.openxmlformats.org/drawingml/2006/chart" xmlns="">
+    <mc:Fallback xmlns="" xmlns:c="http://schemas.openxmlformats.org/drawingml/2006/chart" xmlns:dgm="http://schemas.openxmlformats.org/drawingml/2006/diagram" xmlns:dsp="http://schemas.microsoft.com/office/drawing/2008/diagram">
       <p:transition/>
     </mc:Fallback>
   </mc:AlternateContent>
 </p:sld>
 </file>
 
-<file path=ppt/slides/slide9.xml><?xml version="1.0" encoding="utf-8"?>
+<file path=ppt/slides/slide8.xml><?xml version="1.0" encoding="utf-8"?>
 <p:sld xmlns:a="http://schemas.openxmlformats.org/drawingml/2006/main" xmlns:r="http://schemas.openxmlformats.org/officeDocument/2006/relationships" xmlns:p="http://schemas.openxmlformats.org/presentationml/2006/main">
   <p:cSld>
     <p:bg>
@@ -21623,6 +19496,1226 @@
           </a:prstGeom>
         </p:spPr>
       </p:pic>
+    </p:spTree>
+  </p:cSld>
+  <p:clrMapOvr>
+    <a:masterClrMapping/>
+  </p:clrMapOvr>
+  <mc:AlternateContent xmlns:mc="http://schemas.openxmlformats.org/markup-compatibility/2006" xmlns:p14="http://schemas.microsoft.com/office/powerpoint/2010/main">
+    <mc:Choice Requires="p14">
+      <p:transition/>
+    </mc:Choice>
+    <mc:Fallback xmlns="">
+      <p:transition/>
+    </mc:Fallback>
+  </mc:AlternateContent>
+</p:sld>
+</file>
+
+<file path=ppt/slides/slide9.xml><?xml version="1.0" encoding="utf-8"?>
+<p:sld xmlns:a="http://schemas.openxmlformats.org/drawingml/2006/main" xmlns:r="http://schemas.openxmlformats.org/officeDocument/2006/relationships" xmlns:p="http://schemas.openxmlformats.org/presentationml/2006/main">
+  <p:cSld>
+    <p:bg>
+      <p:bgPr>
+        <a:solidFill>
+          <a:srgbClr val="E4E5EB"/>
+        </a:solidFill>
+        <a:effectLst/>
+      </p:bgPr>
+    </p:bg>
+    <p:spTree>
+      <p:nvGrpSpPr>
+        <p:cNvPr id="1" name=""/>
+        <p:cNvGrpSpPr/>
+        <p:nvPr/>
+      </p:nvGrpSpPr>
+      <p:grpSpPr>
+        <a:xfrm>
+          <a:off x="0" y="0"/>
+          <a:ext cx="0" cy="0"/>
+          <a:chOff x="0" y="0"/>
+          <a:chExt cx="0" cy="0"/>
+        </a:xfrm>
+      </p:grpSpPr>
+      <p:pic>
+        <p:nvPicPr>
+          <p:cNvPr id="2" name="Picture 2"/>
+          <p:cNvPicPr>
+            <a:picLocks noChangeAspect="1"/>
+          </p:cNvPicPr>
+          <p:nvPr/>
+        </p:nvPicPr>
+        <p:blipFill rotWithShape="1">
+          <a:blip r:embed="rId2"/>
+          <a:stretch>
+            <a:fillRect/>
+          </a:stretch>
+        </p:blipFill>
+        <p:spPr>
+          <a:xfrm>
+            <a:off x="889000" y="736600"/>
+            <a:ext cx="22606000" cy="3695700"/>
+          </a:xfrm>
+          <a:prstGeom prst="rect">
+            <a:avLst/>
+          </a:prstGeom>
+        </p:spPr>
+      </p:pic>
+      <p:pic>
+        <p:nvPicPr>
+          <p:cNvPr id="3" name="Picture 3"/>
+          <p:cNvPicPr>
+            <a:picLocks noChangeAspect="1"/>
+          </p:cNvPicPr>
+          <p:nvPr/>
+        </p:nvPicPr>
+        <p:blipFill rotWithShape="1">
+          <a:blip r:embed="rId3"/>
+          <a:stretch>
+            <a:fillRect/>
+          </a:stretch>
+        </p:blipFill>
+        <p:spPr>
+          <a:xfrm rot="16200000">
+            <a:off x="7073900" y="-3289300"/>
+            <a:ext cx="10236200" cy="22606000"/>
+          </a:xfrm>
+          <a:prstGeom prst="rect">
+            <a:avLst/>
+          </a:prstGeom>
+        </p:spPr>
+      </p:pic>
+      <p:pic>
+        <p:nvPicPr>
+          <p:cNvPr id="4" name="Picture 4"/>
+          <p:cNvPicPr>
+            <a:picLocks noChangeAspect="1"/>
+          </p:cNvPicPr>
+          <p:nvPr/>
+        </p:nvPicPr>
+        <p:blipFill rotWithShape="1">
+          <a:blip r:embed="rId4"/>
+          <a:stretch>
+            <a:fillRect/>
+          </a:stretch>
+        </p:blipFill>
+        <p:spPr>
+          <a:xfrm>
+            <a:off x="1968500" y="1727200"/>
+            <a:ext cx="2514600" cy="2514600"/>
+          </a:xfrm>
+          <a:prstGeom prst="rect">
+            <a:avLst/>
+          </a:prstGeom>
+        </p:spPr>
+      </p:pic>
+      <p:sp>
+        <p:nvSpPr>
+          <p:cNvPr id="5" name="TextBox 5"/>
+          <p:cNvSpPr txBox="1"/>
+          <p:nvPr/>
+        </p:nvSpPr>
+        <p:spPr>
+          <a:xfrm>
+            <a:off x="4876800" y="2082800"/>
+            <a:ext cx="14605000" cy="1257300"/>
+          </a:xfrm>
+          <a:prstGeom prst="rect">
+            <a:avLst/>
+          </a:prstGeom>
+        </p:spPr>
+        <p:txBody>
+          <a:bodyPr lIns="0" tIns="89745" rIns="0" bIns="89745" anchor="ctr"/>
+          <a:lstStyle/>
+          <a:p>
+            <a:pPr lvl="0" algn="l">
+              <a:lnSpc>
+                <a:spcPct val="100000"/>
+              </a:lnSpc>
+              <a:defRPr/>
+            </a:pPr>
+            <a:r>
+              <a:rPr lang="ko-KR" sz="7065" b="0" i="0" u="none" strike="noStrike" spc="-71">
+                <a:solidFill>
+                  <a:srgbClr val="242424"/>
+                </a:solidFill>
+                <a:ea typeface="MapoDPP"/>
+              </a:rPr>
+              <a:t>월별</a:t>
+            </a:r>
+            <a:r>
+              <a:rPr lang="en-US" sz="7065" b="0" i="0" u="none" strike="noStrike" spc="-71">
+                <a:solidFill>
+                  <a:srgbClr val="242424"/>
+                </a:solidFill>
+                <a:latin typeface="MapoDPP"/>
+              </a:rPr>
+              <a:t>/</a:t>
+            </a:r>
+            <a:r>
+              <a:rPr lang="ko-KR" sz="7065" b="0" i="0" u="none" strike="noStrike" spc="-71">
+                <a:solidFill>
+                  <a:srgbClr val="242424"/>
+                </a:solidFill>
+                <a:ea typeface="MapoDPP"/>
+              </a:rPr>
+              <a:t>계절별</a:t>
+            </a:r>
+            <a:r>
+              <a:rPr lang="en-US" sz="7065" b="0" i="0" u="none" strike="noStrike" spc="-71">
+                <a:solidFill>
+                  <a:srgbClr val="242424"/>
+                </a:solidFill>
+                <a:latin typeface="MapoDPP"/>
+              </a:rPr>
+              <a:t> </a:t>
+            </a:r>
+            <a:r>
+              <a:rPr lang="ko-KR" sz="7065" b="0" i="0" u="none" strike="noStrike" spc="-71">
+                <a:solidFill>
+                  <a:srgbClr val="242424"/>
+                </a:solidFill>
+                <a:ea typeface="MapoDPP"/>
+              </a:rPr>
+              <a:t>발전</a:t>
+            </a:r>
+            <a:r>
+              <a:rPr lang="en-US" sz="7065" b="0" i="0" u="none" strike="noStrike" spc="-71">
+                <a:solidFill>
+                  <a:srgbClr val="242424"/>
+                </a:solidFill>
+                <a:latin typeface="MapoDPP"/>
+              </a:rPr>
+              <a:t> </a:t>
+            </a:r>
+            <a:r>
+              <a:rPr lang="ko-KR" sz="7065" b="0" i="0" u="none" strike="noStrike" spc="-71">
+                <a:solidFill>
+                  <a:srgbClr val="242424"/>
+                </a:solidFill>
+                <a:ea typeface="MapoDPP"/>
+              </a:rPr>
+              <a:t>패턴</a:t>
+            </a:r>
+          </a:p>
+        </p:txBody>
+      </p:sp>
+      <p:pic>
+        <p:nvPicPr>
+          <p:cNvPr id="6" name="Picture 6"/>
+          <p:cNvPicPr>
+            <a:picLocks noChangeAspect="1"/>
+          </p:cNvPicPr>
+          <p:nvPr/>
+        </p:nvPicPr>
+        <p:blipFill rotWithShape="1">
+          <a:blip r:embed="rId5"/>
+          <a:stretch>
+            <a:fillRect/>
+          </a:stretch>
+        </p:blipFill>
+        <p:spPr>
+          <a:xfrm>
+            <a:off x="1828800" y="4749800"/>
+            <a:ext cx="7734300" cy="7658100"/>
+          </a:xfrm>
+          <a:prstGeom prst="rect">
+            <a:avLst/>
+          </a:prstGeom>
+        </p:spPr>
+      </p:pic>
+      <p:pic>
+        <p:nvPicPr>
+          <p:cNvPr id="7" name="Picture 7"/>
+          <p:cNvPicPr>
+            <a:picLocks noChangeAspect="1"/>
+          </p:cNvPicPr>
+          <p:nvPr/>
+        </p:nvPicPr>
+        <p:blipFill rotWithShape="1">
+          <a:blip r:embed="rId6"/>
+          <a:stretch>
+            <a:fillRect/>
+          </a:stretch>
+        </p:blipFill>
+        <p:spPr>
+          <a:xfrm>
+            <a:off x="9575800" y="4902200"/>
+            <a:ext cx="13550900" cy="7442200"/>
+          </a:xfrm>
+          <a:prstGeom prst="rect">
+            <a:avLst/>
+          </a:prstGeom>
+        </p:spPr>
+      </p:pic>
+      <p:sp>
+        <p:nvSpPr>
+          <p:cNvPr id="8" name="TextBox 8"/>
+          <p:cNvSpPr txBox="1"/>
+          <p:nvPr/>
+        </p:nvSpPr>
+        <p:spPr>
+          <a:xfrm>
+            <a:off x="11671300" y="5715000"/>
+            <a:ext cx="10426700" cy="787400"/>
+          </a:xfrm>
+          <a:prstGeom prst="rect">
+            <a:avLst/>
+          </a:prstGeom>
+        </p:spPr>
+        <p:txBody>
+          <a:bodyPr anchor="b"/>
+          <a:lstStyle/>
+          <a:p>
+            <a:pPr lvl="0" algn="l">
+              <a:lnSpc>
+                <a:spcPct val="124000"/>
+              </a:lnSpc>
+              <a:defRPr/>
+            </a:pPr>
+            <a:r>
+              <a:rPr lang="ko-KR" sz="4400" b="0" i="0" u="none" strike="noStrike" spc="-176">
+                <a:solidFill>
+                  <a:schemeClr val="dk1"/>
+                </a:solidFill>
+                <a:ea typeface="MapoDPP"/>
+              </a:rPr>
+              <a:t>계절에</a:t>
+            </a:r>
+            <a:r>
+              <a:rPr lang="en-US" sz="4400" b="0" i="0" u="none" strike="noStrike" spc="-176">
+                <a:solidFill>
+                  <a:schemeClr val="dk1"/>
+                </a:solidFill>
+                <a:latin typeface="MapoDPP"/>
+              </a:rPr>
+              <a:t> </a:t>
+            </a:r>
+            <a:r>
+              <a:rPr lang="ko-KR" sz="4400" b="0" i="0" u="none" strike="noStrike" spc="-176">
+                <a:solidFill>
+                  <a:schemeClr val="dk1"/>
+                </a:solidFill>
+                <a:ea typeface="MapoDPP"/>
+              </a:rPr>
+              <a:t>따른</a:t>
+            </a:r>
+            <a:r>
+              <a:rPr lang="en-US" sz="4400" b="0" i="0" u="none" strike="noStrike" spc="-176">
+                <a:solidFill>
+                  <a:schemeClr val="dk1"/>
+                </a:solidFill>
+                <a:latin typeface="MapoDPP"/>
+              </a:rPr>
+              <a:t> </a:t>
+            </a:r>
+            <a:r>
+              <a:rPr lang="ko-KR" sz="4400" b="0" i="0" u="none" strike="noStrike" spc="-176">
+                <a:solidFill>
+                  <a:schemeClr val="dk1"/>
+                </a:solidFill>
+                <a:ea typeface="MapoDPP"/>
+              </a:rPr>
+              <a:t>태양광</a:t>
+            </a:r>
+            <a:r>
+              <a:rPr lang="en-US" sz="4400" b="0" i="0" u="none" strike="noStrike" spc="-176">
+                <a:solidFill>
+                  <a:schemeClr val="dk1"/>
+                </a:solidFill>
+                <a:latin typeface="MapoDPP"/>
+              </a:rPr>
+              <a:t> </a:t>
+            </a:r>
+            <a:r>
+              <a:rPr lang="ko-KR" sz="4400" b="0" i="0" u="none" strike="noStrike" spc="-176">
+                <a:solidFill>
+                  <a:schemeClr val="dk1"/>
+                </a:solidFill>
+                <a:ea typeface="MapoDPP"/>
+              </a:rPr>
+              <a:t>발전</a:t>
+            </a:r>
+            <a:r>
+              <a:rPr lang="en-US" sz="4400" b="0" i="0" u="none" strike="noStrike" spc="-176">
+                <a:solidFill>
+                  <a:schemeClr val="dk1"/>
+                </a:solidFill>
+                <a:latin typeface="MapoDPP"/>
+              </a:rPr>
+              <a:t> </a:t>
+            </a:r>
+            <a:r>
+              <a:rPr lang="ko-KR" sz="4400" b="0" i="0" u="none" strike="noStrike" spc="-176">
+                <a:solidFill>
+                  <a:schemeClr val="dk1"/>
+                </a:solidFill>
+                <a:ea typeface="MapoDPP"/>
+              </a:rPr>
+              <a:t>효율</a:t>
+            </a:r>
+            <a:r>
+              <a:rPr lang="en-US" sz="4400" b="0" i="0" u="none" strike="noStrike" spc="-176">
+                <a:solidFill>
+                  <a:schemeClr val="dk1"/>
+                </a:solidFill>
+                <a:latin typeface="MapoDPP"/>
+              </a:rPr>
+              <a:t> </a:t>
+            </a:r>
+            <a:r>
+              <a:rPr lang="ko-KR" sz="4400" b="0" i="0" u="none" strike="noStrike" spc="-176">
+                <a:solidFill>
+                  <a:schemeClr val="dk1"/>
+                </a:solidFill>
+                <a:ea typeface="MapoDPP"/>
+              </a:rPr>
+              <a:t>변화</a:t>
+            </a:r>
+          </a:p>
+        </p:txBody>
+      </p:sp>
+      <p:pic>
+        <p:nvPicPr>
+          <p:cNvPr id="9" name="Picture 9"/>
+          <p:cNvPicPr>
+            <a:picLocks noChangeAspect="1"/>
+          </p:cNvPicPr>
+          <p:nvPr/>
+        </p:nvPicPr>
+        <p:blipFill rotWithShape="1">
+          <a:blip r:embed="rId7"/>
+          <a:stretch>
+            <a:fillRect/>
+          </a:stretch>
+        </p:blipFill>
+        <p:spPr>
+          <a:xfrm>
+            <a:off x="508000" y="152400"/>
+            <a:ext cx="5486400" cy="5486400"/>
+          </a:xfrm>
+          <a:prstGeom prst="rect">
+            <a:avLst/>
+          </a:prstGeom>
+        </p:spPr>
+      </p:pic>
+      <p:sp>
+        <p:nvSpPr>
+          <p:cNvPr id="10" name="TextBox 10"/>
+          <p:cNvSpPr txBox="1"/>
+          <p:nvPr/>
+        </p:nvSpPr>
+        <p:spPr>
+          <a:xfrm>
+            <a:off x="9601200" y="6858000"/>
+            <a:ext cx="13411200" cy="4394200"/>
+          </a:xfrm>
+          <a:prstGeom prst="rect">
+            <a:avLst/>
+          </a:prstGeom>
+        </p:spPr>
+        <p:txBody>
+          <a:bodyPr anchor="t"/>
+          <a:lstStyle/>
+          <a:p>
+            <a:pPr lvl="0" algn="ctr">
+              <a:lnSpc>
+                <a:spcPct val="207000"/>
+              </a:lnSpc>
+              <a:defRPr/>
+            </a:pPr>
+            <a:r>
+              <a:rPr lang="en-GB" sz="3300" b="1" i="0" u="none" strike="noStrike" spc="-154">
+                <a:solidFill>
+                  <a:srgbClr val="000000"/>
+                </a:solidFill>
+                <a:latin typeface="Pretendard Regular"/>
+              </a:rPr>
+              <a:t>- </a:t>
+            </a:r>
+            <a:r>
+              <a:rPr lang="en-US" sz="3300" b="1" i="0" u="none" strike="noStrike" spc="-149">
+                <a:solidFill>
+                  <a:srgbClr val="000000"/>
+                </a:solidFill>
+                <a:latin typeface="Pretendard Regular"/>
+              </a:rPr>
+              <a:t>1</a:t>
+            </a:r>
+            <a:r>
+              <a:rPr lang="ko-KR" sz="3300" b="1" i="0" u="none" strike="noStrike" spc="-149">
+                <a:solidFill>
+                  <a:srgbClr val="000000"/>
+                </a:solidFill>
+                <a:ea typeface="Pretendard Regular"/>
+              </a:rPr>
+              <a:t>월</a:t>
+            </a:r>
+            <a:r>
+              <a:rPr lang="en-US" sz="3300" b="1" i="0" u="none" strike="noStrike" spc="-149">
+                <a:solidFill>
+                  <a:srgbClr val="000000"/>
+                </a:solidFill>
+                <a:latin typeface="Pretendard Regular"/>
+              </a:rPr>
+              <a:t>~12</a:t>
+            </a:r>
+            <a:r>
+              <a:rPr lang="ko-KR" sz="3300" b="1" i="0" u="none" strike="noStrike" spc="-149">
+                <a:solidFill>
+                  <a:srgbClr val="000000"/>
+                </a:solidFill>
+                <a:ea typeface="Pretendard Regular"/>
+              </a:rPr>
+              <a:t>월</a:t>
+            </a:r>
+            <a:r>
+              <a:rPr lang="en-US" sz="3300" b="1" i="0" u="none" strike="noStrike" spc="-149">
+                <a:solidFill>
+                  <a:srgbClr val="000000"/>
+                </a:solidFill>
+                <a:latin typeface="Pretendard Regular"/>
+              </a:rPr>
+              <a:t> </a:t>
+            </a:r>
+            <a:r>
+              <a:rPr lang="ko-KR" sz="3300" b="1" i="0" u="none" strike="noStrike" spc="-149">
+                <a:solidFill>
+                  <a:srgbClr val="000000"/>
+                </a:solidFill>
+                <a:ea typeface="Pretendard Regular"/>
+              </a:rPr>
+              <a:t>월별</a:t>
+            </a:r>
+            <a:r>
+              <a:rPr lang="en-US" sz="3300" b="1" i="0" u="none" strike="noStrike" spc="-149">
+                <a:solidFill>
+                  <a:srgbClr val="000000"/>
+                </a:solidFill>
+                <a:latin typeface="Pretendard Regular"/>
+              </a:rPr>
+              <a:t> </a:t>
+            </a:r>
+            <a:r>
+              <a:rPr lang="ko-KR" sz="3300" b="1" i="0" u="none" strike="noStrike" spc="-149">
+                <a:solidFill>
+                  <a:srgbClr val="000000"/>
+                </a:solidFill>
+                <a:ea typeface="Pretendard Regular"/>
+              </a:rPr>
+              <a:t>발전량</a:t>
+            </a:r>
+            <a:r>
+              <a:rPr lang="en-US" sz="3300" b="1" i="0" u="none" strike="noStrike" spc="-149">
+                <a:solidFill>
+                  <a:srgbClr val="000000"/>
+                </a:solidFill>
+                <a:latin typeface="Pretendard Regular"/>
+              </a:rPr>
+              <a:t> </a:t>
+            </a:r>
+            <a:r>
+              <a:rPr lang="ko-KR" sz="3300" b="1" i="0" u="none" strike="noStrike" spc="-149">
+                <a:solidFill>
+                  <a:srgbClr val="000000"/>
+                </a:solidFill>
+                <a:ea typeface="Pretendard Regular"/>
+              </a:rPr>
+              <a:t>분석</a:t>
+            </a:r>
+            <a:r>
+              <a:rPr lang="en-US" sz="3300" b="1" i="0" u="none" strike="noStrike" spc="-149">
+                <a:solidFill>
+                  <a:srgbClr val="000000"/>
+                </a:solidFill>
+                <a:latin typeface="Pretendard Regular"/>
+              </a:rPr>
+              <a:t> </a:t>
+            </a:r>
+            <a:r>
+              <a:rPr lang="ko-KR" sz="3300" b="1" i="0" u="none" strike="noStrike" spc="-149">
+                <a:solidFill>
+                  <a:srgbClr val="000000"/>
+                </a:solidFill>
+                <a:ea typeface="Pretendard Regular"/>
+              </a:rPr>
+              <a:t>결과</a:t>
+            </a:r>
+            <a:r>
+              <a:rPr lang="en-US" sz="3300" b="1" i="0" u="none" strike="noStrike" spc="-149">
+                <a:solidFill>
+                  <a:srgbClr val="000000"/>
+                </a:solidFill>
+                <a:latin typeface="Pretendard Regular"/>
+              </a:rPr>
+              <a:t>, </a:t>
+            </a:r>
+            <a:r>
+              <a:rPr lang="ko-KR" sz="3300" b="1" i="0" u="none" strike="noStrike" spc="-149">
+                <a:solidFill>
+                  <a:srgbClr val="000000"/>
+                </a:solidFill>
+                <a:ea typeface="Pretendard Regular"/>
+              </a:rPr>
+              <a:t>일조시간이</a:t>
+            </a:r>
+            <a:r>
+              <a:rPr lang="en-US" sz="3300" b="1" i="0" u="none" strike="noStrike" spc="-149">
+                <a:solidFill>
+                  <a:srgbClr val="000000"/>
+                </a:solidFill>
+                <a:latin typeface="Pretendard Regular"/>
+              </a:rPr>
+              <a:t> </a:t>
+            </a:r>
+            <a:r>
+              <a:rPr lang="ko-KR" sz="3300" b="1" i="0" u="none" strike="noStrike" spc="-149">
+                <a:solidFill>
+                  <a:srgbClr val="000000"/>
+                </a:solidFill>
+                <a:ea typeface="Pretendard Regular"/>
+              </a:rPr>
+              <a:t>긴</a:t>
+            </a:r>
+            <a:r>
+              <a:rPr lang="en-US" sz="3300" b="1" i="0" u="none" strike="noStrike" spc="-149">
+                <a:solidFill>
+                  <a:srgbClr val="000000"/>
+                </a:solidFill>
+                <a:latin typeface="Pretendard Regular"/>
+              </a:rPr>
+              <a:t> </a:t>
+            </a:r>
+            <a:r>
+              <a:rPr lang="ko-KR" sz="3300" b="1" i="0" u="none" strike="noStrike" spc="-149">
+                <a:solidFill>
+                  <a:srgbClr val="000000"/>
+                </a:solidFill>
+                <a:ea typeface="Pretendard Regular"/>
+              </a:rPr>
+              <a:t>봄</a:t>
+            </a:r>
+            <a:r>
+              <a:rPr lang="en-US" sz="3300" b="1" i="0" u="none" strike="noStrike" spc="-149">
+                <a:solidFill>
+                  <a:srgbClr val="000000"/>
+                </a:solidFill>
+                <a:latin typeface="Pretendard Regular"/>
+              </a:rPr>
+              <a:t>~</a:t>
+            </a:r>
+            <a:r>
+              <a:rPr lang="ko-KR" sz="3300" b="1" i="0" u="none" strike="noStrike" spc="-149">
+                <a:solidFill>
+                  <a:srgbClr val="000000"/>
+                </a:solidFill>
+                <a:ea typeface="Pretendard Regular"/>
+              </a:rPr>
+              <a:t>여름철에</a:t>
+            </a:r>
+            <a:r>
+              <a:rPr lang="en-US" sz="3300" b="1" i="0" u="none" strike="noStrike" spc="-149">
+                <a:solidFill>
+                  <a:srgbClr val="000000"/>
+                </a:solidFill>
+                <a:latin typeface="Pretendard Regular"/>
+              </a:rPr>
+              <a:t> </a:t>
+            </a:r>
+            <a:r>
+              <a:rPr lang="ko-KR" sz="3300" b="1" i="0" u="none" strike="noStrike" spc="-149">
+                <a:solidFill>
+                  <a:srgbClr val="000000"/>
+                </a:solidFill>
+                <a:ea typeface="Pretendard Regular"/>
+              </a:rPr>
+              <a:t>발전량</a:t>
+            </a:r>
+            <a:r>
+              <a:rPr lang="en-US" sz="3300" b="1" i="0" u="none" strike="noStrike" spc="-149">
+                <a:solidFill>
+                  <a:srgbClr val="000000"/>
+                </a:solidFill>
+                <a:latin typeface="Pretendard Regular"/>
+              </a:rPr>
+              <a:t> </a:t>
+            </a:r>
+            <a:r>
+              <a:rPr lang="ko-KR" sz="3300" b="1" i="0" u="none" strike="noStrike" spc="-149">
+                <a:solidFill>
+                  <a:srgbClr val="000000"/>
+                </a:solidFill>
+                <a:ea typeface="Pretendard Regular"/>
+              </a:rPr>
+              <a:t>집중</a:t>
+            </a:r>
+          </a:p>
+          <a:p>
+            <a:pPr lvl="0" algn="ctr">
+              <a:lnSpc>
+                <a:spcPct val="207000"/>
+              </a:lnSpc>
+              <a:defRPr/>
+            </a:pPr>
+            <a:r>
+              <a:rPr lang="en-US" sz="3300" b="1" i="0" u="none" strike="noStrike" spc="-149">
+                <a:solidFill>
+                  <a:srgbClr val="000000"/>
+                </a:solidFill>
+                <a:latin typeface="Pretendard Regular"/>
+              </a:rPr>
+              <a:t>- </a:t>
+            </a:r>
+            <a:r>
+              <a:rPr lang="ko-KR" sz="3300" b="1" i="0" u="none" strike="noStrike" spc="-149">
+                <a:solidFill>
+                  <a:srgbClr val="000000"/>
+                </a:solidFill>
+                <a:ea typeface="Pretendard Regular"/>
+              </a:rPr>
+              <a:t>일사량이</a:t>
+            </a:r>
+            <a:r>
+              <a:rPr lang="en-US" sz="3300" b="1" i="0" u="none" strike="noStrike" spc="-149">
+                <a:solidFill>
+                  <a:srgbClr val="000000"/>
+                </a:solidFill>
+                <a:latin typeface="Pretendard Regular"/>
+              </a:rPr>
+              <a:t> </a:t>
+            </a:r>
+            <a:r>
+              <a:rPr lang="ko-KR" sz="3300" b="1" i="0" u="none" strike="noStrike" spc="-149">
+                <a:solidFill>
+                  <a:srgbClr val="000000"/>
+                </a:solidFill>
+                <a:ea typeface="Pretendard Regular"/>
+              </a:rPr>
+              <a:t>가장</a:t>
+            </a:r>
+            <a:r>
+              <a:rPr lang="en-US" sz="3300" b="1" i="0" u="none" strike="noStrike" spc="-149">
+                <a:solidFill>
+                  <a:srgbClr val="000000"/>
+                </a:solidFill>
+                <a:latin typeface="Pretendard Regular"/>
+              </a:rPr>
+              <a:t> </a:t>
+            </a:r>
+            <a:r>
+              <a:rPr lang="ko-KR" sz="3300" b="1" i="0" u="none" strike="noStrike" spc="-149">
+                <a:solidFill>
+                  <a:srgbClr val="000000"/>
+                </a:solidFill>
+                <a:ea typeface="Pretendard Regular"/>
+              </a:rPr>
+              <a:t>풍부한</a:t>
+            </a:r>
+            <a:r>
+              <a:rPr lang="en-US" sz="3300" b="1" i="0" u="none" strike="noStrike" spc="-149">
+                <a:solidFill>
+                  <a:srgbClr val="000000"/>
+                </a:solidFill>
+                <a:latin typeface="Pretendard Regular"/>
+              </a:rPr>
+              <a:t> </a:t>
+            </a:r>
+            <a:r>
+              <a:rPr lang="ko-KR" sz="3300" b="1" i="0" u="none" strike="noStrike" spc="-149">
+                <a:solidFill>
+                  <a:srgbClr val="000000"/>
+                </a:solidFill>
+                <a:ea typeface="Pretendard Regular"/>
+              </a:rPr>
+              <a:t>여름철보다</a:t>
+            </a:r>
+            <a:r>
+              <a:rPr lang="en-US" sz="3300" b="1" i="0" u="none" strike="noStrike" spc="-149">
+                <a:solidFill>
+                  <a:srgbClr val="000000"/>
+                </a:solidFill>
+                <a:latin typeface="Pretendard Regular"/>
+              </a:rPr>
+              <a:t> </a:t>
+            </a:r>
+            <a:r>
+              <a:rPr lang="ko-KR" sz="3300" b="1" i="0" u="none" strike="noStrike" spc="-149">
+                <a:solidFill>
+                  <a:srgbClr val="000000"/>
+                </a:solidFill>
+                <a:ea typeface="Pretendard Regular"/>
+              </a:rPr>
+              <a:t>기온이</a:t>
+            </a:r>
+            <a:r>
+              <a:rPr lang="en-US" sz="3300" b="1" i="0" u="none" strike="noStrike" spc="-149">
+                <a:solidFill>
+                  <a:srgbClr val="000000"/>
+                </a:solidFill>
+                <a:latin typeface="Pretendard Regular"/>
+              </a:rPr>
+              <a:t> </a:t>
+            </a:r>
+            <a:r>
+              <a:rPr lang="ko-KR" sz="3300" b="1" i="0" u="none" strike="noStrike" spc="-149">
+                <a:solidFill>
+                  <a:srgbClr val="000000"/>
+                </a:solidFill>
+                <a:ea typeface="Pretendard Regular"/>
+              </a:rPr>
+              <a:t>적당한</a:t>
+            </a:r>
+            <a:r>
+              <a:rPr lang="en-US" sz="3300" b="1" i="0" u="none" strike="noStrike" spc="-149">
+                <a:solidFill>
+                  <a:srgbClr val="000000"/>
+                </a:solidFill>
+                <a:latin typeface="Pretendard Regular"/>
+              </a:rPr>
+              <a:t> 5</a:t>
+            </a:r>
+            <a:r>
+              <a:rPr lang="ko-KR" sz="3300" b="1" i="0" u="none" strike="noStrike" spc="-149">
+                <a:solidFill>
+                  <a:srgbClr val="000000"/>
+                </a:solidFill>
+                <a:ea typeface="Pretendard Regular"/>
+              </a:rPr>
+              <a:t>월경</a:t>
+            </a:r>
+            <a:r>
+              <a:rPr lang="en-US" sz="3300" b="1" i="0" u="none" strike="noStrike" spc="-149">
+                <a:solidFill>
+                  <a:srgbClr val="000000"/>
+                </a:solidFill>
+                <a:latin typeface="Pretendard Regular"/>
+              </a:rPr>
+              <a:t> </a:t>
+            </a:r>
+            <a:r>
+              <a:rPr lang="ko-KR" sz="3300" b="1" i="0" u="none" strike="noStrike" spc="-149">
+                <a:solidFill>
+                  <a:srgbClr val="000000"/>
+                </a:solidFill>
+                <a:ea typeface="Pretendard Regular"/>
+              </a:rPr>
+              <a:t>발전</a:t>
+            </a:r>
+            <a:r>
+              <a:rPr lang="en-US" sz="3300" b="1" i="0" u="none" strike="noStrike" spc="-149">
+                <a:solidFill>
+                  <a:srgbClr val="000000"/>
+                </a:solidFill>
+                <a:latin typeface="Pretendard Regular"/>
+              </a:rPr>
+              <a:t> </a:t>
+            </a:r>
+            <a:r>
+              <a:rPr lang="ko-KR" sz="3300" b="1" i="0" u="none" strike="noStrike" spc="-149">
+                <a:solidFill>
+                  <a:srgbClr val="000000"/>
+                </a:solidFill>
+                <a:ea typeface="Pretendard Regular"/>
+              </a:rPr>
+              <a:t>효율</a:t>
+            </a:r>
+            <a:r>
+              <a:rPr lang="en-US" sz="3300" b="1" i="0" u="none" strike="noStrike" spc="-149">
+                <a:solidFill>
+                  <a:srgbClr val="000000"/>
+                </a:solidFill>
+                <a:latin typeface="Pretendard Regular"/>
+              </a:rPr>
+              <a:t> </a:t>
+            </a:r>
+            <a:r>
+              <a:rPr lang="ko-KR" sz="3300" b="1" i="0" u="none" strike="noStrike" spc="-149">
+                <a:solidFill>
+                  <a:srgbClr val="000000"/>
+                </a:solidFill>
+                <a:ea typeface="Pretendard Regular"/>
+              </a:rPr>
+              <a:t>피크</a:t>
+            </a:r>
+            <a:r>
+              <a:rPr lang="en-US" sz="3300" b="1" i="0" u="none" strike="noStrike" spc="-149">
+                <a:solidFill>
+                  <a:srgbClr val="000000"/>
+                </a:solidFill>
+                <a:latin typeface="Pretendard Regular"/>
+              </a:rPr>
+              <a:t> </a:t>
+            </a:r>
+            <a:r>
+              <a:rPr lang="ko-KR" sz="3300" b="1" i="0" u="none" strike="noStrike" spc="-149">
+                <a:solidFill>
+                  <a:srgbClr val="000000"/>
+                </a:solidFill>
+                <a:ea typeface="Pretendard Regular"/>
+              </a:rPr>
+              <a:t>발생</a:t>
+            </a:r>
+          </a:p>
+          <a:p>
+            <a:pPr lvl="0" algn="ctr">
+              <a:lnSpc>
+                <a:spcPct val="207000"/>
+              </a:lnSpc>
+              <a:defRPr/>
+            </a:pPr>
+            <a:r>
+              <a:rPr lang="en-US" sz="3300" b="1" i="0" u="none" strike="noStrike" spc="-149">
+                <a:solidFill>
+                  <a:srgbClr val="000000"/>
+                </a:solidFill>
+                <a:latin typeface="Pretendard Regular"/>
+              </a:rPr>
+              <a:t>- </a:t>
+            </a:r>
+            <a:r>
+              <a:rPr lang="ko-KR" sz="3300" b="1" i="0" u="none" strike="noStrike" spc="-149">
+                <a:solidFill>
+                  <a:srgbClr val="000000"/>
+                </a:solidFill>
+                <a:ea typeface="Pretendard Regular"/>
+              </a:rPr>
+              <a:t>여름철</a:t>
+            </a:r>
+            <a:r>
+              <a:rPr lang="en-US" sz="3300" b="1" i="0" u="none" strike="noStrike" spc="-149">
+                <a:solidFill>
+                  <a:srgbClr val="000000"/>
+                </a:solidFill>
+                <a:latin typeface="Pretendard Regular"/>
+              </a:rPr>
+              <a:t> </a:t>
+            </a:r>
+            <a:r>
+              <a:rPr lang="ko-KR" sz="3300" b="1" i="0" u="none" strike="noStrike" spc="-149">
+                <a:solidFill>
+                  <a:srgbClr val="000000"/>
+                </a:solidFill>
+                <a:ea typeface="Pretendard Regular"/>
+              </a:rPr>
+              <a:t>고온으로</a:t>
+            </a:r>
+            <a:r>
+              <a:rPr lang="en-US" sz="3300" b="1" i="0" u="none" strike="noStrike" spc="-149">
+                <a:solidFill>
+                  <a:srgbClr val="000000"/>
+                </a:solidFill>
+                <a:latin typeface="Pretendard Regular"/>
+              </a:rPr>
+              <a:t> </a:t>
+            </a:r>
+            <a:r>
+              <a:rPr lang="ko-KR" sz="3300" b="1" i="0" u="none" strike="noStrike" spc="-149">
+                <a:solidFill>
+                  <a:srgbClr val="000000"/>
+                </a:solidFill>
+                <a:ea typeface="Pretendard Regular"/>
+              </a:rPr>
+              <a:t>인한</a:t>
+            </a:r>
+            <a:r>
+              <a:rPr lang="en-US" sz="3300" b="1" i="0" u="none" strike="noStrike" spc="-149">
+                <a:solidFill>
+                  <a:srgbClr val="000000"/>
+                </a:solidFill>
+                <a:latin typeface="Pretendard Regular"/>
+              </a:rPr>
+              <a:t> '</a:t>
+            </a:r>
+            <a:r>
+              <a:rPr lang="ko-KR" sz="3300" b="1" i="0" u="none" strike="noStrike" spc="-149">
+                <a:solidFill>
+                  <a:srgbClr val="000000"/>
+                </a:solidFill>
+                <a:ea typeface="Pretendard Regular"/>
+              </a:rPr>
+              <a:t>온도계수</a:t>
+            </a:r>
+            <a:r>
+              <a:rPr lang="en-US" sz="3300" b="1" i="0" u="none" strike="noStrike" spc="-149">
+                <a:solidFill>
+                  <a:srgbClr val="000000"/>
+                </a:solidFill>
+                <a:latin typeface="Pretendard Regular"/>
+              </a:rPr>
+              <a:t>' </a:t>
+            </a:r>
+            <a:r>
+              <a:rPr lang="ko-KR" sz="3300" b="1" i="0" u="none" strike="noStrike" spc="-149">
+                <a:solidFill>
+                  <a:srgbClr val="000000"/>
+                </a:solidFill>
+                <a:ea typeface="Pretendard Regular"/>
+              </a:rPr>
+              <a:t>현상으로</a:t>
+            </a:r>
+            <a:r>
+              <a:rPr lang="en-US" sz="3300" b="1" i="0" u="none" strike="noStrike" spc="-149">
+                <a:solidFill>
+                  <a:srgbClr val="000000"/>
+                </a:solidFill>
+                <a:latin typeface="Pretendard Regular"/>
+              </a:rPr>
+              <a:t> </a:t>
+            </a:r>
+            <a:r>
+              <a:rPr lang="ko-KR" sz="3300" b="1" i="0" u="none" strike="noStrike" spc="-149">
+                <a:solidFill>
+                  <a:srgbClr val="000000"/>
+                </a:solidFill>
+                <a:ea typeface="Pretendard Regular"/>
+              </a:rPr>
+              <a:t>패널</a:t>
+            </a:r>
+            <a:r>
+              <a:rPr lang="en-US" sz="3300" b="1" i="0" u="none" strike="noStrike" spc="-149">
+                <a:solidFill>
+                  <a:srgbClr val="000000"/>
+                </a:solidFill>
+                <a:latin typeface="Pretendard Regular"/>
+              </a:rPr>
+              <a:t> </a:t>
+            </a:r>
+            <a:r>
+              <a:rPr lang="ko-KR" sz="3300" b="1" i="0" u="none" strike="noStrike" spc="-149">
+                <a:solidFill>
+                  <a:srgbClr val="000000"/>
+                </a:solidFill>
+                <a:ea typeface="Pretendard Regular"/>
+              </a:rPr>
+              <a:t>효율</a:t>
+            </a:r>
+            <a:r>
+              <a:rPr lang="en-US" sz="3300" b="1" i="0" u="none" strike="noStrike" spc="-149">
+                <a:solidFill>
+                  <a:srgbClr val="000000"/>
+                </a:solidFill>
+                <a:latin typeface="Pretendard Regular"/>
+              </a:rPr>
+              <a:t> </a:t>
+            </a:r>
+            <a:r>
+              <a:rPr lang="ko-KR" sz="3300" b="1" i="0" u="none" strike="noStrike" spc="-149">
+                <a:solidFill>
+                  <a:srgbClr val="000000"/>
+                </a:solidFill>
+                <a:ea typeface="Pretendard Regular"/>
+              </a:rPr>
+              <a:t>저하</a:t>
+            </a:r>
+            <a:r>
+              <a:rPr lang="en-US" sz="3300" b="1" i="0" u="none" strike="noStrike" spc="-149">
+                <a:solidFill>
+                  <a:srgbClr val="000000"/>
+                </a:solidFill>
+                <a:latin typeface="Pretendard Regular"/>
+              </a:rPr>
+              <a:t> </a:t>
+            </a:r>
+            <a:r>
+              <a:rPr lang="ko-KR" sz="3300" b="1" i="0" u="none" strike="noStrike" spc="-149">
+                <a:solidFill>
+                  <a:srgbClr val="000000"/>
+                </a:solidFill>
+                <a:ea typeface="Pretendard Regular"/>
+              </a:rPr>
+              <a:t>확인</a:t>
+            </a:r>
+          </a:p>
+          <a:p>
+            <a:pPr lvl="0" algn="ctr">
+              <a:lnSpc>
+                <a:spcPct val="207000"/>
+              </a:lnSpc>
+              <a:defRPr/>
+            </a:pPr>
+            <a:r>
+              <a:rPr lang="en-US" sz="3300" b="1" i="0" u="none" strike="noStrike" spc="-249">
+                <a:solidFill>
+                  <a:srgbClr val="000000"/>
+                </a:solidFill>
+                <a:latin typeface="Pretendard Regular"/>
+              </a:rPr>
+              <a:t>- </a:t>
+            </a:r>
+            <a:r>
+              <a:rPr lang="ko-KR" sz="3300" b="1" i="0" u="none" strike="noStrike" spc="-249">
+                <a:solidFill>
+                  <a:srgbClr val="000000"/>
+                </a:solidFill>
+                <a:ea typeface="Pretendard Regular"/>
+              </a:rPr>
+              <a:t>계절별</a:t>
+            </a:r>
+            <a:r>
+              <a:rPr lang="en-US" sz="3300" b="1" i="0" u="none" strike="noStrike" spc="-249">
+                <a:solidFill>
+                  <a:srgbClr val="000000"/>
+                </a:solidFill>
+                <a:latin typeface="Pretendard Regular"/>
+              </a:rPr>
+              <a:t> </a:t>
+            </a:r>
+            <a:r>
+              <a:rPr lang="ko-KR" sz="3300" b="1" i="0" u="none" strike="noStrike" spc="-249">
+                <a:solidFill>
+                  <a:srgbClr val="000000"/>
+                </a:solidFill>
+                <a:ea typeface="Pretendard Regular"/>
+              </a:rPr>
+              <a:t>특성을</a:t>
+            </a:r>
+            <a:r>
+              <a:rPr lang="en-US" sz="3300" b="1" i="0" u="none" strike="noStrike" spc="-249">
+                <a:solidFill>
+                  <a:srgbClr val="000000"/>
+                </a:solidFill>
+                <a:latin typeface="Pretendard Regular"/>
+              </a:rPr>
+              <a:t> </a:t>
+            </a:r>
+            <a:r>
+              <a:rPr lang="ko-KR" sz="3300" b="1" i="0" u="none" strike="noStrike" spc="-249">
+                <a:solidFill>
+                  <a:srgbClr val="000000"/>
+                </a:solidFill>
+                <a:ea typeface="Pretendard Regular"/>
+              </a:rPr>
+              <a:t>고려한</a:t>
+            </a:r>
+            <a:r>
+              <a:rPr lang="en-US" sz="3300" b="1" i="0" u="none" strike="noStrike" spc="-249">
+                <a:solidFill>
+                  <a:srgbClr val="000000"/>
+                </a:solidFill>
+                <a:latin typeface="Pretendard Regular"/>
+              </a:rPr>
+              <a:t> </a:t>
+            </a:r>
+            <a:r>
+              <a:rPr lang="ko-KR" sz="3300" b="1" i="0" u="none" strike="noStrike" spc="-249">
+                <a:solidFill>
+                  <a:srgbClr val="000000"/>
+                </a:solidFill>
+                <a:ea typeface="Pretendard Regular"/>
+              </a:rPr>
+              <a:t>발전</a:t>
+            </a:r>
+            <a:r>
+              <a:rPr lang="en-US" sz="3300" b="1" i="0" u="none" strike="noStrike" spc="-249">
+                <a:solidFill>
+                  <a:srgbClr val="000000"/>
+                </a:solidFill>
+                <a:latin typeface="Pretendard Regular"/>
+              </a:rPr>
+              <a:t> </a:t>
+            </a:r>
+            <a:r>
+              <a:rPr lang="ko-KR" sz="3300" b="1" i="0" u="none" strike="noStrike" spc="-249">
+                <a:solidFill>
+                  <a:srgbClr val="000000"/>
+                </a:solidFill>
+                <a:ea typeface="Pretendard Regular"/>
+              </a:rPr>
+              <a:t>시스템</a:t>
+            </a:r>
+            <a:r>
+              <a:rPr lang="en-US" sz="3300" b="1" i="0" u="none" strike="noStrike" spc="-249">
+                <a:solidFill>
+                  <a:srgbClr val="000000"/>
+                </a:solidFill>
+                <a:latin typeface="Pretendard Regular"/>
+              </a:rPr>
+              <a:t> </a:t>
+            </a:r>
+            <a:r>
+              <a:rPr lang="ko-KR" sz="3300" b="1" i="0" u="none" strike="noStrike" spc="-249">
+                <a:solidFill>
+                  <a:srgbClr val="000000"/>
+                </a:solidFill>
+                <a:ea typeface="Pretendard Regular"/>
+              </a:rPr>
+              <a:t>최적화</a:t>
+            </a:r>
+            <a:r>
+              <a:rPr lang="en-US" sz="3300" b="1" i="0" u="none" strike="noStrike" spc="-249">
+                <a:solidFill>
+                  <a:srgbClr val="000000"/>
+                </a:solidFill>
+                <a:latin typeface="Pretendard Regular"/>
+              </a:rPr>
+              <a:t> </a:t>
+            </a:r>
+            <a:r>
+              <a:rPr lang="ko-KR" sz="3300" b="1" i="0" u="none" strike="noStrike" spc="-249">
+                <a:solidFill>
+                  <a:srgbClr val="000000"/>
+                </a:solidFill>
+                <a:ea typeface="Pretendard Regular"/>
+              </a:rPr>
+              <a:t>및</a:t>
+            </a:r>
+            <a:r>
+              <a:rPr lang="en-US" sz="3300" b="1" i="0" u="none" strike="noStrike" spc="-249">
+                <a:solidFill>
+                  <a:srgbClr val="000000"/>
+                </a:solidFill>
+                <a:latin typeface="Pretendard Regular"/>
+              </a:rPr>
+              <a:t> </a:t>
+            </a:r>
+            <a:r>
+              <a:rPr lang="ko-KR" sz="3300" b="1" i="0" u="none" strike="noStrike" spc="-249">
+                <a:solidFill>
+                  <a:srgbClr val="000000"/>
+                </a:solidFill>
+                <a:ea typeface="Pretendard Regular"/>
+              </a:rPr>
+              <a:t>유지보수</a:t>
+            </a:r>
+            <a:r>
+              <a:rPr lang="en-US" sz="3300" b="1" i="0" u="none" strike="noStrike" spc="-249">
+                <a:solidFill>
+                  <a:srgbClr val="000000"/>
+                </a:solidFill>
+                <a:latin typeface="Pretendard Regular"/>
+              </a:rPr>
+              <a:t> </a:t>
+            </a:r>
+            <a:r>
+              <a:rPr lang="ko-KR" sz="3300" b="1" i="0" u="none" strike="noStrike" spc="-249">
+                <a:solidFill>
+                  <a:srgbClr val="000000"/>
+                </a:solidFill>
+                <a:ea typeface="Pretendard Regular"/>
+              </a:rPr>
+              <a:t>전략</a:t>
+            </a:r>
+            <a:r>
+              <a:rPr lang="en-US" sz="3300" b="1" i="0" u="none" strike="noStrike" spc="-249">
+                <a:solidFill>
+                  <a:srgbClr val="000000"/>
+                </a:solidFill>
+                <a:latin typeface="Pretendard Regular"/>
+              </a:rPr>
+              <a:t> </a:t>
+            </a:r>
+            <a:r>
+              <a:rPr lang="ko-KR" sz="3300" b="1" i="0" u="none" strike="noStrike" spc="-249">
+                <a:solidFill>
+                  <a:srgbClr val="000000"/>
+                </a:solidFill>
+                <a:ea typeface="Pretendard Regular"/>
+              </a:rPr>
+              <a:t>필요</a:t>
+            </a:r>
+          </a:p>
+        </p:txBody>
+      </p:sp>
     </p:spTree>
   </p:cSld>
   <p:clrMapOvr>

--- a/국내 지역별 태양광 발전 효율 분석 및 최적화 전략.pptx
+++ b/국내 지역별 태양광 발전 효율 분석 및 최적화 전략.pptx
@@ -17998,7 +17998,7 @@
         </p:blipFill>
         <p:spPr>
           <a:xfrm>
-            <a:off x="844550" y="-1667510"/>
+            <a:off x="897129" y="411619"/>
             <a:ext cx="5486400" cy="5486400"/>
           </a:xfrm>
           <a:prstGeom prst="rect">
@@ -18124,20 +18124,67 @@
             </a:endParaRPr>
           </a:p>
           <a:p>
-            <a:pPr lvl="0" algn="l">
+            <a:pPr marL="571500" lvl="0" indent="-571500" algn="l">
               <a:lnSpc>
                 <a:spcPct val="116199"/>
               </a:lnSpc>
+              <a:buFontTx/>
+              <a:buChar char="-"/>
             </a:pPr>
             <a:r>
-              <a:rPr lang="en-US" altLang="ko-KR" sz="3600" b="0" i="0" u="none" strike="noStrike" dirty="0">
+              <a:rPr lang="ko-KR" altLang="en-US" sz="3600" b="0" i="0" u="none" strike="noStrike" dirty="0">
                 <a:solidFill>
                   <a:srgbClr val="000000"/>
                 </a:solidFill>
                 <a:latin typeface="+mn-ea"/>
               </a:rPr>
-              <a:t>- </a:t>
-            </a:r>
+              <a:t>문제 제기</a:t>
+            </a:r>
+            <a:endParaRPr lang="en-US" altLang="ko-KR" sz="3600" b="0" i="0" u="none" strike="noStrike" dirty="0">
+              <a:solidFill>
+                <a:srgbClr val="000000"/>
+              </a:solidFill>
+              <a:latin typeface="+mn-ea"/>
+            </a:endParaRPr>
+          </a:p>
+          <a:p>
+            <a:pPr marL="571500" lvl="0" indent="-571500" algn="l">
+              <a:lnSpc>
+                <a:spcPct val="116199"/>
+              </a:lnSpc>
+              <a:buFontTx/>
+              <a:buChar char="-"/>
+            </a:pPr>
+            <a:endParaRPr lang="en-US" altLang="ko-KR" sz="3600" dirty="0">
+              <a:solidFill>
+                <a:srgbClr val="000000"/>
+              </a:solidFill>
+              <a:latin typeface="+mn-ea"/>
+            </a:endParaRPr>
+          </a:p>
+          <a:p>
+            <a:pPr marL="571500" lvl="0" indent="-571500" algn="l">
+              <a:lnSpc>
+                <a:spcPct val="116199"/>
+              </a:lnSpc>
+              <a:buFontTx/>
+              <a:buChar char="-"/>
+            </a:pPr>
+            <a:endParaRPr lang="en-US" altLang="ko-KR" sz="3600" b="0" i="0" u="none" strike="noStrike" dirty="0">
+              <a:solidFill>
+                <a:srgbClr val="000000"/>
+              </a:solidFill>
+              <a:latin typeface="+mn-ea"/>
+            </a:endParaRPr>
+          </a:p>
+          <a:p>
+            <a:pPr marL="571500" lvl="0" indent="-571500" algn="l">
+              <a:lnSpc>
+                <a:spcPct val="116199"/>
+              </a:lnSpc>
+              <a:buFontTx/>
+              <a:buChar char="-"/>
+            </a:pPr>
             <a:r>
               <a:rPr lang="ko-KR" altLang="en-US" sz="3600" b="0" i="0" u="none" strike="noStrike" dirty="0">
                 <a:solidFill>
@@ -18145,7 +18192,7 @@
                 </a:solidFill>
                 <a:latin typeface="+mn-ea"/>
               </a:rPr>
-              <a:t>문제 제기</a:t>
+              <a:t>기사 캡쳐</a:t>
             </a:r>
             <a:endParaRPr lang="ko-KR" sz="3600" b="0" i="0" u="none" strike="noStrike" dirty="0">
               <a:solidFill>
@@ -20509,7 +20556,7 @@
     <mc:Choice Requires="p14">
       <p:transition/>
     </mc:Choice>
-    <mc:Fallback xmlns:dsp="http://schemas.microsoft.com/office/drawing/2008/diagram" xmlns:dgm="http://schemas.openxmlformats.org/drawingml/2006/diagram" xmlns:c="http://schemas.openxmlformats.org/drawingml/2006/chart" xmlns="">
+    <mc:Fallback xmlns="" xmlns:c="http://schemas.openxmlformats.org/drawingml/2006/chart" xmlns:dgm="http://schemas.openxmlformats.org/drawingml/2006/diagram" xmlns:dsp="http://schemas.microsoft.com/office/drawing/2008/diagram">
       <p:transition/>
     </mc:Fallback>
   </mc:AlternateContent>
@@ -20924,7 +20971,7 @@
     <mc:Choice Requires="p14">
       <p:transition/>
     </mc:Choice>
-    <mc:Fallback xmlns:dsp="http://schemas.microsoft.com/office/drawing/2008/diagram" xmlns:dgm="http://schemas.openxmlformats.org/drawingml/2006/diagram" xmlns:c="http://schemas.openxmlformats.org/drawingml/2006/chart" xmlns="">
+    <mc:Fallback xmlns="" xmlns:c="http://schemas.openxmlformats.org/drawingml/2006/chart" xmlns:dgm="http://schemas.openxmlformats.org/drawingml/2006/diagram" xmlns:dsp="http://schemas.microsoft.com/office/drawing/2008/diagram">
       <p:transition/>
     </mc:Fallback>
   </mc:AlternateContent>
@@ -21336,7 +21383,7 @@
     <mc:Choice Requires="p14">
       <p:transition/>
     </mc:Choice>
-    <mc:Fallback xmlns:dsp="http://schemas.microsoft.com/office/drawing/2008/diagram" xmlns:dgm="http://schemas.openxmlformats.org/drawingml/2006/diagram" xmlns:c="http://schemas.openxmlformats.org/drawingml/2006/chart" xmlns="">
+    <mc:Fallback xmlns="" xmlns:c="http://schemas.openxmlformats.org/drawingml/2006/chart" xmlns:dgm="http://schemas.openxmlformats.org/drawingml/2006/diagram" xmlns:dsp="http://schemas.microsoft.com/office/drawing/2008/diagram">
       <p:transition/>
     </mc:Fallback>
   </mc:AlternateContent>
